--- a/ruggine_chat_presentazione.pptx
+++ b/ruggine_chat_presentazione.pptx
@@ -13638,7 +13638,7 @@
         </p:nvSpPr>
         <p:spPr>
           <a:xfrm>
-            <a:off x="4667250" y="1572964"/>
+            <a:off x="4667250" y="1372939"/>
             <a:ext cx="4177665" cy="400050"/>
           </a:xfrm>
           <a:prstGeom prst="rect">
@@ -13666,6 +13666,7 @@
               </a:defRPr>
             </a:pPr>
             <a:r>
+              <a:rPr dirty="0"/>
               <a:t>Multi-threaded Async Runtime</a:t>
             </a:r>
             <a:endParaRPr lang="en-US" sz="1050" dirty="0"/>
@@ -13682,17 +13683,115 @@
               </a:defRPr>
             </a:pPr>
             <a:r>
-              <a:t>Tokio è il motore asincrono che fa girare tutto il sistema, sia backend che frontend. Nel backend, ogni nuova connessione WebSocket crea tre task concorrenti che lavorano in parallelo: uno per scrivere messaggi al client, uno per leggere i suoi input, e uno per gestire le notifiche broadcast. Nel frontend, Tokio gestisce la connessione client verso il server usando tokio-tungstenite. Il sistema usa primitives come select! per gestire eventi multipli simultaneamente e interval per operazioni periodiche come gli heartbeat.</a:t>
-            </a:r>
+              <a:rPr lang="it-IT" sz="1300" dirty="0"/>
+              <a:t>Tokio è il motore asincrono che fa girare tutto il sistema, sia </a:t>
+            </a:r>
+            <a:r>
+              <a:rPr lang="it-IT" sz="1300" dirty="0" err="1"/>
+              <a:t>backend</a:t>
+            </a:r>
+            <a:r>
+              <a:rPr lang="it-IT" sz="1300" dirty="0"/>
+              <a:t> che </a:t>
+            </a:r>
+            <a:r>
+              <a:rPr lang="it-IT" sz="1300" dirty="0" err="1"/>
+              <a:t>frontend</a:t>
+            </a:r>
+            <a:r>
+              <a:rPr lang="it-IT" sz="1300" dirty="0"/>
+              <a:t>. Nel </a:t>
+            </a:r>
+            <a:r>
+              <a:rPr lang="it-IT" sz="1300" dirty="0" err="1"/>
+              <a:t>backend</a:t>
+            </a:r>
+            <a:r>
+              <a:rPr lang="it-IT" sz="1300" dirty="0"/>
+              <a:t>, ogni nuova connessione </a:t>
+            </a:r>
+            <a:r>
+              <a:rPr lang="it-IT" sz="1300" dirty="0" err="1"/>
+              <a:t>WebSocket</a:t>
+            </a:r>
+            <a:r>
+              <a:rPr lang="it-IT" sz="1300" dirty="0"/>
+              <a:t> crea tre task concorrenti che lavorano in parallelo: uno per scrivere messaggi al client, uno per leggere i suoi input, e uno per gestire le notifiche broadcast. Il </a:t>
+            </a:r>
+            <a:r>
+              <a:rPr lang="it-IT" sz="1300" dirty="0" err="1"/>
+              <a:t>Receiver</a:t>
+            </a:r>
+            <a:r>
+              <a:rPr lang="it-IT" sz="1300" dirty="0"/>
+              <a:t> </a:t>
+            </a:r>
+            <a:r>
+              <a:rPr lang="it-IT" sz="1300" dirty="0" err="1"/>
+              <a:t>spawna</a:t>
+            </a:r>
+            <a:r>
+              <a:rPr lang="it-IT" sz="1300" dirty="0"/>
+              <a:t> un task per ogni conversazione attiva dell'utente. Nel </a:t>
+            </a:r>
+            <a:r>
+              <a:rPr lang="it-IT" sz="1300" dirty="0" err="1"/>
+              <a:t>frontend</a:t>
+            </a:r>
+            <a:r>
+              <a:rPr lang="it-IT" sz="1300" dirty="0"/>
+              <a:t>, Tokio gestisce la connessione client verso il server usando </a:t>
+            </a:r>
+            <a:r>
+              <a:rPr lang="it-IT" sz="1300" dirty="0" err="1"/>
+              <a:t>tokio-tungstenite</a:t>
+            </a:r>
+            <a:r>
+              <a:rPr lang="it-IT" sz="1300" dirty="0"/>
+              <a:t>. Il sistema usa </a:t>
+            </a:r>
+            <a:r>
+              <a:rPr lang="it-IT" sz="1300" dirty="0" err="1"/>
+              <a:t>primitives</a:t>
+            </a:r>
+            <a:r>
+              <a:rPr lang="it-IT" sz="1300" dirty="0"/>
+              <a:t> come </a:t>
+            </a:r>
+            <a:r>
+              <a:rPr lang="it-IT" sz="1300" dirty="0" err="1"/>
+              <a:t>select</a:t>
+            </a:r>
+            <a:r>
+              <a:rPr lang="it-IT" sz="1300" dirty="0"/>
+              <a:t>! per gestire eventi multipli simultaneamente e </a:t>
+            </a:r>
+            <a:r>
+              <a:rPr lang="it-IT" sz="1300" dirty="0" err="1"/>
+              <a:t>interval</a:t>
+            </a:r>
+            <a:r>
+              <a:rPr lang="it-IT" sz="1300" dirty="0"/>
+              <a:t> per operazioni periodiche come gli </a:t>
+            </a:r>
+            <a:r>
+              <a:rPr lang="it-IT" sz="1300" dirty="0" err="1"/>
+              <a:t>heartbeat</a:t>
+            </a:r>
+            <a:r>
+              <a:rPr lang="it-IT" sz="1300" dirty="0"/>
+              <a:t>.</a:t>
+            </a:r>
+            <a:endParaRPr dirty="0"/>
           </a:p>
         </p:txBody>
       </p:sp>
       <p:pic>
         <p:nvPicPr>
-          <p:cNvPr id="22" name="Immagine 21">
+          <p:cNvPr id="6" name="Immagine 5" descr="Immagine che contiene testo, schermata, Carattere, documento&#10;&#10;Il contenuto generato dall'IA potrebbe non essere corretto.">
             <a:extLst>
               <a:ext uri="{FF2B5EF4-FFF2-40B4-BE49-F238E27FC236}">
-                <a16:creationId xmlns:a16="http://schemas.microsoft.com/office/drawing/2014/main" id="{C9C2DC0E-46A3-27E3-BC9D-26A5278E3313}"/>
+                <a16:creationId xmlns:a16="http://schemas.microsoft.com/office/drawing/2014/main" id="{D2BA32ED-D9FF-5E7E-EB05-C9ADA3FB5605}"/>
               </a:ext>
             </a:extLst>
           </p:cNvPr>
@@ -13709,8 +13808,8 @@
         </p:blipFill>
         <p:spPr>
           <a:xfrm>
-            <a:off x="698686" y="1252972"/>
-            <a:ext cx="2952382" cy="3191593"/>
+            <a:off x="686709" y="976616"/>
+            <a:ext cx="3020758" cy="3570536"/>
           </a:xfrm>
           <a:prstGeom prst="rect">
             <a:avLst/>

--- a/ruggine_chat_presentazione.pptx
+++ b/ruggine_chat_presentazione.pptx
@@ -5,34 +5,33 @@
     <p:sldMasterId id="2147483648" r:id="rId1"/>
   </p:sldMasterIdLst>
   <p:notesMasterIdLst>
-    <p:notesMasterId r:id="rId27"/>
+    <p:notesMasterId r:id="rId26"/>
   </p:notesMasterIdLst>
   <p:sldIdLst>
     <p:sldId id="256" r:id="rId2"/>
     <p:sldId id="282" r:id="rId3"/>
     <p:sldId id="283" r:id="rId4"/>
     <p:sldId id="259" r:id="rId5"/>
-    <p:sldId id="260" r:id="rId6"/>
-    <p:sldId id="261" r:id="rId7"/>
-    <p:sldId id="262" r:id="rId8"/>
+    <p:sldId id="262" r:id="rId6"/>
+    <p:sldId id="260" r:id="rId7"/>
+    <p:sldId id="261" r:id="rId8"/>
     <p:sldId id="263" r:id="rId9"/>
-    <p:sldId id="264" r:id="rId10"/>
-    <p:sldId id="265" r:id="rId11"/>
+    <p:sldId id="265" r:id="rId10"/>
+    <p:sldId id="264" r:id="rId11"/>
     <p:sldId id="266" r:id="rId12"/>
-    <p:sldId id="267" r:id="rId13"/>
-    <p:sldId id="268" r:id="rId14"/>
-    <p:sldId id="269" r:id="rId15"/>
-    <p:sldId id="270" r:id="rId16"/>
-    <p:sldId id="271" r:id="rId17"/>
-    <p:sldId id="272" r:id="rId18"/>
-    <p:sldId id="273" r:id="rId19"/>
-    <p:sldId id="274" r:id="rId20"/>
-    <p:sldId id="275" r:id="rId21"/>
-    <p:sldId id="276" r:id="rId22"/>
-    <p:sldId id="277" r:id="rId23"/>
-    <p:sldId id="278" r:id="rId24"/>
-    <p:sldId id="279" r:id="rId25"/>
-    <p:sldId id="281" r:id="rId26"/>
+    <p:sldId id="268" r:id="rId13"/>
+    <p:sldId id="269" r:id="rId14"/>
+    <p:sldId id="270" r:id="rId15"/>
+    <p:sldId id="271" r:id="rId16"/>
+    <p:sldId id="272" r:id="rId17"/>
+    <p:sldId id="273" r:id="rId18"/>
+    <p:sldId id="274" r:id="rId19"/>
+    <p:sldId id="275" r:id="rId20"/>
+    <p:sldId id="276" r:id="rId21"/>
+    <p:sldId id="277" r:id="rId22"/>
+    <p:sldId id="278" r:id="rId23"/>
+    <p:sldId id="279" r:id="rId24"/>
+    <p:sldId id="281" r:id="rId25"/>
   </p:sldIdLst>
   <p:sldSz cx="9144000" cy="5143500" type="screen16x9"/>
   <p:notesSz cx="5143500" cy="9144000"/>
@@ -1671,90 +1670,6 @@
             <a:fld id="{F7021451-1387-4CA6-816F-3879F97B5CBC}" type="slidenum">
               <a:rPr lang="en-US"/>
               <a:t>24</a:t>
-            </a:fld>
-            <a:endParaRPr lang="en-US"/>
-          </a:p>
-        </p:txBody>
-      </p:sp>
-    </p:spTree>
-    <p:extLst>
-      <p:ext uri="{BB962C8B-B14F-4D97-AF65-F5344CB8AC3E}">
-        <p14:creationId xmlns:p14="http://schemas.microsoft.com/office/powerpoint/2010/main" val="1024086991"/>
-      </p:ext>
-    </p:extLst>
-  </p:cSld>
-  <p:clrMapOvr>
-    <a:masterClrMapping/>
-  </p:clrMapOvr>
-</p:notes>
-</file>
-
-<file path=ppt/notesSlides/notesSlide25.xml><?xml version="1.0" encoding="utf-8"?>
-<p:notes xmlns:a="http://schemas.openxmlformats.org/drawingml/2006/main" xmlns:r="http://schemas.openxmlformats.org/officeDocument/2006/relationships" xmlns:p="http://schemas.openxmlformats.org/presentationml/2006/main">
-  <p:cSld>
-    <p:spTree>
-      <p:nvGrpSpPr>
-        <p:cNvPr id="1" name=""/>
-        <p:cNvGrpSpPr/>
-        <p:nvPr/>
-      </p:nvGrpSpPr>
-      <p:grpSpPr>
-        <a:xfrm>
-          <a:off x="0" y="0"/>
-          <a:ext cx="0" cy="0"/>
-          <a:chOff x="0" y="0"/>
-          <a:chExt cx="0" cy="0"/>
-        </a:xfrm>
-      </p:grpSpPr>
-      <p:sp>
-        <p:nvSpPr>
-          <p:cNvPr id="2" name="Slide Image Placeholder 1"/>
-          <p:cNvSpPr>
-            <a:spLocks noGrp="1" noRot="1" noChangeAspect="1"/>
-          </p:cNvSpPr>
-          <p:nvPr>
-            <p:ph type="sldImg"/>
-          </p:nvPr>
-        </p:nvSpPr>
-        <p:spPr/>
-      </p:sp>
-      <p:sp>
-        <p:nvSpPr>
-          <p:cNvPr id="3" name="Notes Placeholder 2"/>
-          <p:cNvSpPr>
-            <a:spLocks noGrp="1"/>
-          </p:cNvSpPr>
-          <p:nvPr>
-            <p:ph type="body" idx="1"/>
-          </p:nvPr>
-        </p:nvSpPr>
-        <p:spPr/>
-        <p:txBody>
-          <a:bodyPr/>
-          <a:lstStyle/>
-          <a:p>
-            <a:endParaRPr lang="en-US" dirty="0"/>
-          </a:p>
-        </p:txBody>
-      </p:sp>
-      <p:sp>
-        <p:nvSpPr>
-          <p:cNvPr id="4" name="Slide Number Placeholder 3"/>
-          <p:cNvSpPr>
-            <a:spLocks noGrp="1"/>
-          </p:cNvSpPr>
-          <p:nvPr>
-            <p:ph type="sldNum" sz="quarter" idx="10"/>
-          </p:nvPr>
-        </p:nvSpPr>
-        <p:spPr/>
-        <p:txBody>
-          <a:bodyPr/>
-          <a:lstStyle/>
-          <a:p>
-            <a:fld id="{F7021451-1387-4CA6-816F-3879F97B5CBC}" type="slidenum">
-              <a:rPr lang="en-US"/>
-              <a:t>25</a:t>
             </a:fld>
             <a:endParaRPr lang="en-US"/>
           </a:p>
@@ -2854,7 +2769,7 @@
 
 <file path=ppt/slides/slide10.xml><?xml version="1.0" encoding="utf-8"?>
 <p:sld xmlns:a="http://schemas.openxmlformats.org/drawingml/2006/main" xmlns:r="http://schemas.openxmlformats.org/officeDocument/2006/relationships" xmlns:p="http://schemas.openxmlformats.org/presentationml/2006/main">
-  <p:cSld name="Slide 10">
+  <p:cSld name="Slide 9">
     <p:bg>
       <p:bgPr>
         <a:solidFill>
@@ -2886,7 +2801,7 @@
         <p:spPr>
           <a:xfrm>
             <a:off x="381000" y="228600"/>
-            <a:ext cx="5693283" cy="323850"/>
+            <a:ext cx="6995160" cy="323850"/>
           </a:xfrm>
           <a:prstGeom prst="rect">
             <a:avLst/>
@@ -2913,7 +2828,7 @@
                 <a:ea typeface="Segoe UI" pitchFamily="34" charset="-122"/>
                 <a:cs typeface="Segoe UI" pitchFamily="34" charset="-120"/>
               </a:rPr>
-              <a:t>Backend: Security - Argon2id + JWT</a:t>
+              <a:t>Backend: Dual Sequencing - Implementation</a:t>
             </a:r>
             <a:endParaRPr lang="en-US" sz="2550" dirty="0"/>
           </a:p>
@@ -2921,24 +2836,22 @@
       </p:sp>
       <p:sp>
         <p:nvSpPr>
-          <p:cNvPr id="23" name="Text 21"/>
+          <p:cNvPr id="26" name="Text 24"/>
           <p:cNvSpPr/>
           <p:nvPr/>
         </p:nvSpPr>
         <p:spPr>
           <a:xfrm>
-            <a:off x="4667250" y="778600"/>
-            <a:ext cx="4095750" cy="3738699"/>
+            <a:off x="4778284" y="813163"/>
+            <a:ext cx="4095750" cy="4101737"/>
           </a:xfrm>
           <a:prstGeom prst="roundRect">
             <a:avLst>
-              <a:gd name="adj" fmla="val 7637"/>
+              <a:gd name="adj" fmla="val 6213"/>
             </a:avLst>
           </a:prstGeom>
           <a:noFill/>
-          <a:ln>
-            <a:noFill/>
-          </a:ln>
+          <a:ln/>
         </p:spPr>
         <p:txBody>
           <a:bodyPr wrap="square" rtlCol="0" anchor="ctr"/>
@@ -2957,7 +2870,19 @@
             </a:pPr>
             <a:r>
               <a:rPr dirty="0"/>
-              <a:t>Production-Grade Authentication</a:t>
+              <a:t>Due Livelli di </a:t>
+            </a:r>
+            <a:r>
+              <a:rPr dirty="0" err="1"/>
+              <a:t>Sequenze</a:t>
+            </a:r>
+            <a:r>
+              <a:rPr dirty="0"/>
+              <a:t> </a:t>
+            </a:r>
+            <a:r>
+              <a:rPr dirty="0" err="1"/>
+              <a:t>Atomiche</a:t>
             </a:r>
             <a:endParaRPr lang="en-US" dirty="0"/>
           </a:p>
@@ -2974,71 +2899,255 @@
             </a:pPr>
             <a:r>
               <a:rPr dirty="0"/>
-              <a:t>L'autenticazione è production-grade con Argon2id per </a:t>
-            </a:r>
-            <a:r>
-              <a:rPr dirty="0" err="1"/>
-              <a:t>l'hashing</a:t>
-            </a:r>
-            <a:r>
-              <a:rPr dirty="0"/>
-              <a:t> delle password e JWT per le </a:t>
-            </a:r>
-            <a:r>
-              <a:rPr dirty="0" err="1"/>
-              <a:t>sessioni</a:t>
-            </a:r>
-            <a:r>
-              <a:rPr dirty="0"/>
-              <a:t>. Argon2id è un </a:t>
-            </a:r>
-            <a:r>
-              <a:rPr dirty="0" err="1"/>
-              <a:t>algoritmo</a:t>
-            </a:r>
-            <a:r>
-              <a:rPr dirty="0"/>
-              <a:t> </a:t>
-            </a:r>
-            <a:r>
-              <a:rPr dirty="0" err="1"/>
-              <a:t>ibrido</a:t>
-            </a:r>
-            <a:r>
-              <a:rPr dirty="0"/>
-              <a:t> </a:t>
-            </a:r>
-            <a:r>
-              <a:rPr dirty="0" err="1"/>
-              <a:t>resistente</a:t>
-            </a:r>
-            <a:r>
-              <a:rPr dirty="0"/>
-              <a:t> </a:t>
-            </a:r>
-            <a:r>
-              <a:rPr dirty="0" err="1"/>
-              <a:t>sia</a:t>
-            </a:r>
-            <a:r>
-              <a:rPr dirty="0"/>
-              <a:t> </a:t>
-            </a:r>
-            <a:r>
-              <a:rPr dirty="0" err="1"/>
-              <a:t>agli</a:t>
-            </a:r>
-            <a:r>
-              <a:rPr dirty="0"/>
-              <a:t> </a:t>
-            </a:r>
-            <a:r>
-              <a:rPr dirty="0" err="1"/>
-              <a:t>attacchi</a:t>
-            </a:r>
-            <a:r>
-              <a:rPr dirty="0"/>
-              <a:t> side-channel </a:t>
+              <a:t>Il </a:t>
+            </a:r>
+            <a:r>
+              <a:rPr dirty="0" err="1"/>
+              <a:t>sistema</a:t>
+            </a:r>
+            <a:r>
+              <a:rPr dirty="0"/>
+              <a:t> </a:t>
+            </a:r>
+            <a:r>
+              <a:rPr dirty="0" err="1"/>
+              <a:t>usa</a:t>
+            </a:r>
+            <a:r>
+              <a:rPr dirty="0"/>
+              <a:t> due </a:t>
+            </a:r>
+            <a:r>
+              <a:rPr dirty="0" err="1"/>
+              <a:t>livelli</a:t>
+            </a:r>
+            <a:r>
+              <a:rPr dirty="0"/>
+              <a:t> di </a:t>
+            </a:r>
+            <a:r>
+              <a:rPr dirty="0" err="1"/>
+              <a:t>sequenze</a:t>
+            </a:r>
+            <a:r>
+              <a:rPr dirty="0"/>
+              <a:t> per </a:t>
+            </a:r>
+            <a:r>
+              <a:rPr dirty="0" err="1"/>
+              <a:t>garantire</a:t>
+            </a:r>
+            <a:r>
+              <a:rPr dirty="0"/>
+              <a:t> </a:t>
+            </a:r>
+            <a:r>
+              <a:rPr dirty="0" err="1"/>
+              <a:t>l'ordine</a:t>
+            </a:r>
+            <a:r>
+              <a:rPr dirty="0"/>
+              <a:t> </a:t>
+            </a:r>
+            <a:r>
+              <a:rPr dirty="0" err="1"/>
+              <a:t>dei</a:t>
+            </a:r>
+            <a:r>
+              <a:rPr dirty="0"/>
+              <a:t> </a:t>
+            </a:r>
+            <a:r>
+              <a:rPr dirty="0" err="1"/>
+              <a:t>messaggi</a:t>
+            </a:r>
+            <a:r>
+              <a:rPr dirty="0"/>
+              <a:t>. Ogni </a:t>
+            </a:r>
+            <a:r>
+              <a:rPr dirty="0" err="1"/>
+              <a:t>messaggio</a:t>
+            </a:r>
+            <a:r>
+              <a:rPr dirty="0"/>
+              <a:t> in </a:t>
+            </a:r>
+            <a:r>
+              <a:rPr dirty="0" err="1"/>
+              <a:t>una</a:t>
+            </a:r>
+            <a:r>
+              <a:rPr dirty="0"/>
+              <a:t> conversazione </a:t>
+            </a:r>
+            <a:r>
+              <a:rPr dirty="0" err="1"/>
+              <a:t>riceve</a:t>
+            </a:r>
+            <a:r>
+              <a:rPr dirty="0"/>
+              <a:t> un </a:t>
+            </a:r>
+            <a:r>
+              <a:rPr dirty="0" err="1"/>
+              <a:t>numero</a:t>
+            </a:r>
+            <a:r>
+              <a:rPr dirty="0"/>
+              <a:t> di </a:t>
+            </a:r>
+            <a:r>
+              <a:rPr dirty="0" err="1"/>
+              <a:t>sequenza</a:t>
+            </a:r>
+            <a:r>
+              <a:rPr dirty="0"/>
+              <a:t> </a:t>
+            </a:r>
+            <a:r>
+              <a:rPr dirty="0" err="1"/>
+              <a:t>incrementale</a:t>
+            </a:r>
+            <a:r>
+              <a:rPr dirty="0"/>
+              <a:t>, </a:t>
+            </a:r>
+            <a:r>
+              <a:rPr dirty="0" err="1"/>
+              <a:t>usato</a:t>
+            </a:r>
+            <a:r>
+              <a:rPr dirty="0"/>
+              <a:t> per </a:t>
+            </a:r>
+            <a:r>
+              <a:rPr dirty="0" err="1"/>
+              <a:t>rilevare</a:t>
+            </a:r>
+            <a:r>
+              <a:rPr dirty="0"/>
+              <a:t> gap e </a:t>
+            </a:r>
+            <a:r>
+              <a:rPr dirty="0" err="1"/>
+              <a:t>implementare</a:t>
+            </a:r>
+            <a:r>
+              <a:rPr dirty="0"/>
+              <a:t> il mark-as-read. </a:t>
+            </a:r>
+            <a:r>
+              <a:rPr dirty="0" err="1"/>
+              <a:t>Gli</a:t>
+            </a:r>
+            <a:r>
+              <a:rPr dirty="0"/>
+              <a:t> </a:t>
+            </a:r>
+            <a:r>
+              <a:rPr dirty="0" err="1"/>
+              <a:t>eventi</a:t>
+            </a:r>
+            <a:r>
+              <a:rPr dirty="0"/>
+              <a:t> cross-conversazione come </a:t>
+            </a:r>
+            <a:r>
+              <a:rPr dirty="0" err="1"/>
+              <a:t>conferme</a:t>
+            </a:r>
+            <a:r>
+              <a:rPr dirty="0"/>
+              <a:t> e </a:t>
+            </a:r>
+            <a:r>
+              <a:rPr dirty="0" err="1"/>
+              <a:t>notifiche</a:t>
+            </a:r>
+            <a:r>
+              <a:rPr dirty="0"/>
+              <a:t> </a:t>
+            </a:r>
+            <a:r>
+              <a:rPr dirty="0" err="1"/>
+              <a:t>ricevono</a:t>
+            </a:r>
+            <a:r>
+              <a:rPr dirty="0"/>
+              <a:t> </a:t>
+            </a:r>
+            <a:r>
+              <a:rPr dirty="0" err="1"/>
+              <a:t>invece</a:t>
+            </a:r>
+            <a:r>
+              <a:rPr dirty="0"/>
+              <a:t> </a:t>
+            </a:r>
+            <a:r>
+              <a:rPr dirty="0" err="1"/>
+              <a:t>una</a:t>
+            </a:r>
+            <a:r>
+              <a:rPr dirty="0"/>
+              <a:t> </a:t>
+            </a:r>
+            <a:r>
+              <a:rPr dirty="0" err="1"/>
+              <a:t>sequenza</a:t>
+            </a:r>
+            <a:r>
+              <a:rPr dirty="0"/>
+              <a:t> </a:t>
+            </a:r>
+            <a:r>
+              <a:rPr dirty="0" err="1"/>
+              <a:t>globale</a:t>
+            </a:r>
+            <a:r>
+              <a:rPr dirty="0"/>
+              <a:t> per </a:t>
+            </a:r>
+            <a:r>
+              <a:rPr dirty="0" err="1"/>
+              <a:t>utente</a:t>
+            </a:r>
+            <a:r>
+              <a:rPr dirty="0"/>
+              <a:t>. Le </a:t>
+            </a:r>
+            <a:r>
+              <a:rPr dirty="0" err="1"/>
+              <a:t>sequenze</a:t>
+            </a:r>
+            <a:r>
+              <a:rPr dirty="0"/>
+              <a:t> </a:t>
+            </a:r>
+            <a:r>
+              <a:rPr dirty="0" err="1"/>
+              <a:t>sono</a:t>
+            </a:r>
+            <a:r>
+              <a:rPr dirty="0"/>
+              <a:t> generate </a:t>
+            </a:r>
+            <a:r>
+              <a:rPr dirty="0" err="1"/>
+              <a:t>atomicamente</a:t>
+            </a:r>
+            <a:r>
+              <a:rPr dirty="0"/>
+              <a:t> </a:t>
+            </a:r>
+            <a:r>
+              <a:rPr dirty="0" err="1"/>
+              <a:t>tramite</a:t>
+            </a:r>
+            <a:r>
+              <a:rPr dirty="0"/>
+              <a:t> subquery SQL </a:t>
             </a:r>
             <a:r>
               <a:rPr dirty="0" err="1"/>
@@ -3046,193 +3155,89 @@
             </a:r>
             <a:r>
               <a:rPr dirty="0"/>
-              <a:t> a </a:t>
-            </a:r>
-            <a:r>
-              <a:rPr dirty="0" err="1"/>
-              <a:t>quelli</a:t>
-            </a:r>
-            <a:r>
-              <a:rPr dirty="0"/>
-              <a:t> GPU-based. Ogni password </a:t>
-            </a:r>
-            <a:r>
-              <a:rPr dirty="0" err="1"/>
-              <a:t>viene</a:t>
-            </a:r>
-            <a:r>
-              <a:rPr dirty="0"/>
-              <a:t> </a:t>
-            </a:r>
-            <a:r>
-              <a:rPr dirty="0" err="1"/>
-              <a:t>hashata</a:t>
-            </a:r>
-            <a:r>
-              <a:rPr dirty="0"/>
-              <a:t> con un salt </a:t>
-            </a:r>
-            <a:r>
-              <a:rPr dirty="0" err="1"/>
-              <a:t>crittograficamente</a:t>
-            </a:r>
-            <a:r>
-              <a:rPr dirty="0"/>
-              <a:t> </a:t>
-            </a:r>
-            <a:r>
-              <a:rPr dirty="0" err="1"/>
-              <a:t>sicuro</a:t>
-            </a:r>
-            <a:r>
-              <a:rPr dirty="0"/>
-              <a:t> prima di </a:t>
-            </a:r>
-            <a:r>
-              <a:rPr dirty="0" err="1"/>
-              <a:t>essere</a:t>
-            </a:r>
-            <a:r>
-              <a:rPr dirty="0"/>
-              <a:t> </a:t>
-            </a:r>
-            <a:r>
-              <a:rPr dirty="0" err="1"/>
-              <a:t>salvata</a:t>
-            </a:r>
-            <a:r>
-              <a:rPr dirty="0"/>
-              <a:t>. I JWT token </a:t>
-            </a:r>
-            <a:r>
-              <a:rPr dirty="0" err="1"/>
-              <a:t>contengono</a:t>
-            </a:r>
-            <a:r>
-              <a:rPr dirty="0"/>
-              <a:t> </a:t>
-            </a:r>
-            <a:r>
-              <a:rPr dirty="0" err="1"/>
-              <a:t>user_id</a:t>
-            </a:r>
-            <a:r>
-              <a:rPr dirty="0"/>
-              <a:t>, username e </a:t>
-            </a:r>
-            <a:r>
-              <a:rPr dirty="0" err="1"/>
-              <a:t>scadenza</a:t>
-            </a:r>
-            <a:r>
-              <a:rPr dirty="0"/>
-              <a:t> a 24 ore, </a:t>
-            </a:r>
-            <a:r>
-              <a:rPr dirty="0" err="1"/>
-              <a:t>firmati</a:t>
-            </a:r>
-            <a:r>
-              <a:rPr dirty="0"/>
-              <a:t> con HMAC-SHA256. Un middleware </a:t>
-            </a:r>
-            <a:r>
-              <a:rPr dirty="0" err="1"/>
-              <a:t>valida</a:t>
-            </a:r>
-            <a:r>
-              <a:rPr dirty="0"/>
-              <a:t> </a:t>
-            </a:r>
-            <a:r>
-              <a:rPr dirty="0" err="1"/>
-              <a:t>automaticamente</a:t>
-            </a:r>
-            <a:r>
-              <a:rPr dirty="0"/>
-              <a:t> il token </a:t>
-            </a:r>
-            <a:r>
-              <a:rPr dirty="0" err="1"/>
-              <a:t>su</a:t>
-            </a:r>
-            <a:r>
-              <a:rPr dirty="0"/>
-              <a:t> ogni </a:t>
-            </a:r>
-            <a:r>
-              <a:rPr dirty="0" err="1"/>
-              <a:t>richiesta</a:t>
-            </a:r>
-            <a:r>
-              <a:rPr dirty="0"/>
-              <a:t> </a:t>
-            </a:r>
-            <a:r>
-              <a:rPr dirty="0" err="1"/>
-              <a:t>protetta</a:t>
-            </a:r>
-            <a:r>
-              <a:rPr dirty="0"/>
-              <a:t>, </a:t>
-            </a:r>
-            <a:r>
-              <a:rPr dirty="0" err="1"/>
-              <a:t>estraendo</a:t>
-            </a:r>
-            <a:r>
-              <a:rPr dirty="0"/>
-              <a:t> le </a:t>
-            </a:r>
-            <a:r>
-              <a:rPr dirty="0" err="1"/>
-              <a:t>credenziali</a:t>
-            </a:r>
-            <a:r>
-              <a:rPr dirty="0"/>
-              <a:t> e </a:t>
-            </a:r>
-            <a:r>
-              <a:rPr dirty="0" err="1"/>
-              <a:t>verificando</a:t>
-            </a:r>
-            <a:r>
-              <a:rPr dirty="0"/>
-              <a:t> </a:t>
-            </a:r>
-            <a:r>
-              <a:rPr dirty="0" err="1"/>
-              <a:t>che</a:t>
-            </a:r>
-            <a:r>
-              <a:rPr dirty="0"/>
-              <a:t> non </a:t>
-            </a:r>
-            <a:r>
-              <a:rPr dirty="0" err="1"/>
-              <a:t>sia</a:t>
-            </a:r>
-            <a:r>
-              <a:rPr dirty="0"/>
-              <a:t> </a:t>
-            </a:r>
-            <a:r>
-              <a:rPr dirty="0" err="1"/>
-              <a:t>scaduto</a:t>
-            </a:r>
-            <a:r>
-              <a:rPr dirty="0"/>
-              <a:t>.</a:t>
+              <a:t> </a:t>
+            </a:r>
+            <a:r>
+              <a:rPr dirty="0" err="1"/>
+              <a:t>usano</a:t>
+            </a:r>
+            <a:r>
+              <a:rPr dirty="0"/>
+              <a:t> COALESCE per </a:t>
+            </a:r>
+            <a:r>
+              <a:rPr dirty="0" err="1"/>
+              <a:t>gestire</a:t>
+            </a:r>
+            <a:r>
+              <a:rPr dirty="0"/>
+              <a:t> il primo </a:t>
+            </a:r>
+            <a:r>
+              <a:rPr dirty="0" err="1"/>
+              <a:t>inserimento</a:t>
+            </a:r>
+            <a:r>
+              <a:rPr dirty="0"/>
+              <a:t>. </a:t>
+            </a:r>
+            <a:r>
+              <a:rPr dirty="0" err="1"/>
+              <a:t>Questo</a:t>
+            </a:r>
+            <a:r>
+              <a:rPr dirty="0"/>
+              <a:t> </a:t>
+            </a:r>
+            <a:r>
+              <a:rPr dirty="0" err="1"/>
+              <a:t>approccio</a:t>
+            </a:r>
+            <a:r>
+              <a:rPr dirty="0"/>
+              <a:t> </a:t>
+            </a:r>
+            <a:r>
+              <a:rPr dirty="0" err="1"/>
+              <a:t>sfrutta</a:t>
+            </a:r>
+            <a:r>
+              <a:rPr dirty="0"/>
+              <a:t> la </a:t>
+            </a:r>
+            <a:r>
+              <a:rPr dirty="0" err="1"/>
+              <a:t>serializzabilità</a:t>
+            </a:r>
+            <a:r>
+              <a:rPr dirty="0"/>
+              <a:t> delle </a:t>
+            </a:r>
+            <a:r>
+              <a:rPr dirty="0" err="1"/>
+              <a:t>transazioni</a:t>
+            </a:r>
+            <a:r>
+              <a:rPr dirty="0"/>
+              <a:t> SQLite per </a:t>
+            </a:r>
+            <a:r>
+              <a:rPr dirty="0" err="1"/>
+              <a:t>evitare</a:t>
+            </a:r>
+            <a:r>
+              <a:rPr dirty="0"/>
+              <a:t> race condition.</a:t>
             </a:r>
           </a:p>
         </p:txBody>
       </p:sp>
       <p:pic>
         <p:nvPicPr>
-          <p:cNvPr id="22" name="Immagine 21" descr="Immagine che contiene testo, schermata, Carattere&#10;&#10;Il contenuto generato dall'IA potrebbe non essere corretto.">
+          <p:cNvPr id="25" name="Immagine 24" descr="Immagine che contiene testo, schermata, Carattere&#10;&#10;Il contenuto generato dall'IA potrebbe non essere corretto.">
             <a:extLst>
               <a:ext uri="{FF2B5EF4-FFF2-40B4-BE49-F238E27FC236}">
-                <a16:creationId xmlns:a16="http://schemas.microsoft.com/office/drawing/2014/main" id="{A87370BB-3C30-5052-56E7-693EE4295AE9}"/>
+                <a16:creationId xmlns:a16="http://schemas.microsoft.com/office/drawing/2014/main" id="{CEAACDDA-5E61-47A0-6B66-3B25D517136F}"/>
               </a:ext>
             </a:extLst>
           </p:cNvPr>
@@ -3249,8 +3254,8 @@
         </p:blipFill>
         <p:spPr>
           <a:xfrm>
-            <a:off x="869588" y="1189689"/>
-            <a:ext cx="3401966" cy="2981178"/>
+            <a:off x="962105" y="1209925"/>
+            <a:ext cx="2976346" cy="3175574"/>
           </a:xfrm>
           <a:prstGeom prst="rect">
             <a:avLst/>
@@ -3428,601 +3433,6 @@
 
 <file path=ppt/slides/slide12.xml><?xml version="1.0" encoding="utf-8"?>
 <p:sld xmlns:a="http://schemas.openxmlformats.org/drawingml/2006/main" xmlns:r="http://schemas.openxmlformats.org/officeDocument/2006/relationships" xmlns:p="http://schemas.openxmlformats.org/presentationml/2006/main">
-  <p:cSld name="Slide 12">
-    <p:bg>
-      <p:bgPr>
-        <a:solidFill>
-          <a:srgbClr val="FFFFFF"/>
-        </a:solidFill>
-        <a:effectLst/>
-      </p:bgPr>
-    </p:bg>
-    <p:spTree>
-      <p:nvGrpSpPr>
-        <p:cNvPr id="1" name=""/>
-        <p:cNvGrpSpPr/>
-        <p:nvPr/>
-      </p:nvGrpSpPr>
-      <p:grpSpPr>
-        <a:xfrm>
-          <a:off x="0" y="0"/>
-          <a:ext cx="0" cy="0"/>
-          <a:chOff x="0" y="0"/>
-          <a:chExt cx="0" cy="0"/>
-        </a:xfrm>
-      </p:grpSpPr>
-      <p:sp>
-        <p:nvSpPr>
-          <p:cNvPr id="2" name="Text 0"/>
-          <p:cNvSpPr/>
-          <p:nvPr/>
-        </p:nvSpPr>
-        <p:spPr>
-          <a:xfrm>
-            <a:off x="381000" y="228600"/>
-            <a:ext cx="5052060" cy="323850"/>
-          </a:xfrm>
-          <a:prstGeom prst="rect">
-            <a:avLst/>
-          </a:prstGeom>
-          <a:noFill/>
-          <a:ln/>
-        </p:spPr>
-        <p:txBody>
-          <a:bodyPr wrap="square" lIns="0" tIns="0" rIns="0" bIns="0" rtlCol="0" anchor="t"/>
-          <a:lstStyle/>
-          <a:p>
-            <a:pPr marL="0" indent="0" algn="l">
-              <a:lnSpc>
-                <a:spcPts val="2550"/>
-              </a:lnSpc>
-              <a:buNone/>
-            </a:pPr>
-            <a:r>
-              <a:rPr lang="en-US" sz="2550" b="1" dirty="0">
-                <a:solidFill>
-                  <a:srgbClr val="CE422B"/>
-                </a:solidFill>
-                <a:latin typeface="Segoe UI" pitchFamily="34" charset="0"/>
-                <a:ea typeface="Segoe UI" pitchFamily="34" charset="-122"/>
-                <a:cs typeface="Segoe UI" pitchFamily="34" charset="-120"/>
-              </a:rPr>
-              <a:t>Backend: Reliability Guarantees</a:t>
-            </a:r>
-            <a:endParaRPr lang="en-US" sz="2550" dirty="0"/>
-          </a:p>
-        </p:txBody>
-      </p:sp>
-      <p:sp>
-        <p:nvSpPr>
-          <p:cNvPr id="25" name="Text 23"/>
-          <p:cNvSpPr/>
-          <p:nvPr/>
-        </p:nvSpPr>
-        <p:spPr>
-          <a:xfrm>
-            <a:off x="4572000" y="2210721"/>
-            <a:ext cx="4095750" cy="919907"/>
-          </a:xfrm>
-          <a:prstGeom prst="roundRect">
-            <a:avLst>
-              <a:gd name="adj" fmla="val 6213"/>
-            </a:avLst>
-          </a:prstGeom>
-          <a:noFill/>
-          <a:ln/>
-        </p:spPr>
-        <p:txBody>
-          <a:bodyPr wrap="square" rtlCol="0" anchor="ctr"/>
-          <a:lstStyle/>
-          <a:p>
-            <a:pPr marL="0" indent="0">
-              <a:spcAft>
-                <a:spcPts val="1200"/>
-              </a:spcAft>
-              <a:buNone/>
-              <a:defRPr sz="1600" b="1">
-                <a:solidFill>
-                  <a:srgbClr val="0070C0"/>
-                </a:solidFill>
-              </a:defRPr>
-            </a:pPr>
-            <a:r>
-              <a:rPr dirty="0"/>
-              <a:t>Strong Ordering + No Message Loss</a:t>
-            </a:r>
-            <a:endParaRPr lang="en-US" dirty="0"/>
-          </a:p>
-          <a:p>
-            <a:pPr>
-              <a:lnSpc>
-                <a:spcPct val="130000"/>
-              </a:lnSpc>
-              <a:defRPr sz="1300">
-                <a:solidFill>
-                  <a:srgbClr val="404040"/>
-                </a:solidFill>
-              </a:defRPr>
-            </a:pPr>
-            <a:r>
-              <a:rPr dirty="0"/>
-              <a:t>Il </a:t>
-            </a:r>
-            <a:r>
-              <a:rPr dirty="0" err="1"/>
-              <a:t>sistema</a:t>
-            </a:r>
-            <a:r>
-              <a:rPr dirty="0"/>
-              <a:t> </a:t>
-            </a:r>
-            <a:r>
-              <a:rPr dirty="0" err="1"/>
-              <a:t>garantisce</a:t>
-            </a:r>
-            <a:r>
-              <a:rPr dirty="0"/>
-              <a:t> </a:t>
-            </a:r>
-            <a:r>
-              <a:rPr dirty="0" err="1"/>
-              <a:t>ordinamento</a:t>
-            </a:r>
-            <a:r>
-              <a:rPr dirty="0"/>
-              <a:t> </a:t>
-            </a:r>
-            <a:r>
-              <a:rPr dirty="0" err="1"/>
-              <a:t>totale</a:t>
-            </a:r>
-            <a:r>
-              <a:rPr dirty="0"/>
-              <a:t> e zero </a:t>
-            </a:r>
-            <a:r>
-              <a:rPr dirty="0" err="1"/>
-              <a:t>perdita</a:t>
-            </a:r>
-            <a:r>
-              <a:rPr dirty="0"/>
-              <a:t> di </a:t>
-            </a:r>
-            <a:r>
-              <a:rPr dirty="0" err="1"/>
-              <a:t>messaggi</a:t>
-            </a:r>
-            <a:r>
-              <a:rPr dirty="0"/>
-              <a:t> </a:t>
-            </a:r>
-            <a:r>
-              <a:rPr dirty="0" err="1"/>
-              <a:t>attraverso</a:t>
-            </a:r>
-            <a:r>
-              <a:rPr dirty="0"/>
-              <a:t> gap detection </a:t>
-            </a:r>
-            <a:r>
-              <a:rPr dirty="0" err="1"/>
-              <a:t>automatico</a:t>
-            </a:r>
-            <a:r>
-              <a:rPr dirty="0"/>
-              <a:t>. Il client </a:t>
-            </a:r>
-            <a:r>
-              <a:rPr dirty="0" err="1"/>
-              <a:t>traccia</a:t>
-            </a:r>
-            <a:r>
-              <a:rPr dirty="0"/>
-              <a:t> la </a:t>
-            </a:r>
-            <a:r>
-              <a:rPr dirty="0" err="1"/>
-              <a:t>sequenza</a:t>
-            </a:r>
-            <a:r>
-              <a:rPr dirty="0"/>
-              <a:t> </a:t>
-            </a:r>
-            <a:r>
-              <a:rPr dirty="0" err="1"/>
-              <a:t>attesa</a:t>
-            </a:r>
-            <a:r>
-              <a:rPr dirty="0"/>
-              <a:t> per ogni conversazione. Se </a:t>
-            </a:r>
-            <a:r>
-              <a:rPr dirty="0" err="1"/>
-              <a:t>arriva</a:t>
-            </a:r>
-            <a:r>
-              <a:rPr dirty="0"/>
-              <a:t> un </a:t>
-            </a:r>
-            <a:r>
-              <a:rPr dirty="0" err="1"/>
-              <a:t>messaggio</a:t>
-            </a:r>
-            <a:r>
-              <a:rPr dirty="0"/>
-              <a:t> con </a:t>
-            </a:r>
-            <a:r>
-              <a:rPr dirty="0" err="1"/>
-              <a:t>sequenza</a:t>
-            </a:r>
-            <a:r>
-              <a:rPr dirty="0"/>
-              <a:t> </a:t>
-            </a:r>
-            <a:r>
-              <a:rPr dirty="0" err="1"/>
-              <a:t>superiore</a:t>
-            </a:r>
-            <a:r>
-              <a:rPr dirty="0"/>
-              <a:t>, </a:t>
-            </a:r>
-            <a:r>
-              <a:rPr dirty="0" err="1"/>
-              <a:t>significa</a:t>
-            </a:r>
-            <a:r>
-              <a:rPr dirty="0"/>
-              <a:t> </a:t>
-            </a:r>
-            <a:r>
-              <a:rPr dirty="0" err="1"/>
-              <a:t>che</a:t>
-            </a:r>
-            <a:r>
-              <a:rPr dirty="0"/>
-              <a:t> ne </a:t>
-            </a:r>
-            <a:r>
-              <a:rPr dirty="0" err="1"/>
-              <a:t>mancano</a:t>
-            </a:r>
-            <a:r>
-              <a:rPr dirty="0"/>
-              <a:t> </a:t>
-            </a:r>
-            <a:r>
-              <a:rPr dirty="0" err="1"/>
-              <a:t>alcuni</a:t>
-            </a:r>
-            <a:r>
-              <a:rPr dirty="0"/>
-              <a:t>: il </a:t>
-            </a:r>
-            <a:r>
-              <a:rPr dirty="0" err="1"/>
-              <a:t>messaggio</a:t>
-            </a:r>
-            <a:r>
-              <a:rPr dirty="0"/>
-              <a:t> </a:t>
-            </a:r>
-            <a:r>
-              <a:rPr dirty="0" err="1"/>
-              <a:t>futuro</a:t>
-            </a:r>
-            <a:r>
-              <a:rPr dirty="0"/>
-              <a:t> </a:t>
-            </a:r>
-            <a:r>
-              <a:rPr dirty="0" err="1"/>
-              <a:t>viene</a:t>
-            </a:r>
-            <a:r>
-              <a:rPr dirty="0"/>
-              <a:t> </a:t>
-            </a:r>
-            <a:r>
-              <a:rPr dirty="0" err="1"/>
-              <a:t>bufferizzato</a:t>
-            </a:r>
-            <a:r>
-              <a:rPr dirty="0"/>
-              <a:t> in un </a:t>
-            </a:r>
-            <a:r>
-              <a:rPr dirty="0" err="1"/>
-              <a:t>BTreeMap</a:t>
-            </a:r>
-            <a:r>
-              <a:rPr dirty="0"/>
-              <a:t> </a:t>
-            </a:r>
-            <a:r>
-              <a:rPr dirty="0" err="1"/>
-              <a:t>ordinato</a:t>
-            </a:r>
-            <a:r>
-              <a:rPr dirty="0"/>
-              <a:t> e </a:t>
-            </a:r>
-            <a:r>
-              <a:rPr dirty="0" err="1"/>
-              <a:t>viene</a:t>
-            </a:r>
-            <a:r>
-              <a:rPr dirty="0"/>
-              <a:t> </a:t>
-            </a:r>
-            <a:r>
-              <a:rPr dirty="0" err="1"/>
-              <a:t>richiesto</a:t>
-            </a:r>
-            <a:r>
-              <a:rPr dirty="0"/>
-              <a:t> al server il </a:t>
-            </a:r>
-            <a:r>
-              <a:rPr dirty="0" err="1"/>
-              <a:t>recupero</a:t>
-            </a:r>
-            <a:r>
-              <a:rPr dirty="0"/>
-              <a:t> di </a:t>
-            </a:r>
-            <a:r>
-              <a:rPr dirty="0" err="1"/>
-              <a:t>quelli</a:t>
-            </a:r>
-            <a:r>
-              <a:rPr dirty="0"/>
-              <a:t> </a:t>
-            </a:r>
-            <a:r>
-              <a:rPr dirty="0" err="1"/>
-              <a:t>mancanti</a:t>
-            </a:r>
-            <a:r>
-              <a:rPr dirty="0"/>
-              <a:t>. Il server </a:t>
-            </a:r>
-            <a:r>
-              <a:rPr dirty="0" err="1"/>
-              <a:t>risponde</a:t>
-            </a:r>
-            <a:r>
-              <a:rPr dirty="0"/>
-              <a:t> con </a:t>
-            </a:r>
-            <a:r>
-              <a:rPr dirty="0" err="1"/>
-              <a:t>una</a:t>
-            </a:r>
-            <a:r>
-              <a:rPr dirty="0"/>
-              <a:t> query </a:t>
-            </a:r>
-            <a:r>
-              <a:rPr dirty="0" err="1"/>
-              <a:t>che</a:t>
-            </a:r>
-            <a:r>
-              <a:rPr dirty="0"/>
-              <a:t> </a:t>
-            </a:r>
-            <a:r>
-              <a:rPr dirty="0" err="1"/>
-              <a:t>estrae</a:t>
-            </a:r>
-            <a:r>
-              <a:rPr dirty="0"/>
-              <a:t> tutti </a:t>
-            </a:r>
-            <a:r>
-              <a:rPr dirty="0" err="1"/>
-              <a:t>i</a:t>
-            </a:r>
-            <a:r>
-              <a:rPr dirty="0"/>
-              <a:t> </a:t>
-            </a:r>
-            <a:r>
-              <a:rPr dirty="0" err="1"/>
-              <a:t>messaggi</a:t>
-            </a:r>
-            <a:r>
-              <a:rPr dirty="0"/>
-              <a:t> dal punto di </a:t>
-            </a:r>
-            <a:r>
-              <a:rPr dirty="0" err="1"/>
-              <a:t>interruzione</a:t>
-            </a:r>
-            <a:r>
-              <a:rPr dirty="0"/>
-              <a:t> in poi. Quando </a:t>
-            </a:r>
-            <a:r>
-              <a:rPr dirty="0" err="1"/>
-              <a:t>i</a:t>
-            </a:r>
-            <a:r>
-              <a:rPr dirty="0"/>
-              <a:t> </a:t>
-            </a:r>
-            <a:r>
-              <a:rPr dirty="0" err="1"/>
-              <a:t>messaggi</a:t>
-            </a:r>
-            <a:r>
-              <a:rPr dirty="0"/>
-              <a:t> </a:t>
-            </a:r>
-            <a:r>
-              <a:rPr dirty="0" err="1"/>
-              <a:t>mancanti</a:t>
-            </a:r>
-            <a:r>
-              <a:rPr dirty="0"/>
-              <a:t> </a:t>
-            </a:r>
-            <a:r>
-              <a:rPr dirty="0" err="1"/>
-              <a:t>arrivano</a:t>
-            </a:r>
-            <a:r>
-              <a:rPr dirty="0"/>
-              <a:t>, il buffer </a:t>
-            </a:r>
-            <a:r>
-              <a:rPr dirty="0" err="1"/>
-              <a:t>viene</a:t>
-            </a:r>
-            <a:r>
-              <a:rPr dirty="0"/>
-              <a:t> </a:t>
-            </a:r>
-            <a:r>
-              <a:rPr dirty="0" err="1"/>
-              <a:t>svuotato</a:t>
-            </a:r>
-            <a:r>
-              <a:rPr dirty="0"/>
-              <a:t> in </a:t>
-            </a:r>
-            <a:r>
-              <a:rPr dirty="0" err="1"/>
-              <a:t>ordine</a:t>
-            </a:r>
-            <a:r>
-              <a:rPr dirty="0"/>
-              <a:t>, </a:t>
-            </a:r>
-            <a:r>
-              <a:rPr dirty="0" err="1"/>
-              <a:t>garantendo</a:t>
-            </a:r>
-            <a:r>
-              <a:rPr dirty="0"/>
-              <a:t> </a:t>
-            </a:r>
-            <a:r>
-              <a:rPr dirty="0" err="1"/>
-              <a:t>che</a:t>
-            </a:r>
-            <a:r>
-              <a:rPr dirty="0"/>
-              <a:t> tutti </a:t>
-            </a:r>
-            <a:r>
-              <a:rPr dirty="0" err="1"/>
-              <a:t>i</a:t>
-            </a:r>
-            <a:r>
-              <a:rPr dirty="0"/>
-              <a:t> client </a:t>
-            </a:r>
-            <a:r>
-              <a:rPr dirty="0" err="1"/>
-              <a:t>convergano</a:t>
-            </a:r>
-            <a:r>
-              <a:rPr dirty="0"/>
-              <a:t> </a:t>
-            </a:r>
-            <a:r>
-              <a:rPr dirty="0" err="1"/>
-              <a:t>allo</a:t>
-            </a:r>
-            <a:r>
-              <a:rPr dirty="0"/>
-              <a:t> </a:t>
-            </a:r>
-            <a:r>
-              <a:rPr dirty="0" err="1"/>
-              <a:t>stesso</a:t>
-            </a:r>
-            <a:r>
-              <a:rPr dirty="0"/>
-              <a:t> </a:t>
-            </a:r>
-            <a:r>
-              <a:rPr dirty="0" err="1"/>
-              <a:t>stato</a:t>
-            </a:r>
-            <a:r>
-              <a:rPr dirty="0"/>
-              <a:t> </a:t>
-            </a:r>
-            <a:r>
-              <a:rPr dirty="0" err="1"/>
-              <a:t>anche</a:t>
-            </a:r>
-            <a:r>
-              <a:rPr dirty="0"/>
-              <a:t> in </a:t>
-            </a:r>
-            <a:r>
-              <a:rPr dirty="0" err="1"/>
-              <a:t>presenza</a:t>
-            </a:r>
-            <a:r>
-              <a:rPr dirty="0"/>
-              <a:t> di </a:t>
-            </a:r>
-            <a:r>
-              <a:rPr dirty="0" err="1"/>
-              <a:t>problemi</a:t>
-            </a:r>
-            <a:r>
-              <a:rPr dirty="0"/>
-              <a:t> di rete.</a:t>
-            </a:r>
-          </a:p>
-        </p:txBody>
-      </p:sp>
-      <p:pic>
-        <p:nvPicPr>
-          <p:cNvPr id="24" name="Immagine 23" descr="Immagine che contiene testo, schermata, Carattere&#10;&#10;Il contenuto generato dall'IA potrebbe non essere corretto.">
-            <a:extLst>
-              <a:ext uri="{FF2B5EF4-FFF2-40B4-BE49-F238E27FC236}">
-                <a16:creationId xmlns:a16="http://schemas.microsoft.com/office/drawing/2014/main" id="{E08427E4-C58F-E234-69AD-2E1E6D6996DE}"/>
-              </a:ext>
-            </a:extLst>
-          </p:cNvPr>
-          <p:cNvPicPr>
-            <a:picLocks noChangeAspect="1"/>
-          </p:cNvPicPr>
-          <p:nvPr/>
-        </p:nvPicPr>
-        <p:blipFill>
-          <a:blip r:embed="rId3"/>
-          <a:stretch>
-            <a:fillRect/>
-          </a:stretch>
-        </p:blipFill>
-        <p:spPr>
-          <a:xfrm>
-            <a:off x="923814" y="926210"/>
-            <a:ext cx="2844820" cy="3488930"/>
-          </a:xfrm>
-          <a:prstGeom prst="rect">
-            <a:avLst/>
-          </a:prstGeom>
-        </p:spPr>
-      </p:pic>
-    </p:spTree>
-  </p:cSld>
-  <p:clrMapOvr>
-    <a:masterClrMapping/>
-  </p:clrMapOvr>
-</p:sld>
-</file>
-
-<file path=ppt/slides/slide13.xml><?xml version="1.0" encoding="utf-8"?>
-<p:sld xmlns:a="http://schemas.openxmlformats.org/drawingml/2006/main" xmlns:r="http://schemas.openxmlformats.org/officeDocument/2006/relationships" xmlns:p="http://schemas.openxmlformats.org/presentationml/2006/main">
   <p:cSld name="Slide 13">
     <p:bg>
       <p:bgPr>
@@ -4492,7 +3902,7 @@
 </p:sld>
 </file>
 
-<file path=ppt/slides/slide14.xml><?xml version="1.0" encoding="utf-8"?>
+<file path=ppt/slides/slide13.xml><?xml version="1.0" encoding="utf-8"?>
 <p:sld xmlns:a="http://schemas.openxmlformats.org/drawingml/2006/main" xmlns:r="http://schemas.openxmlformats.org/officeDocument/2006/relationships" xmlns:p="http://schemas.openxmlformats.org/presentationml/2006/main">
   <p:cSld name="Slide 14">
     <p:bg>
@@ -4939,7 +4349,7 @@
 </p:sld>
 </file>
 
-<file path=ppt/slides/slide15.xml><?xml version="1.0" encoding="utf-8"?>
+<file path=ppt/slides/slide14.xml><?xml version="1.0" encoding="utf-8"?>
 <p:sld xmlns:a="http://schemas.openxmlformats.org/drawingml/2006/main" xmlns:r="http://schemas.openxmlformats.org/officeDocument/2006/relationships" xmlns:p="http://schemas.openxmlformats.org/presentationml/2006/main">
   <p:cSld name="Slide 15">
     <p:bg>
@@ -5426,7 +4836,7 @@
 </p:sld>
 </file>
 
-<file path=ppt/slides/slide16.xml><?xml version="1.0" encoding="utf-8"?>
+<file path=ppt/slides/slide15.xml><?xml version="1.0" encoding="utf-8"?>
 <p:sld xmlns:a="http://schemas.openxmlformats.org/drawingml/2006/main" xmlns:r="http://schemas.openxmlformats.org/officeDocument/2006/relationships" xmlns:p="http://schemas.openxmlformats.org/presentationml/2006/main">
   <p:cSld name="Slide 16">
     <p:bg>
@@ -5889,7 +5299,7 @@
 </p:sld>
 </file>
 
-<file path=ppt/slides/slide17.xml><?xml version="1.0" encoding="utf-8"?>
+<file path=ppt/slides/slide16.xml><?xml version="1.0" encoding="utf-8"?>
 <p:sld xmlns:a="http://schemas.openxmlformats.org/drawingml/2006/main" xmlns:r="http://schemas.openxmlformats.org/officeDocument/2006/relationships" xmlns:p="http://schemas.openxmlformats.org/presentationml/2006/main">
   <p:cSld name="Slide 17">
     <p:bg>
@@ -6312,7 +5722,7 @@
 </p:sld>
 </file>
 
-<file path=ppt/slides/slide18.xml><?xml version="1.0" encoding="utf-8"?>
+<file path=ppt/slides/slide17.xml><?xml version="1.0" encoding="utf-8"?>
 <p:sld xmlns:a="http://schemas.openxmlformats.org/drawingml/2006/main" xmlns:r="http://schemas.openxmlformats.org/officeDocument/2006/relationships" xmlns:p="http://schemas.openxmlformats.org/presentationml/2006/main">
   <p:cSld name="Slide 18">
     <p:bg>
@@ -6871,7 +6281,7 @@
 </p:sld>
 </file>
 
-<file path=ppt/slides/slide19.xml><?xml version="1.0" encoding="utf-8"?>
+<file path=ppt/slides/slide18.xml><?xml version="1.0" encoding="utf-8"?>
 <p:sld xmlns:a="http://schemas.openxmlformats.org/drawingml/2006/main" xmlns:r="http://schemas.openxmlformats.org/officeDocument/2006/relationships" xmlns:p="http://schemas.openxmlformats.org/presentationml/2006/main">
   <p:cSld name="Slide 19">
     <p:bg>
@@ -7332,6 +6742,433 @@
           <a:xfrm>
             <a:off x="860379" y="953588"/>
             <a:ext cx="2950567" cy="3570979"/>
+          </a:xfrm>
+          <a:prstGeom prst="rect">
+            <a:avLst/>
+          </a:prstGeom>
+        </p:spPr>
+      </p:pic>
+    </p:spTree>
+  </p:cSld>
+  <p:clrMapOvr>
+    <a:masterClrMapping/>
+  </p:clrMapOvr>
+</p:sld>
+</file>
+
+<file path=ppt/slides/slide19.xml><?xml version="1.0" encoding="utf-8"?>
+<p:sld xmlns:a="http://schemas.openxmlformats.org/drawingml/2006/main" xmlns:r="http://schemas.openxmlformats.org/officeDocument/2006/relationships" xmlns:p="http://schemas.openxmlformats.org/presentationml/2006/main">
+  <p:cSld name="Slide 20">
+    <p:bg>
+      <p:bgPr>
+        <a:solidFill>
+          <a:srgbClr val="FFFFFF"/>
+        </a:solidFill>
+        <a:effectLst/>
+      </p:bgPr>
+    </p:bg>
+    <p:spTree>
+      <p:nvGrpSpPr>
+        <p:cNvPr id="1" name=""/>
+        <p:cNvGrpSpPr/>
+        <p:nvPr/>
+      </p:nvGrpSpPr>
+      <p:grpSpPr>
+        <a:xfrm>
+          <a:off x="0" y="0"/>
+          <a:ext cx="0" cy="0"/>
+          <a:chOff x="0" y="0"/>
+          <a:chExt cx="0" cy="0"/>
+        </a:xfrm>
+      </p:grpSpPr>
+      <p:sp>
+        <p:nvSpPr>
+          <p:cNvPr id="2" name="Text 0"/>
+          <p:cNvSpPr/>
+          <p:nvPr/>
+        </p:nvSpPr>
+        <p:spPr>
+          <a:xfrm>
+            <a:off x="381000" y="228600"/>
+            <a:ext cx="8151305" cy="323850"/>
+          </a:xfrm>
+          <a:prstGeom prst="rect">
+            <a:avLst/>
+          </a:prstGeom>
+          <a:noFill/>
+          <a:ln/>
+        </p:spPr>
+        <p:txBody>
+          <a:bodyPr wrap="square" lIns="0" tIns="0" rIns="0" bIns="0" rtlCol="0" anchor="t"/>
+          <a:lstStyle/>
+          <a:p>
+            <a:pPr marL="0" indent="0" algn="l">
+              <a:lnSpc>
+                <a:spcPts val="2550"/>
+              </a:lnSpc>
+              <a:buNone/>
+            </a:pPr>
+            <a:r>
+              <a:rPr lang="en-US" sz="2550" b="1" dirty="0">
+                <a:solidFill>
+                  <a:srgbClr val="CE422B"/>
+                </a:solidFill>
+                <a:latin typeface="Segoe UI" pitchFamily="34" charset="0"/>
+                <a:ea typeface="Segoe UI" pitchFamily="34" charset="-122"/>
+                <a:cs typeface="Segoe UI" pitchFamily="34" charset="-120"/>
+              </a:rPr>
+              <a:t>Frontend: ConnectionManager - Lifecycle &amp; Backoff</a:t>
+            </a:r>
+            <a:endParaRPr lang="en-US" sz="2550" dirty="0"/>
+          </a:p>
+        </p:txBody>
+      </p:sp>
+      <p:sp>
+        <p:nvSpPr>
+          <p:cNvPr id="29" name="Text 27"/>
+          <p:cNvSpPr/>
+          <p:nvPr/>
+        </p:nvSpPr>
+        <p:spPr>
+          <a:xfrm>
+            <a:off x="4667250" y="2250132"/>
+            <a:ext cx="4095750" cy="575072"/>
+          </a:xfrm>
+          <a:prstGeom prst="roundRect">
+            <a:avLst>
+              <a:gd name="adj" fmla="val 9938"/>
+            </a:avLst>
+          </a:prstGeom>
+          <a:noFill/>
+          <a:ln/>
+        </p:spPr>
+        <p:txBody>
+          <a:bodyPr wrap="square" rtlCol="0" anchor="ctr"/>
+          <a:lstStyle/>
+          <a:p>
+            <a:pPr marL="0" indent="0">
+              <a:spcAft>
+                <a:spcPts val="1200"/>
+              </a:spcAft>
+              <a:buNone/>
+              <a:defRPr sz="1600" b="1">
+                <a:solidFill>
+                  <a:srgbClr val="0070C0"/>
+                </a:solidFill>
+              </a:defRPr>
+            </a:pPr>
+            <a:r>
+              <a:rPr dirty="0"/>
+              <a:t>State Machine + Exponential Backoff</a:t>
+            </a:r>
+            <a:endParaRPr lang="en-US" dirty="0"/>
+          </a:p>
+          <a:p>
+            <a:pPr>
+              <a:lnSpc>
+                <a:spcPct val="130000"/>
+              </a:lnSpc>
+              <a:defRPr sz="1300">
+                <a:solidFill>
+                  <a:srgbClr val="404040"/>
+                </a:solidFill>
+              </a:defRPr>
+            </a:pPr>
+            <a:r>
+              <a:rPr dirty="0"/>
+              <a:t>La </a:t>
+            </a:r>
+            <a:r>
+              <a:rPr dirty="0" err="1"/>
+              <a:t>gestione</a:t>
+            </a:r>
+            <a:r>
+              <a:rPr dirty="0"/>
+              <a:t> delle </a:t>
+            </a:r>
+            <a:r>
+              <a:rPr dirty="0" err="1"/>
+              <a:t>connessioni</a:t>
+            </a:r>
+            <a:r>
+              <a:rPr dirty="0"/>
+              <a:t> </a:t>
+            </a:r>
+            <a:r>
+              <a:rPr dirty="0" err="1"/>
+              <a:t>usa</a:t>
+            </a:r>
+            <a:r>
+              <a:rPr dirty="0"/>
+              <a:t> </a:t>
+            </a:r>
+            <a:r>
+              <a:rPr dirty="0" err="1"/>
+              <a:t>una</a:t>
+            </a:r>
+            <a:r>
+              <a:rPr dirty="0"/>
+              <a:t> state machine con backoff </a:t>
+            </a:r>
+            <a:r>
+              <a:rPr dirty="0" err="1"/>
+              <a:t>esponenziale</a:t>
+            </a:r>
+            <a:r>
+              <a:rPr dirty="0"/>
+              <a:t>. </a:t>
+            </a:r>
+            <a:r>
+              <a:rPr dirty="0" err="1"/>
+              <a:t>Gli</a:t>
+            </a:r>
+            <a:r>
+              <a:rPr dirty="0"/>
+              <a:t> </a:t>
+            </a:r>
+            <a:r>
+              <a:rPr dirty="0" err="1"/>
+              <a:t>stati</a:t>
+            </a:r>
+            <a:r>
+              <a:rPr dirty="0"/>
+              <a:t> </a:t>
+            </a:r>
+            <a:r>
+              <a:rPr dirty="0" err="1"/>
+              <a:t>sono</a:t>
+            </a:r>
+            <a:r>
+              <a:rPr dirty="0"/>
+              <a:t> Disconnected, Connecting e Connected. Quando la </a:t>
+            </a:r>
+            <a:r>
+              <a:rPr dirty="0" err="1"/>
+              <a:t>connessione</a:t>
+            </a:r>
+            <a:r>
+              <a:rPr dirty="0"/>
+              <a:t> </a:t>
+            </a:r>
+            <a:r>
+              <a:rPr dirty="0" err="1"/>
+              <a:t>fallisce</a:t>
+            </a:r>
+            <a:r>
+              <a:rPr dirty="0"/>
+              <a:t>, il </a:t>
+            </a:r>
+            <a:r>
+              <a:rPr dirty="0" err="1"/>
+              <a:t>sistema</a:t>
+            </a:r>
+            <a:r>
+              <a:rPr dirty="0"/>
+              <a:t> </a:t>
+            </a:r>
+            <a:r>
+              <a:rPr dirty="0" err="1"/>
+              <a:t>aspetta</a:t>
+            </a:r>
+            <a:r>
+              <a:rPr dirty="0"/>
+              <a:t> </a:t>
+            </a:r>
+            <a:r>
+              <a:rPr dirty="0" err="1"/>
+              <a:t>progressivamente</a:t>
+            </a:r>
+            <a:r>
+              <a:rPr dirty="0"/>
+              <a:t> </a:t>
+            </a:r>
+            <a:r>
+              <a:rPr dirty="0" err="1"/>
+              <a:t>più</a:t>
+            </a:r>
+            <a:r>
+              <a:rPr dirty="0"/>
+              <a:t> tempo prima di </a:t>
+            </a:r>
+            <a:r>
+              <a:rPr dirty="0" err="1"/>
+              <a:t>riprovare</a:t>
+            </a:r>
+            <a:r>
+              <a:rPr dirty="0"/>
+              <a:t>: 1 secondo, poi 2, 5, 10 e 15 secondi. Al </a:t>
+            </a:r>
+            <a:r>
+              <a:rPr dirty="0" err="1"/>
+              <a:t>sesto</a:t>
+            </a:r>
+            <a:r>
+              <a:rPr dirty="0"/>
+              <a:t> </a:t>
+            </a:r>
+            <a:r>
+              <a:rPr dirty="0" err="1"/>
+              <a:t>tentativo</a:t>
+            </a:r>
+            <a:r>
+              <a:rPr dirty="0"/>
+              <a:t> </a:t>
+            </a:r>
+            <a:r>
+              <a:rPr dirty="0" err="1"/>
+              <a:t>consecutivo</a:t>
+            </a:r>
+            <a:r>
+              <a:rPr dirty="0"/>
+              <a:t> </a:t>
+            </a:r>
+            <a:r>
+              <a:rPr dirty="0" err="1"/>
+              <a:t>fallito</a:t>
+            </a:r>
+            <a:r>
+              <a:rPr dirty="0"/>
+              <a:t> </a:t>
+            </a:r>
+            <a:r>
+              <a:rPr dirty="0" err="1"/>
+              <a:t>viene</a:t>
+            </a:r>
+            <a:r>
+              <a:rPr dirty="0"/>
+              <a:t> </a:t>
+            </a:r>
+            <a:r>
+              <a:rPr dirty="0" err="1"/>
+              <a:t>forzato</a:t>
+            </a:r>
+            <a:r>
+              <a:rPr dirty="0"/>
+              <a:t> il logout per </a:t>
+            </a:r>
+            <a:r>
+              <a:rPr dirty="0" err="1"/>
+              <a:t>evitare</a:t>
+            </a:r>
+            <a:r>
+              <a:rPr dirty="0"/>
+              <a:t> loop </a:t>
+            </a:r>
+            <a:r>
+              <a:rPr dirty="0" err="1"/>
+              <a:t>infiniti</a:t>
+            </a:r>
+            <a:r>
+              <a:rPr dirty="0"/>
+              <a:t>. Il flag </a:t>
+            </a:r>
+            <a:r>
+              <a:rPr dirty="0" err="1"/>
+              <a:t>is_connecting_in_progress</a:t>
+            </a:r>
+            <a:r>
+              <a:rPr dirty="0"/>
+              <a:t> </a:t>
+            </a:r>
+            <a:r>
+              <a:rPr dirty="0" err="1"/>
+              <a:t>previene</a:t>
+            </a:r>
+            <a:r>
+              <a:rPr dirty="0"/>
+              <a:t> </a:t>
+            </a:r>
+            <a:r>
+              <a:rPr dirty="0" err="1"/>
+              <a:t>tentativi</a:t>
+            </a:r>
+            <a:r>
+              <a:rPr dirty="0"/>
+              <a:t> </a:t>
+            </a:r>
+            <a:r>
+              <a:rPr dirty="0" err="1"/>
+              <a:t>multipli</a:t>
+            </a:r>
+            <a:r>
+              <a:rPr dirty="0"/>
+              <a:t> </a:t>
+            </a:r>
+            <a:r>
+              <a:rPr dirty="0" err="1"/>
+              <a:t>simultanei</a:t>
+            </a:r>
+            <a:r>
+              <a:rPr dirty="0"/>
+              <a:t>, </a:t>
+            </a:r>
+            <a:r>
+              <a:rPr dirty="0" err="1"/>
+              <a:t>mentre</a:t>
+            </a:r>
+            <a:r>
+              <a:rPr dirty="0"/>
+              <a:t> </a:t>
+            </a:r>
+            <a:r>
+              <a:rPr dirty="0" err="1"/>
+              <a:t>connection_attempt_start</a:t>
+            </a:r>
+            <a:r>
+              <a:rPr dirty="0"/>
+              <a:t> </a:t>
+            </a:r>
+            <a:r>
+              <a:rPr dirty="0" err="1"/>
+              <a:t>implementa</a:t>
+            </a:r>
+            <a:r>
+              <a:rPr dirty="0"/>
+              <a:t> un timeout di 30 secondi </a:t>
+            </a:r>
+            <a:r>
+              <a:rPr dirty="0" err="1"/>
+              <a:t>sulla</a:t>
+            </a:r>
+            <a:r>
+              <a:rPr dirty="0"/>
+              <a:t> </a:t>
+            </a:r>
+            <a:r>
+              <a:rPr dirty="0" err="1"/>
+              <a:t>fase</a:t>
+            </a:r>
+            <a:r>
+              <a:rPr dirty="0"/>
+              <a:t> di connecting.</a:t>
+            </a:r>
+          </a:p>
+        </p:txBody>
+      </p:sp>
+      <p:pic>
+        <p:nvPicPr>
+          <p:cNvPr id="28" name="Immagine 27" descr="Immagine che contiene testo, schermata, Carattere, numero&#10;&#10;Il contenuto generato dall'IA potrebbe non essere corretto.">
+            <a:extLst>
+              <a:ext uri="{FF2B5EF4-FFF2-40B4-BE49-F238E27FC236}">
+                <a16:creationId xmlns:a16="http://schemas.microsoft.com/office/drawing/2014/main" id="{DCA47F67-1480-1718-97F2-00E2956F751C}"/>
+              </a:ext>
+            </a:extLst>
+          </p:cNvPr>
+          <p:cNvPicPr>
+            <a:picLocks noChangeAspect="1"/>
+          </p:cNvPicPr>
+          <p:nvPr/>
+        </p:nvPicPr>
+        <p:blipFill>
+          <a:blip r:embed="rId3"/>
+          <a:stretch>
+            <a:fillRect/>
+          </a:stretch>
+        </p:blipFill>
+        <p:spPr>
+          <a:xfrm>
+            <a:off x="800913" y="768202"/>
+            <a:ext cx="3176728" cy="3932728"/>
           </a:xfrm>
           <a:prstGeom prst="rect">
             <a:avLst/>
@@ -8297,433 +8134,6 @@
 
 <file path=ppt/slides/slide20.xml><?xml version="1.0" encoding="utf-8"?>
 <p:sld xmlns:a="http://schemas.openxmlformats.org/drawingml/2006/main" xmlns:r="http://schemas.openxmlformats.org/officeDocument/2006/relationships" xmlns:p="http://schemas.openxmlformats.org/presentationml/2006/main">
-  <p:cSld name="Slide 20">
-    <p:bg>
-      <p:bgPr>
-        <a:solidFill>
-          <a:srgbClr val="FFFFFF"/>
-        </a:solidFill>
-        <a:effectLst/>
-      </p:bgPr>
-    </p:bg>
-    <p:spTree>
-      <p:nvGrpSpPr>
-        <p:cNvPr id="1" name=""/>
-        <p:cNvGrpSpPr/>
-        <p:nvPr/>
-      </p:nvGrpSpPr>
-      <p:grpSpPr>
-        <a:xfrm>
-          <a:off x="0" y="0"/>
-          <a:ext cx="0" cy="0"/>
-          <a:chOff x="0" y="0"/>
-          <a:chExt cx="0" cy="0"/>
-        </a:xfrm>
-      </p:grpSpPr>
-      <p:sp>
-        <p:nvSpPr>
-          <p:cNvPr id="2" name="Text 0"/>
-          <p:cNvSpPr/>
-          <p:nvPr/>
-        </p:nvSpPr>
-        <p:spPr>
-          <a:xfrm>
-            <a:off x="381000" y="228600"/>
-            <a:ext cx="8151305" cy="323850"/>
-          </a:xfrm>
-          <a:prstGeom prst="rect">
-            <a:avLst/>
-          </a:prstGeom>
-          <a:noFill/>
-          <a:ln/>
-        </p:spPr>
-        <p:txBody>
-          <a:bodyPr wrap="square" lIns="0" tIns="0" rIns="0" bIns="0" rtlCol="0" anchor="t"/>
-          <a:lstStyle/>
-          <a:p>
-            <a:pPr marL="0" indent="0" algn="l">
-              <a:lnSpc>
-                <a:spcPts val="2550"/>
-              </a:lnSpc>
-              <a:buNone/>
-            </a:pPr>
-            <a:r>
-              <a:rPr lang="en-US" sz="2550" b="1" dirty="0">
-                <a:solidFill>
-                  <a:srgbClr val="CE422B"/>
-                </a:solidFill>
-                <a:latin typeface="Segoe UI" pitchFamily="34" charset="0"/>
-                <a:ea typeface="Segoe UI" pitchFamily="34" charset="-122"/>
-                <a:cs typeface="Segoe UI" pitchFamily="34" charset="-120"/>
-              </a:rPr>
-              <a:t>Frontend: ConnectionManager - Lifecycle &amp; Backoff</a:t>
-            </a:r>
-            <a:endParaRPr lang="en-US" sz="2550" dirty="0"/>
-          </a:p>
-        </p:txBody>
-      </p:sp>
-      <p:sp>
-        <p:nvSpPr>
-          <p:cNvPr id="29" name="Text 27"/>
-          <p:cNvSpPr/>
-          <p:nvPr/>
-        </p:nvSpPr>
-        <p:spPr>
-          <a:xfrm>
-            <a:off x="4667250" y="2250132"/>
-            <a:ext cx="4095750" cy="575072"/>
-          </a:xfrm>
-          <a:prstGeom prst="roundRect">
-            <a:avLst>
-              <a:gd name="adj" fmla="val 9938"/>
-            </a:avLst>
-          </a:prstGeom>
-          <a:noFill/>
-          <a:ln/>
-        </p:spPr>
-        <p:txBody>
-          <a:bodyPr wrap="square" rtlCol="0" anchor="ctr"/>
-          <a:lstStyle/>
-          <a:p>
-            <a:pPr marL="0" indent="0">
-              <a:spcAft>
-                <a:spcPts val="1200"/>
-              </a:spcAft>
-              <a:buNone/>
-              <a:defRPr sz="1600" b="1">
-                <a:solidFill>
-                  <a:srgbClr val="0070C0"/>
-                </a:solidFill>
-              </a:defRPr>
-            </a:pPr>
-            <a:r>
-              <a:rPr dirty="0"/>
-              <a:t>State Machine + Exponential Backoff</a:t>
-            </a:r>
-            <a:endParaRPr lang="en-US" dirty="0"/>
-          </a:p>
-          <a:p>
-            <a:pPr>
-              <a:lnSpc>
-                <a:spcPct val="130000"/>
-              </a:lnSpc>
-              <a:defRPr sz="1300">
-                <a:solidFill>
-                  <a:srgbClr val="404040"/>
-                </a:solidFill>
-              </a:defRPr>
-            </a:pPr>
-            <a:r>
-              <a:rPr dirty="0"/>
-              <a:t>La </a:t>
-            </a:r>
-            <a:r>
-              <a:rPr dirty="0" err="1"/>
-              <a:t>gestione</a:t>
-            </a:r>
-            <a:r>
-              <a:rPr dirty="0"/>
-              <a:t> delle </a:t>
-            </a:r>
-            <a:r>
-              <a:rPr dirty="0" err="1"/>
-              <a:t>connessioni</a:t>
-            </a:r>
-            <a:r>
-              <a:rPr dirty="0"/>
-              <a:t> </a:t>
-            </a:r>
-            <a:r>
-              <a:rPr dirty="0" err="1"/>
-              <a:t>usa</a:t>
-            </a:r>
-            <a:r>
-              <a:rPr dirty="0"/>
-              <a:t> </a:t>
-            </a:r>
-            <a:r>
-              <a:rPr dirty="0" err="1"/>
-              <a:t>una</a:t>
-            </a:r>
-            <a:r>
-              <a:rPr dirty="0"/>
-              <a:t> state machine con backoff </a:t>
-            </a:r>
-            <a:r>
-              <a:rPr dirty="0" err="1"/>
-              <a:t>esponenziale</a:t>
-            </a:r>
-            <a:r>
-              <a:rPr dirty="0"/>
-              <a:t>. </a:t>
-            </a:r>
-            <a:r>
-              <a:rPr dirty="0" err="1"/>
-              <a:t>Gli</a:t>
-            </a:r>
-            <a:r>
-              <a:rPr dirty="0"/>
-              <a:t> </a:t>
-            </a:r>
-            <a:r>
-              <a:rPr dirty="0" err="1"/>
-              <a:t>stati</a:t>
-            </a:r>
-            <a:r>
-              <a:rPr dirty="0"/>
-              <a:t> </a:t>
-            </a:r>
-            <a:r>
-              <a:rPr dirty="0" err="1"/>
-              <a:t>sono</a:t>
-            </a:r>
-            <a:r>
-              <a:rPr dirty="0"/>
-              <a:t> Disconnected, Connecting e Connected. Quando la </a:t>
-            </a:r>
-            <a:r>
-              <a:rPr dirty="0" err="1"/>
-              <a:t>connessione</a:t>
-            </a:r>
-            <a:r>
-              <a:rPr dirty="0"/>
-              <a:t> </a:t>
-            </a:r>
-            <a:r>
-              <a:rPr dirty="0" err="1"/>
-              <a:t>fallisce</a:t>
-            </a:r>
-            <a:r>
-              <a:rPr dirty="0"/>
-              <a:t>, il </a:t>
-            </a:r>
-            <a:r>
-              <a:rPr dirty="0" err="1"/>
-              <a:t>sistema</a:t>
-            </a:r>
-            <a:r>
-              <a:rPr dirty="0"/>
-              <a:t> </a:t>
-            </a:r>
-            <a:r>
-              <a:rPr dirty="0" err="1"/>
-              <a:t>aspetta</a:t>
-            </a:r>
-            <a:r>
-              <a:rPr dirty="0"/>
-              <a:t> </a:t>
-            </a:r>
-            <a:r>
-              <a:rPr dirty="0" err="1"/>
-              <a:t>progressivamente</a:t>
-            </a:r>
-            <a:r>
-              <a:rPr dirty="0"/>
-              <a:t> </a:t>
-            </a:r>
-            <a:r>
-              <a:rPr dirty="0" err="1"/>
-              <a:t>più</a:t>
-            </a:r>
-            <a:r>
-              <a:rPr dirty="0"/>
-              <a:t> tempo prima di </a:t>
-            </a:r>
-            <a:r>
-              <a:rPr dirty="0" err="1"/>
-              <a:t>riprovare</a:t>
-            </a:r>
-            <a:r>
-              <a:rPr dirty="0"/>
-              <a:t>: 1 secondo, poi 2, 5, 10 e 15 secondi. Al </a:t>
-            </a:r>
-            <a:r>
-              <a:rPr dirty="0" err="1"/>
-              <a:t>sesto</a:t>
-            </a:r>
-            <a:r>
-              <a:rPr dirty="0"/>
-              <a:t> </a:t>
-            </a:r>
-            <a:r>
-              <a:rPr dirty="0" err="1"/>
-              <a:t>tentativo</a:t>
-            </a:r>
-            <a:r>
-              <a:rPr dirty="0"/>
-              <a:t> </a:t>
-            </a:r>
-            <a:r>
-              <a:rPr dirty="0" err="1"/>
-              <a:t>consecutivo</a:t>
-            </a:r>
-            <a:r>
-              <a:rPr dirty="0"/>
-              <a:t> </a:t>
-            </a:r>
-            <a:r>
-              <a:rPr dirty="0" err="1"/>
-              <a:t>fallito</a:t>
-            </a:r>
-            <a:r>
-              <a:rPr dirty="0"/>
-              <a:t> </a:t>
-            </a:r>
-            <a:r>
-              <a:rPr dirty="0" err="1"/>
-              <a:t>viene</a:t>
-            </a:r>
-            <a:r>
-              <a:rPr dirty="0"/>
-              <a:t> </a:t>
-            </a:r>
-            <a:r>
-              <a:rPr dirty="0" err="1"/>
-              <a:t>forzato</a:t>
-            </a:r>
-            <a:r>
-              <a:rPr dirty="0"/>
-              <a:t> il logout per </a:t>
-            </a:r>
-            <a:r>
-              <a:rPr dirty="0" err="1"/>
-              <a:t>evitare</a:t>
-            </a:r>
-            <a:r>
-              <a:rPr dirty="0"/>
-              <a:t> loop </a:t>
-            </a:r>
-            <a:r>
-              <a:rPr dirty="0" err="1"/>
-              <a:t>infiniti</a:t>
-            </a:r>
-            <a:r>
-              <a:rPr dirty="0"/>
-              <a:t>. Il flag </a:t>
-            </a:r>
-            <a:r>
-              <a:rPr dirty="0" err="1"/>
-              <a:t>is_connecting_in_progress</a:t>
-            </a:r>
-            <a:r>
-              <a:rPr dirty="0"/>
-              <a:t> </a:t>
-            </a:r>
-            <a:r>
-              <a:rPr dirty="0" err="1"/>
-              <a:t>previene</a:t>
-            </a:r>
-            <a:r>
-              <a:rPr dirty="0"/>
-              <a:t> </a:t>
-            </a:r>
-            <a:r>
-              <a:rPr dirty="0" err="1"/>
-              <a:t>tentativi</a:t>
-            </a:r>
-            <a:r>
-              <a:rPr dirty="0"/>
-              <a:t> </a:t>
-            </a:r>
-            <a:r>
-              <a:rPr dirty="0" err="1"/>
-              <a:t>multipli</a:t>
-            </a:r>
-            <a:r>
-              <a:rPr dirty="0"/>
-              <a:t> </a:t>
-            </a:r>
-            <a:r>
-              <a:rPr dirty="0" err="1"/>
-              <a:t>simultanei</a:t>
-            </a:r>
-            <a:r>
-              <a:rPr dirty="0"/>
-              <a:t>, </a:t>
-            </a:r>
-            <a:r>
-              <a:rPr dirty="0" err="1"/>
-              <a:t>mentre</a:t>
-            </a:r>
-            <a:r>
-              <a:rPr dirty="0"/>
-              <a:t> </a:t>
-            </a:r>
-            <a:r>
-              <a:rPr dirty="0" err="1"/>
-              <a:t>connection_attempt_start</a:t>
-            </a:r>
-            <a:r>
-              <a:rPr dirty="0"/>
-              <a:t> </a:t>
-            </a:r>
-            <a:r>
-              <a:rPr dirty="0" err="1"/>
-              <a:t>implementa</a:t>
-            </a:r>
-            <a:r>
-              <a:rPr dirty="0"/>
-              <a:t> un timeout di 30 secondi </a:t>
-            </a:r>
-            <a:r>
-              <a:rPr dirty="0" err="1"/>
-              <a:t>sulla</a:t>
-            </a:r>
-            <a:r>
-              <a:rPr dirty="0"/>
-              <a:t> </a:t>
-            </a:r>
-            <a:r>
-              <a:rPr dirty="0" err="1"/>
-              <a:t>fase</a:t>
-            </a:r>
-            <a:r>
-              <a:rPr dirty="0"/>
-              <a:t> di connecting.</a:t>
-            </a:r>
-          </a:p>
-        </p:txBody>
-      </p:sp>
-      <p:pic>
-        <p:nvPicPr>
-          <p:cNvPr id="28" name="Immagine 27" descr="Immagine che contiene testo, schermata, Carattere, numero&#10;&#10;Il contenuto generato dall'IA potrebbe non essere corretto.">
-            <a:extLst>
-              <a:ext uri="{FF2B5EF4-FFF2-40B4-BE49-F238E27FC236}">
-                <a16:creationId xmlns:a16="http://schemas.microsoft.com/office/drawing/2014/main" id="{DCA47F67-1480-1718-97F2-00E2956F751C}"/>
-              </a:ext>
-            </a:extLst>
-          </p:cNvPr>
-          <p:cNvPicPr>
-            <a:picLocks noChangeAspect="1"/>
-          </p:cNvPicPr>
-          <p:nvPr/>
-        </p:nvPicPr>
-        <p:blipFill>
-          <a:blip r:embed="rId3"/>
-          <a:stretch>
-            <a:fillRect/>
-          </a:stretch>
-        </p:blipFill>
-        <p:spPr>
-          <a:xfrm>
-            <a:off x="800913" y="768202"/>
-            <a:ext cx="3176728" cy="3932728"/>
-          </a:xfrm>
-          <a:prstGeom prst="rect">
-            <a:avLst/>
-          </a:prstGeom>
-        </p:spPr>
-      </p:pic>
-    </p:spTree>
-  </p:cSld>
-  <p:clrMapOvr>
-    <a:masterClrMapping/>
-  </p:clrMapOvr>
-</p:sld>
-</file>
-
-<file path=ppt/slides/slide21.xml><?xml version="1.0" encoding="utf-8"?>
-<p:sld xmlns:a="http://schemas.openxmlformats.org/drawingml/2006/main" xmlns:r="http://schemas.openxmlformats.org/officeDocument/2006/relationships" xmlns:p="http://schemas.openxmlformats.org/presentationml/2006/main">
   <p:cSld name="Slide 21">
     <p:bg>
       <p:bgPr>
@@ -9149,7 +8559,7 @@
 </p:sld>
 </file>
 
-<file path=ppt/slides/slide22.xml><?xml version="1.0" encoding="utf-8"?>
+<file path=ppt/slides/slide21.xml><?xml version="1.0" encoding="utf-8"?>
 <p:sld xmlns:a="http://schemas.openxmlformats.org/drawingml/2006/main" xmlns:r="http://schemas.openxmlformats.org/officeDocument/2006/relationships" xmlns:p="http://schemas.openxmlformats.org/presentationml/2006/main">
   <p:cSld name="Slide 22">
     <p:bg>
@@ -9584,7 +8994,7 @@
 </p:sld>
 </file>
 
-<file path=ppt/slides/slide23.xml><?xml version="1.0" encoding="utf-8"?>
+<file path=ppt/slides/slide22.xml><?xml version="1.0" encoding="utf-8"?>
 <p:sld xmlns:a="http://schemas.openxmlformats.org/drawingml/2006/main" xmlns:r="http://schemas.openxmlformats.org/officeDocument/2006/relationships" xmlns:p="http://schemas.openxmlformats.org/presentationml/2006/main">
   <p:cSld name="Slide 23">
     <p:bg>
@@ -10067,7 +9477,7 @@
 </p:sld>
 </file>
 
-<file path=ppt/slides/slide24.xml><?xml version="1.0" encoding="utf-8"?>
+<file path=ppt/slides/slide23.xml><?xml version="1.0" encoding="utf-8"?>
 <p:sld xmlns:a="http://schemas.openxmlformats.org/drawingml/2006/main" xmlns:r="http://schemas.openxmlformats.org/officeDocument/2006/relationships" xmlns:p="http://schemas.openxmlformats.org/presentationml/2006/main">
   <p:cSld name="Slide 24">
     <p:bg>
@@ -11161,7 +10571,7 @@
 </p:sld>
 </file>
 
-<file path=ppt/slides/slide25.xml><?xml version="1.0" encoding="utf-8"?>
+<file path=ppt/slides/slide24.xml><?xml version="1.0" encoding="utf-8"?>
 <p:sld xmlns:a="http://schemas.openxmlformats.org/drawingml/2006/main" xmlns:r="http://schemas.openxmlformats.org/officeDocument/2006/relationships" xmlns:p="http://schemas.openxmlformats.org/presentationml/2006/main">
   <p:cSld name="Slide 26">
     <p:bg>
@@ -13565,6 +12975,529 @@
 
 <file path=ppt/slides/slide5.xml><?xml version="1.0" encoding="utf-8"?>
 <p:sld xmlns:a="http://schemas.openxmlformats.org/drawingml/2006/main" xmlns:r="http://schemas.openxmlformats.org/officeDocument/2006/relationships" xmlns:p="http://schemas.openxmlformats.org/presentationml/2006/main">
+  <p:cSld name="Slide 7">
+    <p:bg>
+      <p:bgPr>
+        <a:solidFill>
+          <a:srgbClr val="FFFFFF"/>
+        </a:solidFill>
+        <a:effectLst/>
+      </p:bgPr>
+    </p:bg>
+    <p:spTree>
+      <p:nvGrpSpPr>
+        <p:cNvPr id="1" name=""/>
+        <p:cNvGrpSpPr/>
+        <p:nvPr/>
+      </p:nvGrpSpPr>
+      <p:grpSpPr>
+        <a:xfrm>
+          <a:off x="0" y="0"/>
+          <a:ext cx="0" cy="0"/>
+          <a:chOff x="0" y="0"/>
+          <a:chExt cx="0" cy="0"/>
+        </a:xfrm>
+      </p:grpSpPr>
+      <p:sp>
+        <p:nvSpPr>
+          <p:cNvPr id="2" name="Text 0"/>
+          <p:cNvSpPr/>
+          <p:nvPr/>
+        </p:nvSpPr>
+        <p:spPr>
+          <a:xfrm>
+            <a:off x="381000" y="228600"/>
+            <a:ext cx="6509385" cy="323850"/>
+          </a:xfrm>
+          <a:prstGeom prst="rect">
+            <a:avLst/>
+          </a:prstGeom>
+          <a:noFill/>
+          <a:ln/>
+        </p:spPr>
+        <p:txBody>
+          <a:bodyPr wrap="square" lIns="0" tIns="0" rIns="0" bIns="0" rtlCol="0" anchor="t"/>
+          <a:lstStyle/>
+          <a:p>
+            <a:pPr marL="0" indent="0" algn="l">
+              <a:lnSpc>
+                <a:spcPts val="2550"/>
+              </a:lnSpc>
+              <a:buNone/>
+            </a:pPr>
+            <a:r>
+              <a:rPr lang="en-US" sz="2550" b="1" dirty="0">
+                <a:solidFill>
+                  <a:srgbClr val="CE422B"/>
+                </a:solidFill>
+                <a:latin typeface="Segoe UI" pitchFamily="34" charset="0"/>
+                <a:ea typeface="Segoe UI" pitchFamily="34" charset="-122"/>
+                <a:cs typeface="Segoe UI" pitchFamily="34" charset="-120"/>
+              </a:rPr>
+              <a:t>Backend: AppState - Strutture Dati Canali</a:t>
+            </a:r>
+            <a:endParaRPr lang="en-US" sz="2550" dirty="0"/>
+          </a:p>
+        </p:txBody>
+      </p:sp>
+      <p:sp>
+        <p:nvSpPr>
+          <p:cNvPr id="25" name="Text 23"/>
+          <p:cNvSpPr/>
+          <p:nvPr/>
+        </p:nvSpPr>
+        <p:spPr>
+          <a:xfrm>
+            <a:off x="4667250" y="855617"/>
+            <a:ext cx="4095750" cy="4199709"/>
+          </a:xfrm>
+          <a:prstGeom prst="roundRect">
+            <a:avLst>
+              <a:gd name="adj" fmla="val 5292"/>
+            </a:avLst>
+          </a:prstGeom>
+          <a:noFill/>
+          <a:ln/>
+        </p:spPr>
+        <p:txBody>
+          <a:bodyPr wrap="square" rtlCol="0" anchor="ctr"/>
+          <a:lstStyle/>
+          <a:p>
+            <a:pPr marL="0" indent="0">
+              <a:spcAft>
+                <a:spcPts val="1200"/>
+              </a:spcAft>
+              <a:buNone/>
+              <a:defRPr sz="1600" b="1">
+                <a:solidFill>
+                  <a:srgbClr val="0070C0"/>
+                </a:solidFill>
+              </a:defRPr>
+            </a:pPr>
+            <a:r>
+              <a:rPr dirty="0"/>
+              <a:t>Storage Backend Broadcast Channels</a:t>
+            </a:r>
+            <a:endParaRPr lang="en-US" dirty="0"/>
+          </a:p>
+          <a:p>
+            <a:pPr>
+              <a:lnSpc>
+                <a:spcPct val="130000"/>
+              </a:lnSpc>
+              <a:defRPr sz="1300">
+                <a:solidFill>
+                  <a:srgbClr val="404040"/>
+                </a:solidFill>
+              </a:defRPr>
+            </a:pPr>
+            <a:r>
+              <a:rPr dirty="0"/>
+              <a:t>Il backend </a:t>
+            </a:r>
+            <a:r>
+              <a:rPr dirty="0" err="1"/>
+              <a:t>mantiene</a:t>
+            </a:r>
+            <a:r>
+              <a:rPr dirty="0"/>
+              <a:t> lo </a:t>
+            </a:r>
+            <a:r>
+              <a:rPr dirty="0" err="1"/>
+              <a:t>stato</a:t>
+            </a:r>
+            <a:r>
+              <a:rPr dirty="0"/>
+              <a:t> </a:t>
+            </a:r>
+            <a:r>
+              <a:rPr dirty="0" err="1"/>
+              <a:t>condiviso</a:t>
+            </a:r>
+            <a:r>
+              <a:rPr dirty="0"/>
+              <a:t> in </a:t>
+            </a:r>
+            <a:r>
+              <a:rPr dirty="0" err="1"/>
+              <a:t>AppState</a:t>
+            </a:r>
+            <a:r>
+              <a:rPr dirty="0"/>
+              <a:t>, </a:t>
+            </a:r>
+            <a:r>
+              <a:rPr dirty="0" err="1"/>
+              <a:t>una</a:t>
+            </a:r>
+            <a:r>
+              <a:rPr dirty="0"/>
+              <a:t> </a:t>
+            </a:r>
+            <a:r>
+              <a:rPr dirty="0" err="1"/>
+              <a:t>struttura</a:t>
+            </a:r>
+            <a:r>
+              <a:rPr dirty="0"/>
+              <a:t> thread-safe </a:t>
+            </a:r>
+            <a:r>
+              <a:rPr dirty="0" err="1"/>
+              <a:t>che</a:t>
+            </a:r>
+            <a:r>
+              <a:rPr dirty="0"/>
+              <a:t> </a:t>
+            </a:r>
+            <a:r>
+              <a:rPr dirty="0" err="1"/>
+              <a:t>contiene</a:t>
+            </a:r>
+            <a:r>
+              <a:rPr dirty="0"/>
+              <a:t> tutte le </a:t>
+            </a:r>
+            <a:r>
+              <a:rPr dirty="0" err="1"/>
+              <a:t>informazioni</a:t>
+            </a:r>
+            <a:r>
+              <a:rPr dirty="0"/>
+              <a:t> </a:t>
+            </a:r>
+            <a:r>
+              <a:rPr dirty="0" err="1"/>
+              <a:t>sulle</a:t>
+            </a:r>
+            <a:r>
+              <a:rPr dirty="0"/>
+              <a:t> </a:t>
+            </a:r>
+            <a:r>
+              <a:rPr dirty="0" err="1"/>
+              <a:t>connessioni</a:t>
+            </a:r>
+            <a:r>
+              <a:rPr dirty="0"/>
+              <a:t> </a:t>
+            </a:r>
+            <a:r>
+              <a:rPr dirty="0" err="1"/>
+              <a:t>attive</a:t>
+            </a:r>
+            <a:r>
+              <a:rPr dirty="0"/>
+              <a:t>. I broadcast channels </a:t>
+            </a:r>
+            <a:r>
+              <a:rPr dirty="0" err="1"/>
+              <a:t>sono</a:t>
+            </a:r>
+            <a:r>
+              <a:rPr dirty="0"/>
+              <a:t> </a:t>
+            </a:r>
+            <a:r>
+              <a:rPr dirty="0" err="1"/>
+              <a:t>organizzati</a:t>
+            </a:r>
+            <a:r>
+              <a:rPr dirty="0"/>
+              <a:t> in due HashMap: uno per le </a:t>
+            </a:r>
+            <a:r>
+              <a:rPr dirty="0" err="1"/>
+              <a:t>notifiche</a:t>
+            </a:r>
+            <a:r>
+              <a:rPr lang="it-IT" dirty="0"/>
+              <a:t> </a:t>
+            </a:r>
+            <a:r>
+              <a:rPr dirty="0" err="1"/>
+              <a:t>personali</a:t>
+            </a:r>
+            <a:r>
+              <a:rPr dirty="0"/>
+              <a:t> di ogni </a:t>
+            </a:r>
+            <a:r>
+              <a:rPr dirty="0" err="1"/>
+              <a:t>utente</a:t>
+            </a:r>
+            <a:r>
+              <a:rPr dirty="0"/>
+              <a:t> e uno per </a:t>
+            </a:r>
+            <a:r>
+              <a:rPr dirty="0" err="1"/>
+              <a:t>i</a:t>
+            </a:r>
+            <a:r>
+              <a:rPr dirty="0"/>
+              <a:t> </a:t>
+            </a:r>
+            <a:r>
+              <a:rPr dirty="0" err="1"/>
+              <a:t>messaggi</a:t>
+            </a:r>
+            <a:r>
+              <a:rPr dirty="0"/>
+              <a:t> di ogni conversazione. </a:t>
+            </a:r>
+            <a:r>
+              <a:rPr dirty="0" err="1"/>
+              <a:t>Questi</a:t>
+            </a:r>
+            <a:r>
+              <a:rPr dirty="0"/>
+              <a:t> </a:t>
+            </a:r>
+            <a:r>
+              <a:rPr dirty="0" err="1"/>
+              <a:t>canali</a:t>
+            </a:r>
+            <a:r>
+              <a:rPr dirty="0"/>
+              <a:t> </a:t>
+            </a:r>
+            <a:r>
+              <a:rPr dirty="0" err="1"/>
+              <a:t>vengono</a:t>
+            </a:r>
+            <a:r>
+              <a:rPr dirty="0"/>
+              <a:t> </a:t>
+            </a:r>
+            <a:r>
+              <a:rPr dirty="0" err="1"/>
+              <a:t>creati</a:t>
+            </a:r>
+            <a:r>
+              <a:rPr dirty="0"/>
+              <a:t> </a:t>
+            </a:r>
+            <a:r>
+              <a:rPr dirty="0" err="1"/>
+              <a:t>quando</a:t>
+            </a:r>
+            <a:r>
+              <a:rPr dirty="0"/>
+              <a:t> </a:t>
+            </a:r>
+            <a:r>
+              <a:rPr dirty="0" err="1"/>
+              <a:t>servono</a:t>
+            </a:r>
+            <a:r>
+              <a:rPr dirty="0"/>
+              <a:t> e </a:t>
+            </a:r>
+            <a:r>
+              <a:rPr dirty="0" err="1"/>
+              <a:t>permettono</a:t>
+            </a:r>
+            <a:r>
+              <a:rPr dirty="0"/>
+              <a:t> di </a:t>
+            </a:r>
+            <a:r>
+              <a:rPr dirty="0" err="1"/>
+              <a:t>inviare</a:t>
+            </a:r>
+            <a:r>
+              <a:rPr dirty="0"/>
+              <a:t> aggiornamenti in tempo </a:t>
+            </a:r>
+            <a:r>
+              <a:rPr dirty="0" err="1"/>
+              <a:t>reale</a:t>
+            </a:r>
+            <a:r>
+              <a:rPr dirty="0"/>
+              <a:t> a tutti </a:t>
+            </a:r>
+            <a:r>
+              <a:rPr dirty="0" err="1"/>
+              <a:t>i</a:t>
+            </a:r>
+            <a:r>
+              <a:rPr dirty="0"/>
+              <a:t> </a:t>
+            </a:r>
+            <a:r>
+              <a:rPr dirty="0" err="1"/>
+              <a:t>partecipanti</a:t>
+            </a:r>
+            <a:r>
+              <a:rPr dirty="0"/>
+              <a:t>. Ogni </a:t>
+            </a:r>
+            <a:r>
+              <a:rPr dirty="0" err="1"/>
+              <a:t>connessione</a:t>
+            </a:r>
+            <a:r>
+              <a:rPr dirty="0"/>
+              <a:t> è </a:t>
+            </a:r>
+            <a:r>
+              <a:rPr dirty="0" err="1"/>
+              <a:t>tracciata</a:t>
+            </a:r>
+            <a:r>
+              <a:rPr dirty="0"/>
+              <a:t> con un </a:t>
+            </a:r>
+            <a:r>
+              <a:rPr lang="it-IT" dirty="0" err="1"/>
+              <a:t>ActiveConnection</a:t>
+            </a:r>
+            <a:r>
+              <a:rPr dirty="0"/>
+              <a:t> </a:t>
+            </a:r>
+            <a:r>
+              <a:rPr dirty="0" err="1"/>
+              <a:t>che</a:t>
+            </a:r>
+            <a:r>
+              <a:rPr dirty="0"/>
+              <a:t> </a:t>
+            </a:r>
+            <a:r>
+              <a:rPr dirty="0" err="1"/>
+              <a:t>contiene</a:t>
+            </a:r>
+            <a:r>
+              <a:rPr dirty="0"/>
+              <a:t> </a:t>
+            </a:r>
+            <a:r>
+              <a:rPr dirty="0" err="1"/>
+              <a:t>l'ID</a:t>
+            </a:r>
+            <a:r>
+              <a:rPr dirty="0"/>
+              <a:t> di </a:t>
+            </a:r>
+            <a:r>
+              <a:rPr dirty="0" err="1"/>
+              <a:t>sessione</a:t>
+            </a:r>
+            <a:r>
+              <a:rPr dirty="0"/>
+              <a:t> per </a:t>
+            </a:r>
+            <a:r>
+              <a:rPr lang="it-IT" dirty="0"/>
+              <a:t>gestire</a:t>
+            </a:r>
+            <a:r>
+              <a:rPr dirty="0"/>
+              <a:t> login </a:t>
+            </a:r>
+            <a:r>
+              <a:rPr dirty="0" err="1"/>
+              <a:t>multipli</a:t>
+            </a:r>
+            <a:r>
+              <a:rPr dirty="0"/>
+              <a:t> </a:t>
+            </a:r>
+            <a:r>
+              <a:rPr dirty="0" err="1"/>
+              <a:t>dallo</a:t>
+            </a:r>
+            <a:r>
+              <a:rPr dirty="0"/>
+              <a:t> </a:t>
+            </a:r>
+            <a:r>
+              <a:rPr dirty="0" err="1"/>
+              <a:t>stesso</a:t>
+            </a:r>
+            <a:r>
+              <a:rPr dirty="0"/>
+              <a:t> account, e </a:t>
+            </a:r>
+            <a:r>
+              <a:rPr dirty="0" err="1"/>
+              <a:t>i</a:t>
+            </a:r>
+            <a:r>
+              <a:rPr dirty="0"/>
+              <a:t> </a:t>
+            </a:r>
+            <a:r>
+              <a:rPr dirty="0" err="1"/>
+              <a:t>canali</a:t>
+            </a:r>
+            <a:r>
+              <a:rPr dirty="0"/>
+              <a:t> per </a:t>
+            </a:r>
+            <a:r>
+              <a:rPr dirty="0" err="1"/>
+              <a:t>comunicare</a:t>
+            </a:r>
+            <a:r>
+              <a:rPr dirty="0"/>
+              <a:t> </a:t>
+            </a:r>
+            <a:r>
+              <a:rPr dirty="0" err="1"/>
+              <a:t>direttamente</a:t>
+            </a:r>
+            <a:r>
+              <a:rPr dirty="0"/>
+              <a:t> con il Writer Task.</a:t>
+            </a:r>
+          </a:p>
+        </p:txBody>
+      </p:sp>
+      <p:pic>
+        <p:nvPicPr>
+          <p:cNvPr id="24" name="Immagine 23" descr="Immagine che contiene testo, schermata, Carattere&#10;&#10;Il contenuto generato dall'IA potrebbe non essere corretto.">
+            <a:extLst>
+              <a:ext uri="{FF2B5EF4-FFF2-40B4-BE49-F238E27FC236}">
+                <a16:creationId xmlns:a16="http://schemas.microsoft.com/office/drawing/2014/main" id="{28309264-3967-8414-843A-919C36496071}"/>
+              </a:ext>
+            </a:extLst>
+          </p:cNvPr>
+          <p:cNvPicPr>
+            <a:picLocks noChangeAspect="1"/>
+          </p:cNvPicPr>
+          <p:nvPr/>
+        </p:nvPicPr>
+        <p:blipFill>
+          <a:blip r:embed="rId3"/>
+          <a:stretch>
+            <a:fillRect/>
+          </a:stretch>
+        </p:blipFill>
+        <p:spPr>
+          <a:xfrm>
+            <a:off x="693337" y="1287743"/>
+            <a:ext cx="3310429" cy="3042594"/>
+          </a:xfrm>
+          <a:prstGeom prst="rect">
+            <a:avLst/>
+          </a:prstGeom>
+        </p:spPr>
+      </p:pic>
+    </p:spTree>
+  </p:cSld>
+  <p:clrMapOvr>
+    <a:masterClrMapping/>
+  </p:clrMapOvr>
+</p:sld>
+</file>
+
+<file path=ppt/slides/slide6.xml><?xml version="1.0" encoding="utf-8"?>
+<p:sld xmlns:a="http://schemas.openxmlformats.org/drawingml/2006/main" xmlns:r="http://schemas.openxmlformats.org/officeDocument/2006/relationships" xmlns:p="http://schemas.openxmlformats.org/presentationml/2006/main">
   <p:cSld name="Slide 5">
     <p:bg>
       <p:bgPr>
@@ -13824,7 +13757,7 @@
 </p:sld>
 </file>
 
-<file path=ppt/slides/slide6.xml><?xml version="1.0" encoding="utf-8"?>
+<file path=ppt/slides/slide7.xml><?xml version="1.0" encoding="utf-8"?>
 <p:sld xmlns:a="http://schemas.openxmlformats.org/drawingml/2006/main" xmlns:r="http://schemas.openxmlformats.org/officeDocument/2006/relationships" xmlns:p="http://schemas.openxmlformats.org/presentationml/2006/main">
   <p:cSld name="Slide 6">
     <p:bg>
@@ -14401,529 +14334,6 @@
           <a:xfrm>
             <a:off x="934106" y="1436915"/>
             <a:ext cx="2799798" cy="2856170"/>
-          </a:xfrm>
-          <a:prstGeom prst="rect">
-            <a:avLst/>
-          </a:prstGeom>
-        </p:spPr>
-      </p:pic>
-    </p:spTree>
-  </p:cSld>
-  <p:clrMapOvr>
-    <a:masterClrMapping/>
-  </p:clrMapOvr>
-</p:sld>
-</file>
-
-<file path=ppt/slides/slide7.xml><?xml version="1.0" encoding="utf-8"?>
-<p:sld xmlns:a="http://schemas.openxmlformats.org/drawingml/2006/main" xmlns:r="http://schemas.openxmlformats.org/officeDocument/2006/relationships" xmlns:p="http://schemas.openxmlformats.org/presentationml/2006/main">
-  <p:cSld name="Slide 7">
-    <p:bg>
-      <p:bgPr>
-        <a:solidFill>
-          <a:srgbClr val="FFFFFF"/>
-        </a:solidFill>
-        <a:effectLst/>
-      </p:bgPr>
-    </p:bg>
-    <p:spTree>
-      <p:nvGrpSpPr>
-        <p:cNvPr id="1" name=""/>
-        <p:cNvGrpSpPr/>
-        <p:nvPr/>
-      </p:nvGrpSpPr>
-      <p:grpSpPr>
-        <a:xfrm>
-          <a:off x="0" y="0"/>
-          <a:ext cx="0" cy="0"/>
-          <a:chOff x="0" y="0"/>
-          <a:chExt cx="0" cy="0"/>
-        </a:xfrm>
-      </p:grpSpPr>
-      <p:sp>
-        <p:nvSpPr>
-          <p:cNvPr id="2" name="Text 0"/>
-          <p:cNvSpPr/>
-          <p:nvPr/>
-        </p:nvSpPr>
-        <p:spPr>
-          <a:xfrm>
-            <a:off x="381000" y="228600"/>
-            <a:ext cx="6509385" cy="323850"/>
-          </a:xfrm>
-          <a:prstGeom prst="rect">
-            <a:avLst/>
-          </a:prstGeom>
-          <a:noFill/>
-          <a:ln/>
-        </p:spPr>
-        <p:txBody>
-          <a:bodyPr wrap="square" lIns="0" tIns="0" rIns="0" bIns="0" rtlCol="0" anchor="t"/>
-          <a:lstStyle/>
-          <a:p>
-            <a:pPr marL="0" indent="0" algn="l">
-              <a:lnSpc>
-                <a:spcPts val="2550"/>
-              </a:lnSpc>
-              <a:buNone/>
-            </a:pPr>
-            <a:r>
-              <a:rPr lang="en-US" sz="2550" b="1" dirty="0">
-                <a:solidFill>
-                  <a:srgbClr val="CE422B"/>
-                </a:solidFill>
-                <a:latin typeface="Segoe UI" pitchFamily="34" charset="0"/>
-                <a:ea typeface="Segoe UI" pitchFamily="34" charset="-122"/>
-                <a:cs typeface="Segoe UI" pitchFamily="34" charset="-120"/>
-              </a:rPr>
-              <a:t>Backend: AppState - Strutture Dati Canali</a:t>
-            </a:r>
-            <a:endParaRPr lang="en-US" sz="2550" dirty="0"/>
-          </a:p>
-        </p:txBody>
-      </p:sp>
-      <p:sp>
-        <p:nvSpPr>
-          <p:cNvPr id="25" name="Text 23"/>
-          <p:cNvSpPr/>
-          <p:nvPr/>
-        </p:nvSpPr>
-        <p:spPr>
-          <a:xfrm>
-            <a:off x="4667250" y="855617"/>
-            <a:ext cx="4095750" cy="4199709"/>
-          </a:xfrm>
-          <a:prstGeom prst="roundRect">
-            <a:avLst>
-              <a:gd name="adj" fmla="val 5292"/>
-            </a:avLst>
-          </a:prstGeom>
-          <a:noFill/>
-          <a:ln/>
-        </p:spPr>
-        <p:txBody>
-          <a:bodyPr wrap="square" rtlCol="0" anchor="ctr"/>
-          <a:lstStyle/>
-          <a:p>
-            <a:pPr marL="0" indent="0">
-              <a:spcAft>
-                <a:spcPts val="1200"/>
-              </a:spcAft>
-              <a:buNone/>
-              <a:defRPr sz="1600" b="1">
-                <a:solidFill>
-                  <a:srgbClr val="0070C0"/>
-                </a:solidFill>
-              </a:defRPr>
-            </a:pPr>
-            <a:r>
-              <a:rPr dirty="0"/>
-              <a:t>Storage Backend Broadcast Channels</a:t>
-            </a:r>
-            <a:endParaRPr lang="en-US" dirty="0"/>
-          </a:p>
-          <a:p>
-            <a:pPr>
-              <a:lnSpc>
-                <a:spcPct val="130000"/>
-              </a:lnSpc>
-              <a:defRPr sz="1300">
-                <a:solidFill>
-                  <a:srgbClr val="404040"/>
-                </a:solidFill>
-              </a:defRPr>
-            </a:pPr>
-            <a:r>
-              <a:rPr dirty="0"/>
-              <a:t>Il backend </a:t>
-            </a:r>
-            <a:r>
-              <a:rPr dirty="0" err="1"/>
-              <a:t>mantiene</a:t>
-            </a:r>
-            <a:r>
-              <a:rPr dirty="0"/>
-              <a:t> lo </a:t>
-            </a:r>
-            <a:r>
-              <a:rPr dirty="0" err="1"/>
-              <a:t>stato</a:t>
-            </a:r>
-            <a:r>
-              <a:rPr dirty="0"/>
-              <a:t> </a:t>
-            </a:r>
-            <a:r>
-              <a:rPr dirty="0" err="1"/>
-              <a:t>condiviso</a:t>
-            </a:r>
-            <a:r>
-              <a:rPr dirty="0"/>
-              <a:t> in </a:t>
-            </a:r>
-            <a:r>
-              <a:rPr dirty="0" err="1"/>
-              <a:t>AppState</a:t>
-            </a:r>
-            <a:r>
-              <a:rPr dirty="0"/>
-              <a:t>, </a:t>
-            </a:r>
-            <a:r>
-              <a:rPr dirty="0" err="1"/>
-              <a:t>una</a:t>
-            </a:r>
-            <a:r>
-              <a:rPr dirty="0"/>
-              <a:t> </a:t>
-            </a:r>
-            <a:r>
-              <a:rPr dirty="0" err="1"/>
-              <a:t>struttura</a:t>
-            </a:r>
-            <a:r>
-              <a:rPr dirty="0"/>
-              <a:t> thread-safe </a:t>
-            </a:r>
-            <a:r>
-              <a:rPr dirty="0" err="1"/>
-              <a:t>che</a:t>
-            </a:r>
-            <a:r>
-              <a:rPr dirty="0"/>
-              <a:t> </a:t>
-            </a:r>
-            <a:r>
-              <a:rPr dirty="0" err="1"/>
-              <a:t>contiene</a:t>
-            </a:r>
-            <a:r>
-              <a:rPr dirty="0"/>
-              <a:t> tutte le </a:t>
-            </a:r>
-            <a:r>
-              <a:rPr dirty="0" err="1"/>
-              <a:t>informazioni</a:t>
-            </a:r>
-            <a:r>
-              <a:rPr dirty="0"/>
-              <a:t> </a:t>
-            </a:r>
-            <a:r>
-              <a:rPr dirty="0" err="1"/>
-              <a:t>sulle</a:t>
-            </a:r>
-            <a:r>
-              <a:rPr dirty="0"/>
-              <a:t> </a:t>
-            </a:r>
-            <a:r>
-              <a:rPr dirty="0" err="1"/>
-              <a:t>connessioni</a:t>
-            </a:r>
-            <a:r>
-              <a:rPr dirty="0"/>
-              <a:t> </a:t>
-            </a:r>
-            <a:r>
-              <a:rPr dirty="0" err="1"/>
-              <a:t>attive</a:t>
-            </a:r>
-            <a:r>
-              <a:rPr dirty="0"/>
-              <a:t>. I broadcast channels </a:t>
-            </a:r>
-            <a:r>
-              <a:rPr dirty="0" err="1"/>
-              <a:t>sono</a:t>
-            </a:r>
-            <a:r>
-              <a:rPr dirty="0"/>
-              <a:t> </a:t>
-            </a:r>
-            <a:r>
-              <a:rPr dirty="0" err="1"/>
-              <a:t>organizzati</a:t>
-            </a:r>
-            <a:r>
-              <a:rPr dirty="0"/>
-              <a:t> in due HashMap: uno per le </a:t>
-            </a:r>
-            <a:r>
-              <a:rPr dirty="0" err="1"/>
-              <a:t>notifiche</a:t>
-            </a:r>
-            <a:r>
-              <a:rPr lang="it-IT" dirty="0"/>
-              <a:t> </a:t>
-            </a:r>
-            <a:r>
-              <a:rPr dirty="0" err="1"/>
-              <a:t>personali</a:t>
-            </a:r>
-            <a:r>
-              <a:rPr dirty="0"/>
-              <a:t> di ogni </a:t>
-            </a:r>
-            <a:r>
-              <a:rPr dirty="0" err="1"/>
-              <a:t>utente</a:t>
-            </a:r>
-            <a:r>
-              <a:rPr dirty="0"/>
-              <a:t> e uno per </a:t>
-            </a:r>
-            <a:r>
-              <a:rPr dirty="0" err="1"/>
-              <a:t>i</a:t>
-            </a:r>
-            <a:r>
-              <a:rPr dirty="0"/>
-              <a:t> </a:t>
-            </a:r>
-            <a:r>
-              <a:rPr dirty="0" err="1"/>
-              <a:t>messaggi</a:t>
-            </a:r>
-            <a:r>
-              <a:rPr dirty="0"/>
-              <a:t> di ogni conversazione. </a:t>
-            </a:r>
-            <a:r>
-              <a:rPr dirty="0" err="1"/>
-              <a:t>Questi</a:t>
-            </a:r>
-            <a:r>
-              <a:rPr dirty="0"/>
-              <a:t> </a:t>
-            </a:r>
-            <a:r>
-              <a:rPr dirty="0" err="1"/>
-              <a:t>canali</a:t>
-            </a:r>
-            <a:r>
-              <a:rPr dirty="0"/>
-              <a:t> </a:t>
-            </a:r>
-            <a:r>
-              <a:rPr dirty="0" err="1"/>
-              <a:t>vengono</a:t>
-            </a:r>
-            <a:r>
-              <a:rPr dirty="0"/>
-              <a:t> </a:t>
-            </a:r>
-            <a:r>
-              <a:rPr dirty="0" err="1"/>
-              <a:t>creati</a:t>
-            </a:r>
-            <a:r>
-              <a:rPr dirty="0"/>
-              <a:t> </a:t>
-            </a:r>
-            <a:r>
-              <a:rPr dirty="0" err="1"/>
-              <a:t>quando</a:t>
-            </a:r>
-            <a:r>
-              <a:rPr dirty="0"/>
-              <a:t> </a:t>
-            </a:r>
-            <a:r>
-              <a:rPr dirty="0" err="1"/>
-              <a:t>servono</a:t>
-            </a:r>
-            <a:r>
-              <a:rPr dirty="0"/>
-              <a:t> e </a:t>
-            </a:r>
-            <a:r>
-              <a:rPr dirty="0" err="1"/>
-              <a:t>permettono</a:t>
-            </a:r>
-            <a:r>
-              <a:rPr dirty="0"/>
-              <a:t> di </a:t>
-            </a:r>
-            <a:r>
-              <a:rPr dirty="0" err="1"/>
-              <a:t>inviare</a:t>
-            </a:r>
-            <a:r>
-              <a:rPr dirty="0"/>
-              <a:t> aggiornamenti in tempo </a:t>
-            </a:r>
-            <a:r>
-              <a:rPr dirty="0" err="1"/>
-              <a:t>reale</a:t>
-            </a:r>
-            <a:r>
-              <a:rPr dirty="0"/>
-              <a:t> a tutti </a:t>
-            </a:r>
-            <a:r>
-              <a:rPr dirty="0" err="1"/>
-              <a:t>i</a:t>
-            </a:r>
-            <a:r>
-              <a:rPr dirty="0"/>
-              <a:t> </a:t>
-            </a:r>
-            <a:r>
-              <a:rPr dirty="0" err="1"/>
-              <a:t>partecipanti</a:t>
-            </a:r>
-            <a:r>
-              <a:rPr dirty="0"/>
-              <a:t>. Ogni </a:t>
-            </a:r>
-            <a:r>
-              <a:rPr dirty="0" err="1"/>
-              <a:t>connessione</a:t>
-            </a:r>
-            <a:r>
-              <a:rPr dirty="0"/>
-              <a:t> è </a:t>
-            </a:r>
-            <a:r>
-              <a:rPr dirty="0" err="1"/>
-              <a:t>tracciata</a:t>
-            </a:r>
-            <a:r>
-              <a:rPr dirty="0"/>
-              <a:t> con un </a:t>
-            </a:r>
-            <a:r>
-              <a:rPr lang="it-IT" dirty="0" err="1"/>
-              <a:t>ActiveConnection</a:t>
-            </a:r>
-            <a:r>
-              <a:rPr dirty="0"/>
-              <a:t> </a:t>
-            </a:r>
-            <a:r>
-              <a:rPr dirty="0" err="1"/>
-              <a:t>che</a:t>
-            </a:r>
-            <a:r>
-              <a:rPr dirty="0"/>
-              <a:t> </a:t>
-            </a:r>
-            <a:r>
-              <a:rPr dirty="0" err="1"/>
-              <a:t>contiene</a:t>
-            </a:r>
-            <a:r>
-              <a:rPr dirty="0"/>
-              <a:t> </a:t>
-            </a:r>
-            <a:r>
-              <a:rPr dirty="0" err="1"/>
-              <a:t>l'ID</a:t>
-            </a:r>
-            <a:r>
-              <a:rPr dirty="0"/>
-              <a:t> di </a:t>
-            </a:r>
-            <a:r>
-              <a:rPr dirty="0" err="1"/>
-              <a:t>sessione</a:t>
-            </a:r>
-            <a:r>
-              <a:rPr dirty="0"/>
-              <a:t> per </a:t>
-            </a:r>
-            <a:r>
-              <a:rPr lang="it-IT" dirty="0"/>
-              <a:t>gestire</a:t>
-            </a:r>
-            <a:r>
-              <a:rPr dirty="0"/>
-              <a:t> login </a:t>
-            </a:r>
-            <a:r>
-              <a:rPr dirty="0" err="1"/>
-              <a:t>multipli</a:t>
-            </a:r>
-            <a:r>
-              <a:rPr dirty="0"/>
-              <a:t> </a:t>
-            </a:r>
-            <a:r>
-              <a:rPr dirty="0" err="1"/>
-              <a:t>dallo</a:t>
-            </a:r>
-            <a:r>
-              <a:rPr dirty="0"/>
-              <a:t> </a:t>
-            </a:r>
-            <a:r>
-              <a:rPr dirty="0" err="1"/>
-              <a:t>stesso</a:t>
-            </a:r>
-            <a:r>
-              <a:rPr dirty="0"/>
-              <a:t> account, e </a:t>
-            </a:r>
-            <a:r>
-              <a:rPr dirty="0" err="1"/>
-              <a:t>i</a:t>
-            </a:r>
-            <a:r>
-              <a:rPr dirty="0"/>
-              <a:t> </a:t>
-            </a:r>
-            <a:r>
-              <a:rPr dirty="0" err="1"/>
-              <a:t>canali</a:t>
-            </a:r>
-            <a:r>
-              <a:rPr dirty="0"/>
-              <a:t> per </a:t>
-            </a:r>
-            <a:r>
-              <a:rPr dirty="0" err="1"/>
-              <a:t>comunicare</a:t>
-            </a:r>
-            <a:r>
-              <a:rPr dirty="0"/>
-              <a:t> </a:t>
-            </a:r>
-            <a:r>
-              <a:rPr dirty="0" err="1"/>
-              <a:t>direttamente</a:t>
-            </a:r>
-            <a:r>
-              <a:rPr dirty="0"/>
-              <a:t> con il Writer Task.</a:t>
-            </a:r>
-          </a:p>
-        </p:txBody>
-      </p:sp>
-      <p:pic>
-        <p:nvPicPr>
-          <p:cNvPr id="24" name="Immagine 23" descr="Immagine che contiene testo, schermata, Carattere&#10;&#10;Il contenuto generato dall'IA potrebbe non essere corretto.">
-            <a:extLst>
-              <a:ext uri="{FF2B5EF4-FFF2-40B4-BE49-F238E27FC236}">
-                <a16:creationId xmlns:a16="http://schemas.microsoft.com/office/drawing/2014/main" id="{28309264-3967-8414-843A-919C36496071}"/>
-              </a:ext>
-            </a:extLst>
-          </p:cNvPr>
-          <p:cNvPicPr>
-            <a:picLocks noChangeAspect="1"/>
-          </p:cNvPicPr>
-          <p:nvPr/>
-        </p:nvPicPr>
-        <p:blipFill>
-          <a:blip r:embed="rId3"/>
-          <a:stretch>
-            <a:fillRect/>
-          </a:stretch>
-        </p:blipFill>
-        <p:spPr>
-          <a:xfrm>
-            <a:off x="693337" y="1287743"/>
-            <a:ext cx="3310429" cy="3042594"/>
           </a:xfrm>
           <a:prstGeom prst="rect">
             <a:avLst/>
@@ -15367,7 +14777,7 @@
 
 <file path=ppt/slides/slide9.xml><?xml version="1.0" encoding="utf-8"?>
 <p:sld xmlns:a="http://schemas.openxmlformats.org/drawingml/2006/main" xmlns:r="http://schemas.openxmlformats.org/officeDocument/2006/relationships" xmlns:p="http://schemas.openxmlformats.org/presentationml/2006/main">
-  <p:cSld name="Slide 9">
+  <p:cSld name="Slide 10">
     <p:bg>
       <p:bgPr>
         <a:solidFill>
@@ -15399,7 +14809,7 @@
         <p:spPr>
           <a:xfrm>
             <a:off x="381000" y="228600"/>
-            <a:ext cx="6995160" cy="323850"/>
+            <a:ext cx="5693283" cy="323850"/>
           </a:xfrm>
           <a:prstGeom prst="rect">
             <a:avLst/>
@@ -15426,7 +14836,7 @@
                 <a:ea typeface="Segoe UI" pitchFamily="34" charset="-122"/>
                 <a:cs typeface="Segoe UI" pitchFamily="34" charset="-120"/>
               </a:rPr>
-              <a:t>Backend: Dual Sequencing - Implementation</a:t>
+              <a:t>Backend: Security - Argon2id + JWT</a:t>
             </a:r>
             <a:endParaRPr lang="en-US" sz="2550" dirty="0"/>
           </a:p>
@@ -15434,22 +14844,24 @@
       </p:sp>
       <p:sp>
         <p:nvSpPr>
-          <p:cNvPr id="26" name="Text 24"/>
+          <p:cNvPr id="23" name="Text 21"/>
           <p:cNvSpPr/>
           <p:nvPr/>
         </p:nvSpPr>
         <p:spPr>
           <a:xfrm>
-            <a:off x="4778284" y="813163"/>
-            <a:ext cx="4095750" cy="4101737"/>
+            <a:off x="4667250" y="778600"/>
+            <a:ext cx="4095750" cy="3738699"/>
           </a:xfrm>
           <a:prstGeom prst="roundRect">
             <a:avLst>
-              <a:gd name="adj" fmla="val 6213"/>
+              <a:gd name="adj" fmla="val 7637"/>
             </a:avLst>
           </a:prstGeom>
           <a:noFill/>
-          <a:ln/>
+          <a:ln>
+            <a:noFill/>
+          </a:ln>
         </p:spPr>
         <p:txBody>
           <a:bodyPr wrap="square" rtlCol="0" anchor="ctr"/>
@@ -15468,19 +14880,7 @@
             </a:pPr>
             <a:r>
               <a:rPr dirty="0"/>
-              <a:t>Due Livelli di </a:t>
-            </a:r>
-            <a:r>
-              <a:rPr dirty="0" err="1"/>
-              <a:t>Sequenze</a:t>
-            </a:r>
-            <a:r>
-              <a:rPr dirty="0"/>
-              <a:t> </a:t>
-            </a:r>
-            <a:r>
-              <a:rPr dirty="0" err="1"/>
-              <a:t>Atomiche</a:t>
+              <a:t>Production-Grade Authentication</a:t>
             </a:r>
             <a:endParaRPr lang="en-US" dirty="0"/>
           </a:p>
@@ -15497,115 +14897,203 @@
             </a:pPr>
             <a:r>
               <a:rPr dirty="0"/>
-              <a:t>Il </a:t>
-            </a:r>
-            <a:r>
-              <a:rPr dirty="0" err="1"/>
-              <a:t>sistema</a:t>
-            </a:r>
-            <a:r>
-              <a:rPr dirty="0"/>
-              <a:t> </a:t>
-            </a:r>
-            <a:r>
-              <a:rPr dirty="0" err="1"/>
-              <a:t>usa</a:t>
-            </a:r>
-            <a:r>
-              <a:rPr dirty="0"/>
-              <a:t> due </a:t>
-            </a:r>
-            <a:r>
-              <a:rPr dirty="0" err="1"/>
-              <a:t>livelli</a:t>
-            </a:r>
-            <a:r>
-              <a:rPr dirty="0"/>
-              <a:t> di </a:t>
-            </a:r>
-            <a:r>
-              <a:rPr dirty="0" err="1"/>
-              <a:t>sequenze</a:t>
-            </a:r>
-            <a:r>
-              <a:rPr dirty="0"/>
-              <a:t> per </a:t>
-            </a:r>
-            <a:r>
-              <a:rPr dirty="0" err="1"/>
-              <a:t>garantire</a:t>
-            </a:r>
-            <a:r>
-              <a:rPr dirty="0"/>
-              <a:t> </a:t>
-            </a:r>
-            <a:r>
-              <a:rPr dirty="0" err="1"/>
-              <a:t>l'ordine</a:t>
-            </a:r>
-            <a:r>
-              <a:rPr dirty="0"/>
-              <a:t> </a:t>
-            </a:r>
-            <a:r>
-              <a:rPr dirty="0" err="1"/>
-              <a:t>dei</a:t>
-            </a:r>
-            <a:r>
-              <a:rPr dirty="0"/>
-              <a:t> </a:t>
-            </a:r>
-            <a:r>
-              <a:rPr dirty="0" err="1"/>
-              <a:t>messaggi</a:t>
-            </a:r>
-            <a:r>
-              <a:rPr dirty="0"/>
-              <a:t>. Ogni </a:t>
-            </a:r>
-            <a:r>
-              <a:rPr dirty="0" err="1"/>
-              <a:t>messaggio</a:t>
-            </a:r>
-            <a:r>
-              <a:rPr dirty="0"/>
-              <a:t> in </a:t>
-            </a:r>
-            <a:r>
-              <a:rPr dirty="0" err="1"/>
-              <a:t>una</a:t>
-            </a:r>
-            <a:r>
-              <a:rPr dirty="0"/>
-              <a:t> conversazione </a:t>
-            </a:r>
-            <a:r>
-              <a:rPr dirty="0" err="1"/>
-              <a:t>riceve</a:t>
-            </a:r>
-            <a:r>
-              <a:rPr dirty="0"/>
-              <a:t> un </a:t>
-            </a:r>
-            <a:r>
-              <a:rPr dirty="0" err="1"/>
-              <a:t>numero</a:t>
-            </a:r>
-            <a:r>
-              <a:rPr dirty="0"/>
-              <a:t> di </a:t>
-            </a:r>
-            <a:r>
-              <a:rPr dirty="0" err="1"/>
-              <a:t>sequenza</a:t>
-            </a:r>
-            <a:r>
-              <a:rPr dirty="0"/>
-              <a:t> </a:t>
-            </a:r>
-            <a:r>
-              <a:rPr dirty="0" err="1"/>
-              <a:t>incrementale</a:t>
+              <a:t>L'autenticazione è production-grade con Argon2id per </a:t>
+            </a:r>
+            <a:r>
+              <a:rPr dirty="0" err="1"/>
+              <a:t>l'hashing</a:t>
+            </a:r>
+            <a:r>
+              <a:rPr dirty="0"/>
+              <a:t> delle password e JWT per le </a:t>
+            </a:r>
+            <a:r>
+              <a:rPr dirty="0" err="1"/>
+              <a:t>sessioni</a:t>
+            </a:r>
+            <a:r>
+              <a:rPr dirty="0"/>
+              <a:t>. Argon2id è un </a:t>
+            </a:r>
+            <a:r>
+              <a:rPr dirty="0" err="1"/>
+              <a:t>algoritmo</a:t>
+            </a:r>
+            <a:r>
+              <a:rPr dirty="0"/>
+              <a:t> </a:t>
+            </a:r>
+            <a:r>
+              <a:rPr dirty="0" err="1"/>
+              <a:t>ibrido</a:t>
+            </a:r>
+            <a:r>
+              <a:rPr dirty="0"/>
+              <a:t> </a:t>
+            </a:r>
+            <a:r>
+              <a:rPr dirty="0" err="1"/>
+              <a:t>resistente</a:t>
+            </a:r>
+            <a:r>
+              <a:rPr dirty="0"/>
+              <a:t> </a:t>
+            </a:r>
+            <a:r>
+              <a:rPr dirty="0" err="1"/>
+              <a:t>sia</a:t>
+            </a:r>
+            <a:r>
+              <a:rPr dirty="0"/>
+              <a:t> </a:t>
+            </a:r>
+            <a:r>
+              <a:rPr dirty="0" err="1"/>
+              <a:t>agli</a:t>
+            </a:r>
+            <a:r>
+              <a:rPr dirty="0"/>
+              <a:t> </a:t>
+            </a:r>
+            <a:r>
+              <a:rPr dirty="0" err="1"/>
+              <a:t>attacchi</a:t>
+            </a:r>
+            <a:r>
+              <a:rPr dirty="0"/>
+              <a:t> side-channel </a:t>
+            </a:r>
+            <a:r>
+              <a:rPr dirty="0" err="1"/>
+              <a:t>che</a:t>
+            </a:r>
+            <a:r>
+              <a:rPr dirty="0"/>
+              <a:t> a </a:t>
+            </a:r>
+            <a:r>
+              <a:rPr dirty="0" err="1"/>
+              <a:t>quelli</a:t>
+            </a:r>
+            <a:r>
+              <a:rPr dirty="0"/>
+              <a:t> GPU-based. Ogni password </a:t>
+            </a:r>
+            <a:r>
+              <a:rPr dirty="0" err="1"/>
+              <a:t>viene</a:t>
+            </a:r>
+            <a:r>
+              <a:rPr dirty="0"/>
+              <a:t> </a:t>
+            </a:r>
+            <a:r>
+              <a:rPr dirty="0" err="1"/>
+              <a:t>hashata</a:t>
+            </a:r>
+            <a:r>
+              <a:rPr dirty="0"/>
+              <a:t> con un salt </a:t>
+            </a:r>
+            <a:r>
+              <a:rPr dirty="0" err="1"/>
+              <a:t>crittograficamente</a:t>
+            </a:r>
+            <a:r>
+              <a:rPr dirty="0"/>
+              <a:t> </a:t>
+            </a:r>
+            <a:r>
+              <a:rPr dirty="0" err="1"/>
+              <a:t>sicuro</a:t>
+            </a:r>
+            <a:r>
+              <a:rPr dirty="0"/>
+              <a:t> prima di </a:t>
+            </a:r>
+            <a:r>
+              <a:rPr dirty="0" err="1"/>
+              <a:t>essere</a:t>
+            </a:r>
+            <a:r>
+              <a:rPr dirty="0"/>
+              <a:t> </a:t>
+            </a:r>
+            <a:r>
+              <a:rPr dirty="0" err="1"/>
+              <a:t>salvata</a:t>
+            </a:r>
+            <a:r>
+              <a:rPr dirty="0"/>
+              <a:t>. I JWT token </a:t>
+            </a:r>
+            <a:r>
+              <a:rPr dirty="0" err="1"/>
+              <a:t>contengono</a:t>
+            </a:r>
+            <a:r>
+              <a:rPr dirty="0"/>
+              <a:t> </a:t>
+            </a:r>
+            <a:r>
+              <a:rPr dirty="0" err="1"/>
+              <a:t>user_id</a:t>
+            </a:r>
+            <a:r>
+              <a:rPr dirty="0"/>
+              <a:t>, username e </a:t>
+            </a:r>
+            <a:r>
+              <a:rPr dirty="0" err="1"/>
+              <a:t>scadenza</a:t>
+            </a:r>
+            <a:r>
+              <a:rPr dirty="0"/>
+              <a:t> a 24 ore, </a:t>
+            </a:r>
+            <a:r>
+              <a:rPr dirty="0" err="1"/>
+              <a:t>firmati</a:t>
+            </a:r>
+            <a:r>
+              <a:rPr dirty="0"/>
+              <a:t> con HMAC-SHA256. Un middleware </a:t>
+            </a:r>
+            <a:r>
+              <a:rPr dirty="0" err="1"/>
+              <a:t>valida</a:t>
+            </a:r>
+            <a:r>
+              <a:rPr dirty="0"/>
+              <a:t> </a:t>
+            </a:r>
+            <a:r>
+              <a:rPr dirty="0" err="1"/>
+              <a:t>automaticamente</a:t>
+            </a:r>
+            <a:r>
+              <a:rPr dirty="0"/>
+              <a:t> il token </a:t>
+            </a:r>
+            <a:r>
+              <a:rPr dirty="0" err="1"/>
+              <a:t>su</a:t>
+            </a:r>
+            <a:r>
+              <a:rPr dirty="0"/>
+              <a:t> ogni </a:t>
+            </a:r>
+            <a:r>
+              <a:rPr dirty="0" err="1"/>
+              <a:t>richiesta</a:t>
+            </a:r>
+            <a:r>
+              <a:rPr dirty="0"/>
+              <a:t> </a:t>
+            </a:r>
+            <a:r>
+              <a:rPr dirty="0" err="1"/>
+              <a:t>protetta</a:t>
             </a:r>
             <a:r>
               <a:rPr dirty="0"/>
@@ -15613,47 +15101,15 @@
             </a:r>
             <a:r>
               <a:rPr dirty="0" err="1"/>
-              <a:t>usato</a:t>
-            </a:r>
-            <a:r>
-              <a:rPr dirty="0"/>
-              <a:t> per </a:t>
-            </a:r>
-            <a:r>
-              <a:rPr dirty="0" err="1"/>
-              <a:t>rilevare</a:t>
-            </a:r>
-            <a:r>
-              <a:rPr dirty="0"/>
-              <a:t> gap e </a:t>
-            </a:r>
-            <a:r>
-              <a:rPr dirty="0" err="1"/>
-              <a:t>implementare</a:t>
-            </a:r>
-            <a:r>
-              <a:rPr dirty="0"/>
-              <a:t> il mark-as-read. </a:t>
-            </a:r>
-            <a:r>
-              <a:rPr dirty="0" err="1"/>
-              <a:t>Gli</a:t>
-            </a:r>
-            <a:r>
-              <a:rPr dirty="0"/>
-              <a:t> </a:t>
-            </a:r>
-            <a:r>
-              <a:rPr dirty="0" err="1"/>
-              <a:t>eventi</a:t>
-            </a:r>
-            <a:r>
-              <a:rPr dirty="0"/>
-              <a:t> cross-conversazione come </a:t>
-            </a:r>
-            <a:r>
-              <a:rPr dirty="0" err="1"/>
-              <a:t>conferme</a:t>
+              <a:t>estraendo</a:t>
+            </a:r>
+            <a:r>
+              <a:rPr dirty="0"/>
+              <a:t> le </a:t>
+            </a:r>
+            <a:r>
+              <a:rPr dirty="0" err="1"/>
+              <a:t>credenziali</a:t>
             </a:r>
             <a:r>
               <a:rPr dirty="0"/>
@@ -15661,91 +15117,11 @@
             </a:r>
             <a:r>
               <a:rPr dirty="0" err="1"/>
-              <a:t>notifiche</a:t>
-            </a:r>
-            <a:r>
-              <a:rPr dirty="0"/>
-              <a:t> </a:t>
-            </a:r>
-            <a:r>
-              <a:rPr dirty="0" err="1"/>
-              <a:t>ricevono</a:t>
-            </a:r>
-            <a:r>
-              <a:rPr dirty="0"/>
-              <a:t> </a:t>
-            </a:r>
-            <a:r>
-              <a:rPr dirty="0" err="1"/>
-              <a:t>invece</a:t>
-            </a:r>
-            <a:r>
-              <a:rPr dirty="0"/>
-              <a:t> </a:t>
-            </a:r>
-            <a:r>
-              <a:rPr dirty="0" err="1"/>
-              <a:t>una</a:t>
-            </a:r>
-            <a:r>
-              <a:rPr dirty="0"/>
-              <a:t> </a:t>
-            </a:r>
-            <a:r>
-              <a:rPr dirty="0" err="1"/>
-              <a:t>sequenza</a:t>
-            </a:r>
-            <a:r>
-              <a:rPr dirty="0"/>
-              <a:t> </a:t>
-            </a:r>
-            <a:r>
-              <a:rPr dirty="0" err="1"/>
-              <a:t>globale</a:t>
-            </a:r>
-            <a:r>
-              <a:rPr dirty="0"/>
-              <a:t> per </a:t>
-            </a:r>
-            <a:r>
-              <a:rPr dirty="0" err="1"/>
-              <a:t>utente</a:t>
-            </a:r>
-            <a:r>
-              <a:rPr dirty="0"/>
-              <a:t>. Le </a:t>
-            </a:r>
-            <a:r>
-              <a:rPr dirty="0" err="1"/>
-              <a:t>sequenze</a:t>
-            </a:r>
-            <a:r>
-              <a:rPr dirty="0"/>
-              <a:t> </a:t>
-            </a:r>
-            <a:r>
-              <a:rPr dirty="0" err="1"/>
-              <a:t>sono</a:t>
-            </a:r>
-            <a:r>
-              <a:rPr dirty="0"/>
-              <a:t> generate </a:t>
-            </a:r>
-            <a:r>
-              <a:rPr dirty="0" err="1"/>
-              <a:t>atomicamente</a:t>
-            </a:r>
-            <a:r>
-              <a:rPr dirty="0"/>
-              <a:t> </a:t>
-            </a:r>
-            <a:r>
-              <a:rPr dirty="0" err="1"/>
-              <a:t>tramite</a:t>
-            </a:r>
-            <a:r>
-              <a:rPr dirty="0"/>
-              <a:t> subquery SQL </a:t>
+              <a:t>verificando</a:t>
+            </a:r>
+            <a:r>
+              <a:rPr dirty="0"/>
+              <a:t> </a:t>
             </a:r>
             <a:r>
               <a:rPr dirty="0" err="1"/>
@@ -15753,89 +15129,33 @@
             </a:r>
             <a:r>
               <a:rPr dirty="0"/>
-              <a:t> </a:t>
-            </a:r>
-            <a:r>
-              <a:rPr dirty="0" err="1"/>
-              <a:t>usano</a:t>
-            </a:r>
-            <a:r>
-              <a:rPr dirty="0"/>
-              <a:t> COALESCE per </a:t>
-            </a:r>
-            <a:r>
-              <a:rPr dirty="0" err="1"/>
-              <a:t>gestire</a:t>
-            </a:r>
-            <a:r>
-              <a:rPr dirty="0"/>
-              <a:t> il primo </a:t>
-            </a:r>
-            <a:r>
-              <a:rPr dirty="0" err="1"/>
-              <a:t>inserimento</a:t>
-            </a:r>
-            <a:r>
-              <a:rPr dirty="0"/>
-              <a:t>. </a:t>
-            </a:r>
-            <a:r>
-              <a:rPr dirty="0" err="1"/>
-              <a:t>Questo</a:t>
-            </a:r>
-            <a:r>
-              <a:rPr dirty="0"/>
-              <a:t> </a:t>
-            </a:r>
-            <a:r>
-              <a:rPr dirty="0" err="1"/>
-              <a:t>approccio</a:t>
-            </a:r>
-            <a:r>
-              <a:rPr dirty="0"/>
-              <a:t> </a:t>
-            </a:r>
-            <a:r>
-              <a:rPr dirty="0" err="1"/>
-              <a:t>sfrutta</a:t>
-            </a:r>
-            <a:r>
-              <a:rPr dirty="0"/>
-              <a:t> la </a:t>
-            </a:r>
-            <a:r>
-              <a:rPr dirty="0" err="1"/>
-              <a:t>serializzabilità</a:t>
-            </a:r>
-            <a:r>
-              <a:rPr dirty="0"/>
-              <a:t> delle </a:t>
-            </a:r>
-            <a:r>
-              <a:rPr dirty="0" err="1"/>
-              <a:t>transazioni</a:t>
-            </a:r>
-            <a:r>
-              <a:rPr dirty="0"/>
-              <a:t> SQLite per </a:t>
-            </a:r>
-            <a:r>
-              <a:rPr dirty="0" err="1"/>
-              <a:t>evitare</a:t>
-            </a:r>
-            <a:r>
-              <a:rPr dirty="0"/>
-              <a:t> race condition.</a:t>
+              <a:t> non </a:t>
+            </a:r>
+            <a:r>
+              <a:rPr dirty="0" err="1"/>
+              <a:t>sia</a:t>
+            </a:r>
+            <a:r>
+              <a:rPr dirty="0"/>
+              <a:t> </a:t>
+            </a:r>
+            <a:r>
+              <a:rPr dirty="0" err="1"/>
+              <a:t>scaduto</a:t>
+            </a:r>
+            <a:r>
+              <a:rPr dirty="0"/>
+              <a:t>.</a:t>
             </a:r>
           </a:p>
         </p:txBody>
       </p:sp>
       <p:pic>
         <p:nvPicPr>
-          <p:cNvPr id="25" name="Immagine 24" descr="Immagine che contiene testo, schermata, Carattere&#10;&#10;Il contenuto generato dall'IA potrebbe non essere corretto.">
+          <p:cNvPr id="22" name="Immagine 21" descr="Immagine che contiene testo, schermata, Carattere&#10;&#10;Il contenuto generato dall'IA potrebbe non essere corretto.">
             <a:extLst>
               <a:ext uri="{FF2B5EF4-FFF2-40B4-BE49-F238E27FC236}">
-                <a16:creationId xmlns:a16="http://schemas.microsoft.com/office/drawing/2014/main" id="{CEAACDDA-5E61-47A0-6B66-3B25D517136F}"/>
+                <a16:creationId xmlns:a16="http://schemas.microsoft.com/office/drawing/2014/main" id="{A87370BB-3C30-5052-56E7-693EE4295AE9}"/>
               </a:ext>
             </a:extLst>
           </p:cNvPr>
@@ -15852,8 +15172,8 @@
         </p:blipFill>
         <p:spPr>
           <a:xfrm>
-            <a:off x="962105" y="1209925"/>
-            <a:ext cx="2976346" cy="3175574"/>
+            <a:off x="869588" y="1189689"/>
+            <a:ext cx="3401966" cy="2981178"/>
           </a:xfrm>
           <a:prstGeom prst="rect">
             <a:avLst/>

--- a/ruggine_chat_presentazione.pptx
+++ b/ruggine_chat_presentazione.pptx
@@ -5,7 +5,7 @@
     <p:sldMasterId id="2147483648" r:id="rId1"/>
   </p:sldMasterIdLst>
   <p:notesMasterIdLst>
-    <p:notesMasterId r:id="rId26"/>
+    <p:notesMasterId r:id="rId27"/>
   </p:notesMasterIdLst>
   <p:sldIdLst>
     <p:sldId id="256" r:id="rId2"/>
@@ -19,19 +19,20 @@
     <p:sldId id="265" r:id="rId10"/>
     <p:sldId id="264" r:id="rId11"/>
     <p:sldId id="266" r:id="rId12"/>
-    <p:sldId id="268" r:id="rId13"/>
-    <p:sldId id="269" r:id="rId14"/>
-    <p:sldId id="270" r:id="rId15"/>
-    <p:sldId id="271" r:id="rId16"/>
-    <p:sldId id="272" r:id="rId17"/>
-    <p:sldId id="273" r:id="rId18"/>
-    <p:sldId id="274" r:id="rId19"/>
-    <p:sldId id="275" r:id="rId20"/>
-    <p:sldId id="276" r:id="rId21"/>
-    <p:sldId id="277" r:id="rId22"/>
-    <p:sldId id="278" r:id="rId23"/>
-    <p:sldId id="279" r:id="rId24"/>
-    <p:sldId id="281" r:id="rId25"/>
+    <p:sldId id="284" r:id="rId13"/>
+    <p:sldId id="268" r:id="rId14"/>
+    <p:sldId id="269" r:id="rId15"/>
+    <p:sldId id="270" r:id="rId16"/>
+    <p:sldId id="271" r:id="rId17"/>
+    <p:sldId id="272" r:id="rId18"/>
+    <p:sldId id="273" r:id="rId19"/>
+    <p:sldId id="274" r:id="rId20"/>
+    <p:sldId id="275" r:id="rId21"/>
+    <p:sldId id="276" r:id="rId22"/>
+    <p:sldId id="277" r:id="rId23"/>
+    <p:sldId id="278" r:id="rId24"/>
+    <p:sldId id="279" r:id="rId25"/>
+    <p:sldId id="281" r:id="rId26"/>
   </p:sldIdLst>
   <p:sldSz cx="9144000" cy="5143500" type="screen16x9"/>
   <p:notesSz cx="5143500" cy="9144000"/>
@@ -517,7 +518,13 @@
   <p:cSld>
     <p:spTree>
       <p:nvGrpSpPr>
-        <p:cNvPr id="1" name=""/>
+        <p:cNvPr id="1" name="">
+          <a:extLst>
+            <a:ext uri="{FF2B5EF4-FFF2-40B4-BE49-F238E27FC236}">
+              <a16:creationId xmlns:a16="http://schemas.microsoft.com/office/drawing/2014/main" id="{B350114E-CA04-17E5-F356-A6D87A082245}"/>
+            </a:ext>
+          </a:extLst>
+        </p:cNvPr>
         <p:cNvGrpSpPr/>
         <p:nvPr/>
       </p:nvGrpSpPr>
@@ -531,7 +538,13 @@
       </p:grpSpPr>
       <p:sp>
         <p:nvSpPr>
-          <p:cNvPr id="2" name="Slide Image Placeholder 1"/>
+          <p:cNvPr id="2" name="Slide Image Placeholder 1">
+            <a:extLst>
+              <a:ext uri="{FF2B5EF4-FFF2-40B4-BE49-F238E27FC236}">
+                <a16:creationId xmlns:a16="http://schemas.microsoft.com/office/drawing/2014/main" id="{9FEA418B-EC0A-15F3-F28B-497DD02BF947}"/>
+              </a:ext>
+            </a:extLst>
+          </p:cNvPr>
           <p:cNvSpPr>
             <a:spLocks noGrp="1" noRot="1" noChangeAspect="1"/>
           </p:cNvSpPr>
@@ -543,7 +556,13 @@
       </p:sp>
       <p:sp>
         <p:nvSpPr>
-          <p:cNvPr id="3" name="Notes Placeholder 2"/>
+          <p:cNvPr id="3" name="Notes Placeholder 2">
+            <a:extLst>
+              <a:ext uri="{FF2B5EF4-FFF2-40B4-BE49-F238E27FC236}">
+                <a16:creationId xmlns:a16="http://schemas.microsoft.com/office/drawing/2014/main" id="{B0C3A316-EACC-4BA2-17AB-8F4AC198FDBE}"/>
+              </a:ext>
+            </a:extLst>
+          </p:cNvPr>
           <p:cNvSpPr>
             <a:spLocks noGrp="1"/>
           </p:cNvSpPr>
@@ -562,7 +581,13 @@
       </p:sp>
       <p:sp>
         <p:nvSpPr>
-          <p:cNvPr id="4" name="Slide Number Placeholder 3"/>
+          <p:cNvPr id="4" name="Slide Number Placeholder 3">
+            <a:extLst>
+              <a:ext uri="{FF2B5EF4-FFF2-40B4-BE49-F238E27FC236}">
+                <a16:creationId xmlns:a16="http://schemas.microsoft.com/office/drawing/2014/main" id="{F6C34B3C-84FF-BA86-CA9A-C17A2A5FF391}"/>
+              </a:ext>
+            </a:extLst>
+          </p:cNvPr>
           <p:cNvSpPr>
             <a:spLocks noGrp="1"/>
           </p:cNvSpPr>
@@ -586,7 +611,7 @@
     </p:spTree>
     <p:extLst>
       <p:ext uri="{BB962C8B-B14F-4D97-AF65-F5344CB8AC3E}">
-        <p14:creationId xmlns:p14="http://schemas.microsoft.com/office/powerpoint/2010/main" val="1024086991"/>
+        <p14:creationId xmlns:p14="http://schemas.microsoft.com/office/powerpoint/2010/main" val="3402778331"/>
       </p:ext>
     </p:extLst>
   </p:cSld>
@@ -1670,6 +1695,90 @@
             <a:fld id="{F7021451-1387-4CA6-816F-3879F97B5CBC}" type="slidenum">
               <a:rPr lang="en-US"/>
               <a:t>24</a:t>
+            </a:fld>
+            <a:endParaRPr lang="en-US"/>
+          </a:p>
+        </p:txBody>
+      </p:sp>
+    </p:spTree>
+    <p:extLst>
+      <p:ext uri="{BB962C8B-B14F-4D97-AF65-F5344CB8AC3E}">
+        <p14:creationId xmlns:p14="http://schemas.microsoft.com/office/powerpoint/2010/main" val="1024086991"/>
+      </p:ext>
+    </p:extLst>
+  </p:cSld>
+  <p:clrMapOvr>
+    <a:masterClrMapping/>
+  </p:clrMapOvr>
+</p:notes>
+</file>
+
+<file path=ppt/notesSlides/notesSlide25.xml><?xml version="1.0" encoding="utf-8"?>
+<p:notes xmlns:a="http://schemas.openxmlformats.org/drawingml/2006/main" xmlns:r="http://schemas.openxmlformats.org/officeDocument/2006/relationships" xmlns:p="http://schemas.openxmlformats.org/presentationml/2006/main">
+  <p:cSld>
+    <p:spTree>
+      <p:nvGrpSpPr>
+        <p:cNvPr id="1" name=""/>
+        <p:cNvGrpSpPr/>
+        <p:nvPr/>
+      </p:nvGrpSpPr>
+      <p:grpSpPr>
+        <a:xfrm>
+          <a:off x="0" y="0"/>
+          <a:ext cx="0" cy="0"/>
+          <a:chOff x="0" y="0"/>
+          <a:chExt cx="0" cy="0"/>
+        </a:xfrm>
+      </p:grpSpPr>
+      <p:sp>
+        <p:nvSpPr>
+          <p:cNvPr id="2" name="Slide Image Placeholder 1"/>
+          <p:cNvSpPr>
+            <a:spLocks noGrp="1" noRot="1" noChangeAspect="1"/>
+          </p:cNvSpPr>
+          <p:nvPr>
+            <p:ph type="sldImg"/>
+          </p:nvPr>
+        </p:nvSpPr>
+        <p:spPr/>
+      </p:sp>
+      <p:sp>
+        <p:nvSpPr>
+          <p:cNvPr id="3" name="Notes Placeholder 2"/>
+          <p:cNvSpPr>
+            <a:spLocks noGrp="1"/>
+          </p:cNvSpPr>
+          <p:nvPr>
+            <p:ph type="body" idx="1"/>
+          </p:nvPr>
+        </p:nvSpPr>
+        <p:spPr/>
+        <p:txBody>
+          <a:bodyPr/>
+          <a:lstStyle/>
+          <a:p>
+            <a:endParaRPr lang="en-US" dirty="0"/>
+          </a:p>
+        </p:txBody>
+      </p:sp>
+      <p:sp>
+        <p:nvSpPr>
+          <p:cNvPr id="4" name="Slide Number Placeholder 3"/>
+          <p:cNvSpPr>
+            <a:spLocks noGrp="1"/>
+          </p:cNvSpPr>
+          <p:nvPr>
+            <p:ph type="sldNum" sz="quarter" idx="10"/>
+          </p:nvPr>
+        </p:nvSpPr>
+        <p:spPr/>
+        <p:txBody>
+          <a:bodyPr/>
+          <a:lstStyle/>
+          <a:p>
+            <a:fld id="{F7021451-1387-4CA6-816F-3879F97B5CBC}" type="slidenum">
+              <a:rPr lang="en-US"/>
+              <a:t>25</a:t>
             </a:fld>
             <a:endParaRPr lang="en-US"/>
           </a:p>
@@ -3433,6 +3542,509 @@
 
 <file path=ppt/slides/slide12.xml><?xml version="1.0" encoding="utf-8"?>
 <p:sld xmlns:a="http://schemas.openxmlformats.org/drawingml/2006/main" xmlns:r="http://schemas.openxmlformats.org/officeDocument/2006/relationships" xmlns:p="http://schemas.openxmlformats.org/presentationml/2006/main">
+  <p:cSld>
+    <p:bg>
+      <p:bgPr>
+        <a:solidFill>
+          <a:srgbClr val="FFFFFF"/>
+        </a:solidFill>
+        <a:effectLst/>
+      </p:bgPr>
+    </p:bg>
+    <p:spTree>
+      <p:nvGrpSpPr>
+        <p:cNvPr id="1" name="">
+          <a:extLst>
+            <a:ext uri="{FF2B5EF4-FFF2-40B4-BE49-F238E27FC236}">
+              <a16:creationId xmlns:a16="http://schemas.microsoft.com/office/drawing/2014/main" id="{9FA035BF-4210-8358-2E1B-D02A21687E80}"/>
+            </a:ext>
+          </a:extLst>
+        </p:cNvPr>
+        <p:cNvGrpSpPr/>
+        <p:nvPr/>
+      </p:nvGrpSpPr>
+      <p:grpSpPr>
+        <a:xfrm>
+          <a:off x="0" y="0"/>
+          <a:ext cx="0" cy="0"/>
+          <a:chOff x="0" y="0"/>
+          <a:chExt cx="0" cy="0"/>
+        </a:xfrm>
+      </p:grpSpPr>
+      <p:sp>
+        <p:nvSpPr>
+          <p:cNvPr id="2" name="Text 0">
+            <a:extLst>
+              <a:ext uri="{FF2B5EF4-FFF2-40B4-BE49-F238E27FC236}">
+                <a16:creationId xmlns:a16="http://schemas.microsoft.com/office/drawing/2014/main" id="{E0507684-BF24-D30B-8D81-C20E94687189}"/>
+              </a:ext>
+            </a:extLst>
+          </p:cNvPr>
+          <p:cNvSpPr/>
+          <p:nvPr/>
+        </p:nvSpPr>
+        <p:spPr>
+          <a:xfrm>
+            <a:off x="381000" y="228600"/>
+            <a:ext cx="7752969" cy="323850"/>
+          </a:xfrm>
+          <a:prstGeom prst="rect">
+            <a:avLst/>
+          </a:prstGeom>
+          <a:noFill/>
+          <a:ln/>
+        </p:spPr>
+        <p:txBody>
+          <a:bodyPr wrap="square" lIns="0" tIns="0" rIns="0" bIns="0" rtlCol="0" anchor="t"/>
+          <a:lstStyle/>
+          <a:p>
+            <a:pPr>
+              <a:lnSpc>
+                <a:spcPts val="2550"/>
+              </a:lnSpc>
+            </a:pPr>
+            <a:r>
+              <a:rPr lang="it-IT" sz="2550" b="1" dirty="0" err="1">
+                <a:solidFill>
+                  <a:srgbClr val="CE422B"/>
+                </a:solidFill>
+                <a:latin typeface="Segoe UI" pitchFamily="34" charset="0"/>
+                <a:cs typeface="Segoe UI" pitchFamily="34" charset="-120"/>
+              </a:rPr>
+              <a:t>Backend</a:t>
+            </a:r>
+            <a:r>
+              <a:rPr lang="it-IT" sz="2550" b="1" dirty="0">
+                <a:solidFill>
+                  <a:srgbClr val="CE422B"/>
+                </a:solidFill>
+                <a:latin typeface="Segoe UI" pitchFamily="34" charset="0"/>
+                <a:cs typeface="Segoe UI" pitchFamily="34" charset="-120"/>
+              </a:rPr>
+              <a:t>: Creazione Conversazioni</a:t>
+            </a:r>
+            <a:endParaRPr lang="en-US" sz="2550" b="1" dirty="0">
+              <a:solidFill>
+                <a:srgbClr val="CE422B"/>
+              </a:solidFill>
+              <a:latin typeface="Segoe UI" pitchFamily="34" charset="0"/>
+              <a:cs typeface="Segoe UI" pitchFamily="34" charset="-120"/>
+            </a:endParaRPr>
+          </a:p>
+        </p:txBody>
+      </p:sp>
+      <p:sp>
+        <p:nvSpPr>
+          <p:cNvPr id="23" name="Text 21">
+            <a:extLst>
+              <a:ext uri="{FF2B5EF4-FFF2-40B4-BE49-F238E27FC236}">
+                <a16:creationId xmlns:a16="http://schemas.microsoft.com/office/drawing/2014/main" id="{6235C5A8-C199-BBCE-BBEF-AB5EF9AEA7CD}"/>
+              </a:ext>
+            </a:extLst>
+          </p:cNvPr>
+          <p:cNvSpPr/>
+          <p:nvPr/>
+        </p:nvSpPr>
+        <p:spPr>
+          <a:xfrm>
+            <a:off x="4049486" y="897527"/>
+            <a:ext cx="4539342" cy="3764534"/>
+          </a:xfrm>
+          <a:prstGeom prst="roundRect">
+            <a:avLst>
+              <a:gd name="adj" fmla="val 9938"/>
+            </a:avLst>
+          </a:prstGeom>
+          <a:noFill/>
+          <a:ln/>
+        </p:spPr>
+        <p:txBody>
+          <a:bodyPr wrap="square" rtlCol="0" anchor="ctr"/>
+          <a:lstStyle/>
+          <a:p>
+            <a:pPr>
+              <a:spcAft>
+                <a:spcPts val="1200"/>
+              </a:spcAft>
+              <a:defRPr sz="1600" b="1">
+                <a:solidFill>
+                  <a:srgbClr val="0070C0"/>
+                </a:solidFill>
+              </a:defRPr>
+            </a:pPr>
+            <a:r>
+              <a:rPr lang="it-IT" sz="1600" b="1" dirty="0"/>
+              <a:t>Dal </a:t>
+            </a:r>
+            <a:r>
+              <a:rPr lang="it-IT" sz="1600" b="1" dirty="0" err="1"/>
+              <a:t>WebSocket</a:t>
+            </a:r>
+            <a:r>
+              <a:rPr lang="it-IT" sz="1600" b="1" dirty="0"/>
+              <a:t> al Database al Broadcast</a:t>
+            </a:r>
+            <a:endParaRPr lang="en-US" dirty="0"/>
+          </a:p>
+          <a:p>
+            <a:r>
+              <a:rPr lang="it-IT" sz="1100" b="1" dirty="0"/>
+              <a:t>1. Evento arriva al server</a:t>
+            </a:r>
+            <a:r>
+              <a:rPr lang="it-IT" sz="1100" dirty="0"/>
+              <a:t> Client invia </a:t>
+            </a:r>
+            <a:r>
+              <a:rPr lang="it-IT" sz="1100" dirty="0" err="1"/>
+              <a:t>create_conversation</a:t>
+            </a:r>
+            <a:r>
+              <a:rPr lang="it-IT" sz="1100" dirty="0"/>
+              <a:t> o </a:t>
+            </a:r>
+            <a:r>
+              <a:rPr lang="it-IT" sz="1100" dirty="0" err="1"/>
+              <a:t>create_group</a:t>
+            </a:r>
+            <a:r>
+              <a:rPr lang="it-IT" sz="1100" dirty="0"/>
+              <a:t> via </a:t>
+            </a:r>
+            <a:r>
+              <a:rPr lang="it-IT" sz="1100" dirty="0" err="1"/>
+              <a:t>WebSocket</a:t>
+            </a:r>
+            <a:r>
+              <a:rPr lang="it-IT" sz="1100" dirty="0"/>
+              <a:t>. Il Reader Task riceve e valida la richiesta.</a:t>
+            </a:r>
+          </a:p>
+          <a:p>
+            <a:r>
+              <a:rPr lang="it-IT" sz="1100" b="1" dirty="0"/>
+              <a:t>2. Salvataggio database</a:t>
+            </a:r>
+            <a:r>
+              <a:rPr lang="it-IT" sz="1100" dirty="0"/>
+              <a:t> Handler esegue transazione atomica: INSERT </a:t>
+            </a:r>
+            <a:r>
+              <a:rPr lang="it-IT" sz="1100" dirty="0" err="1"/>
+              <a:t>conversations</a:t>
+            </a:r>
+            <a:r>
+              <a:rPr lang="it-IT" sz="1100" dirty="0"/>
+              <a:t>, INSERT </a:t>
+            </a:r>
+            <a:r>
+              <a:rPr lang="it-IT" sz="1100" dirty="0" err="1"/>
+              <a:t>participants</a:t>
+            </a:r>
+            <a:r>
+              <a:rPr lang="it-IT" sz="1100" dirty="0"/>
+              <a:t> con ruoli appropriati (DM: entrambi "</a:t>
+            </a:r>
+            <a:r>
+              <a:rPr lang="it-IT" sz="1100" dirty="0" err="1"/>
+              <a:t>member</a:t>
+            </a:r>
+            <a:r>
+              <a:rPr lang="it-IT" sz="1100" dirty="0"/>
+              <a:t>", Gruppo: creator "</a:t>
+            </a:r>
+            <a:r>
+              <a:rPr lang="it-IT" sz="1100" dirty="0" err="1"/>
+              <a:t>owner</a:t>
+            </a:r>
+            <a:r>
+              <a:rPr lang="it-IT" sz="1100" dirty="0"/>
+              <a:t>"), e messaggio iniziale se presente.</a:t>
+            </a:r>
+          </a:p>
+          <a:p>
+            <a:r>
+              <a:rPr lang="it-IT" sz="1100" b="1" dirty="0"/>
+              <a:t>3. Broadcasting eventi differenziati</a:t>
+            </a:r>
+            <a:r>
+              <a:rPr lang="it-IT" sz="1100" dirty="0"/>
+              <a:t> Creator riceve </a:t>
+            </a:r>
+            <a:r>
+              <a:rPr lang="it-IT" sz="1100" dirty="0" err="1"/>
+              <a:t>conversation_confirmation</a:t>
+            </a:r>
+            <a:r>
+              <a:rPr lang="it-IT" sz="1100" dirty="0"/>
+              <a:t> con </a:t>
+            </a:r>
+            <a:r>
+              <a:rPr lang="it-IT" sz="1100" dirty="0" err="1"/>
+              <a:t>client_temp_id</a:t>
+            </a:r>
+            <a:r>
+              <a:rPr lang="it-IT" sz="1100" dirty="0"/>
+              <a:t> per mapping UI. Target </a:t>
+            </a:r>
+            <a:r>
+              <a:rPr lang="it-IT" sz="1100" dirty="0" err="1"/>
+              <a:t>participant</a:t>
+            </a:r>
+            <a:r>
+              <a:rPr lang="it-IT" sz="1100" dirty="0"/>
+              <a:t> o membri gruppo ricevono </a:t>
+            </a:r>
+            <a:r>
+              <a:rPr lang="it-IT" sz="1100" dirty="0" err="1"/>
+              <a:t>new_conversation</a:t>
+            </a:r>
+            <a:r>
+              <a:rPr lang="it-IT" sz="1100" dirty="0"/>
+              <a:t> via </a:t>
+            </a:r>
+            <a:r>
+              <a:rPr lang="it-IT" sz="1100" dirty="0" err="1"/>
+              <a:t>user_notification_channel</a:t>
+            </a:r>
+            <a:r>
+              <a:rPr lang="it-IT" sz="1100" dirty="0"/>
+              <a:t>.</a:t>
+            </a:r>
+          </a:p>
+          <a:p>
+            <a:r>
+              <a:rPr lang="it-IT" sz="1100" b="1" dirty="0"/>
+              <a:t>4. </a:t>
+            </a:r>
+            <a:r>
+              <a:rPr lang="it-IT" sz="1100" b="1" dirty="0" err="1"/>
+              <a:t>Receiver</a:t>
+            </a:r>
+            <a:r>
+              <a:rPr lang="it-IT" sz="1100" b="1" dirty="0"/>
+              <a:t> Tasks </a:t>
+            </a:r>
+            <a:r>
+              <a:rPr lang="it-IT" sz="1100" b="1" dirty="0" err="1"/>
+              <a:t>spawnano</a:t>
+            </a:r>
+            <a:r>
+              <a:rPr lang="it-IT" sz="1100" b="1" dirty="0"/>
+              <a:t> </a:t>
+            </a:r>
+            <a:r>
+              <a:rPr lang="it-IT" sz="1100" b="1" dirty="0" err="1"/>
+              <a:t>listener</a:t>
+            </a:r>
+            <a:r>
+              <a:rPr lang="it-IT" sz="1100" dirty="0"/>
+              <a:t> Ogni utente online il cui </a:t>
+            </a:r>
+            <a:r>
+              <a:rPr lang="it-IT" sz="1100" dirty="0" err="1"/>
+              <a:t>Receiver</a:t>
+            </a:r>
+            <a:r>
+              <a:rPr lang="it-IT" sz="1100" dirty="0"/>
+              <a:t> riceve l'evento </a:t>
+            </a:r>
+            <a:r>
+              <a:rPr lang="it-IT" sz="1100" dirty="0" err="1"/>
+              <a:t>spawna</a:t>
+            </a:r>
+            <a:r>
+              <a:rPr lang="it-IT" sz="1100" dirty="0"/>
+              <a:t> un task Tokio dedicato che fa </a:t>
+            </a:r>
+            <a:r>
+              <a:rPr lang="it-IT" sz="1100" dirty="0" err="1"/>
+              <a:t>subscribe</a:t>
+            </a:r>
+            <a:r>
+              <a:rPr lang="it-IT" sz="1100" dirty="0"/>
+              <a:t> al broadcast </a:t>
+            </a:r>
+            <a:r>
+              <a:rPr lang="it-IT" sz="1100" dirty="0" err="1"/>
+              <a:t>channel</a:t>
+            </a:r>
+            <a:r>
+              <a:rPr lang="it-IT" sz="1100" dirty="0"/>
+              <a:t> della conversazione. Il </a:t>
+            </a:r>
+            <a:r>
+              <a:rPr lang="it-IT" sz="1100" dirty="0" err="1"/>
+              <a:t>listener</a:t>
+            </a:r>
+            <a:r>
+              <a:rPr lang="it-IT" sz="1100" dirty="0"/>
+              <a:t> inoltra tutti i messaggi al </a:t>
+            </a:r>
+            <a:r>
+              <a:rPr lang="it-IT" sz="1100" dirty="0" err="1"/>
+              <a:t>Receiver</a:t>
+            </a:r>
+            <a:r>
+              <a:rPr lang="it-IT" sz="1100" dirty="0"/>
+              <a:t> principale via MPSC interno.</a:t>
+            </a:r>
+          </a:p>
+          <a:p>
+            <a:r>
+              <a:rPr lang="it-IT" sz="1100" b="1" dirty="0"/>
+              <a:t>5. Eventi al client</a:t>
+            </a:r>
+            <a:r>
+              <a:rPr lang="it-IT" sz="1100" dirty="0"/>
+              <a:t> Writer Task invia gli eventi finali al browser via </a:t>
+            </a:r>
+            <a:r>
+              <a:rPr lang="it-IT" sz="1100" dirty="0" err="1"/>
+              <a:t>WebSocket</a:t>
+            </a:r>
+            <a:r>
+              <a:rPr lang="it-IT" sz="1100" dirty="0"/>
+              <a:t>. Client aggiorna UI mappando </a:t>
+            </a:r>
+            <a:r>
+              <a:rPr lang="it-IT" sz="1100" dirty="0" err="1"/>
+              <a:t>client_temp_id</a:t>
+            </a:r>
+            <a:r>
+              <a:rPr lang="it-IT" sz="1100" dirty="0"/>
+              <a:t> a ID reale per </a:t>
+            </a:r>
+            <a:r>
+              <a:rPr lang="it-IT" sz="1100" dirty="0" err="1"/>
+              <a:t>optimistic</a:t>
+            </a:r>
+            <a:r>
+              <a:rPr lang="it-IT" sz="1100" dirty="0"/>
+              <a:t> update </a:t>
+            </a:r>
+            <a:r>
+              <a:rPr lang="it-IT" sz="1100" dirty="0" err="1"/>
+              <a:t>instantaneo</a:t>
+            </a:r>
+            <a:r>
+              <a:rPr lang="it-IT" sz="1100" dirty="0"/>
+              <a:t>.</a:t>
+            </a:r>
+          </a:p>
+          <a:p>
+            <a:r>
+              <a:rPr lang="it-IT" sz="1100" b="1" dirty="0"/>
+              <a:t>Differenze DM vs Gruppo:</a:t>
+            </a:r>
+            <a:r>
+              <a:rPr lang="it-IT" sz="1100" dirty="0"/>
+              <a:t> DM ha 2 partecipanti entrambi "</a:t>
+            </a:r>
+            <a:r>
+              <a:rPr lang="it-IT" sz="1100" dirty="0" err="1"/>
+              <a:t>member</a:t>
+            </a:r>
+            <a:r>
+              <a:rPr lang="it-IT" sz="1100" dirty="0"/>
+              <a:t>". Gruppo ha </a:t>
+            </a:r>
+            <a:r>
+              <a:rPr lang="it-IT" sz="1100" dirty="0" err="1"/>
+              <a:t>owner</a:t>
+            </a:r>
+            <a:r>
+              <a:rPr lang="it-IT" sz="1100" dirty="0"/>
+              <a:t> con ruolo "</a:t>
+            </a:r>
+            <a:r>
+              <a:rPr lang="it-IT" sz="1100" dirty="0" err="1"/>
+              <a:t>owner</a:t>
+            </a:r>
+            <a:r>
+              <a:rPr lang="it-IT" sz="1100" dirty="0"/>
+              <a:t>" e membri con "</a:t>
+            </a:r>
+            <a:r>
+              <a:rPr lang="it-IT" sz="1100" dirty="0" err="1"/>
+              <a:t>member</a:t>
+            </a:r>
+            <a:r>
+              <a:rPr lang="it-IT" sz="1100" dirty="0"/>
+              <a:t>". </a:t>
+            </a:r>
+            <a:r>
+              <a:rPr lang="it-IT" sz="1100" dirty="0" err="1"/>
+              <a:t>Owner</a:t>
+            </a:r>
+            <a:r>
+              <a:rPr lang="it-IT" sz="1100" dirty="0"/>
+              <a:t> riceve </a:t>
+            </a:r>
+            <a:r>
+              <a:rPr lang="it-IT" sz="1100" dirty="0" err="1"/>
+              <a:t>conversation_created_complete</a:t>
+            </a:r>
+            <a:r>
+              <a:rPr lang="it-IT" sz="1100" dirty="0"/>
+              <a:t>, membri ricevono </a:t>
+            </a:r>
+            <a:r>
+              <a:rPr lang="it-IT" sz="1100" dirty="0" err="1"/>
+              <a:t>new_conversation</a:t>
+            </a:r>
+            <a:r>
+              <a:rPr lang="it-IT" sz="1100" dirty="0"/>
+              <a:t>.</a:t>
+            </a:r>
+          </a:p>
+        </p:txBody>
+      </p:sp>
+      <p:pic>
+        <p:nvPicPr>
+          <p:cNvPr id="4" name="Immagine 3" descr="Immagine che contiene testo, schermata, Carattere, documento&#10;&#10;Il contenuto generato dall'IA potrebbe non essere corretto.">
+            <a:extLst>
+              <a:ext uri="{FF2B5EF4-FFF2-40B4-BE49-F238E27FC236}">
+                <a16:creationId xmlns:a16="http://schemas.microsoft.com/office/drawing/2014/main" id="{91B75F5A-C02E-802D-CFF3-31FA1BA00AFF}"/>
+              </a:ext>
+            </a:extLst>
+          </p:cNvPr>
+          <p:cNvPicPr>
+            <a:picLocks noChangeAspect="1"/>
+          </p:cNvPicPr>
+          <p:nvPr/>
+        </p:nvPicPr>
+        <p:blipFill>
+          <a:blip r:embed="rId3"/>
+          <a:stretch>
+            <a:fillRect/>
+          </a:stretch>
+        </p:blipFill>
+        <p:spPr>
+          <a:xfrm>
+            <a:off x="555172" y="897527"/>
+            <a:ext cx="3400233" cy="3602627"/>
+          </a:xfrm>
+          <a:prstGeom prst="rect">
+            <a:avLst/>
+          </a:prstGeom>
+        </p:spPr>
+      </p:pic>
+    </p:spTree>
+    <p:extLst>
+      <p:ext uri="{BB962C8B-B14F-4D97-AF65-F5344CB8AC3E}">
+        <p14:creationId xmlns:p14="http://schemas.microsoft.com/office/powerpoint/2010/main" val="608258387"/>
+      </p:ext>
+    </p:extLst>
+  </p:cSld>
+  <p:clrMapOvr>
+    <a:masterClrMapping/>
+  </p:clrMapOvr>
+</p:sld>
+</file>
+
+<file path=ppt/slides/slide13.xml><?xml version="1.0" encoding="utf-8"?>
+<p:sld xmlns:a="http://schemas.openxmlformats.org/drawingml/2006/main" xmlns:r="http://schemas.openxmlformats.org/officeDocument/2006/relationships" xmlns:p="http://schemas.openxmlformats.org/presentationml/2006/main">
   <p:cSld name="Slide 13">
     <p:bg>
       <p:bgPr>
@@ -3902,7 +4514,7 @@
 </p:sld>
 </file>
 
-<file path=ppt/slides/slide13.xml><?xml version="1.0" encoding="utf-8"?>
+<file path=ppt/slides/slide14.xml><?xml version="1.0" encoding="utf-8"?>
 <p:sld xmlns:a="http://schemas.openxmlformats.org/drawingml/2006/main" xmlns:r="http://schemas.openxmlformats.org/officeDocument/2006/relationships" xmlns:p="http://schemas.openxmlformats.org/presentationml/2006/main">
   <p:cSld name="Slide 14">
     <p:bg>
@@ -4349,7 +4961,7 @@
 </p:sld>
 </file>
 
-<file path=ppt/slides/slide14.xml><?xml version="1.0" encoding="utf-8"?>
+<file path=ppt/slides/slide15.xml><?xml version="1.0" encoding="utf-8"?>
 <p:sld xmlns:a="http://schemas.openxmlformats.org/drawingml/2006/main" xmlns:r="http://schemas.openxmlformats.org/officeDocument/2006/relationships" xmlns:p="http://schemas.openxmlformats.org/presentationml/2006/main">
   <p:cSld name="Slide 15">
     <p:bg>
@@ -4476,325 +5088,90 @@
               </a:defRPr>
             </a:pPr>
             <a:r>
-              <a:rPr dirty="0" err="1"/>
-              <a:t>L'EventDispatcher</a:t>
-            </a:r>
-            <a:r>
-              <a:rPr dirty="0"/>
-              <a:t> è il router centrale </a:t>
-            </a:r>
-            <a:r>
-              <a:rPr dirty="0" err="1"/>
-              <a:t>che</a:t>
-            </a:r>
-            <a:r>
-              <a:rPr dirty="0"/>
-              <a:t> </a:t>
-            </a:r>
-            <a:r>
-              <a:rPr dirty="0" err="1"/>
-              <a:t>collega</a:t>
-            </a:r>
-            <a:r>
-              <a:rPr dirty="0"/>
-              <a:t> networking e business logic. </a:t>
-            </a:r>
-            <a:r>
-              <a:rPr dirty="0" err="1"/>
-              <a:t>Viene</a:t>
-            </a:r>
-            <a:r>
-              <a:rPr dirty="0"/>
-              <a:t> </a:t>
-            </a:r>
-            <a:r>
-              <a:rPr dirty="0" err="1"/>
-              <a:t>chiamato</a:t>
-            </a:r>
-            <a:r>
-              <a:rPr dirty="0"/>
-              <a:t> ogni frame (~60Hz) e </a:t>
-            </a:r>
-            <a:r>
-              <a:rPr dirty="0" err="1"/>
-              <a:t>drena</a:t>
-            </a:r>
-            <a:r>
-              <a:rPr dirty="0"/>
-              <a:t> tutti </a:t>
-            </a:r>
-            <a:r>
-              <a:rPr dirty="0" err="1"/>
-              <a:t>gli</a:t>
-            </a:r>
-            <a:r>
-              <a:rPr dirty="0"/>
-              <a:t> </a:t>
-            </a:r>
-            <a:r>
-              <a:rPr dirty="0" err="1"/>
-              <a:t>eventi</a:t>
-            </a:r>
-            <a:r>
-              <a:rPr dirty="0"/>
-              <a:t> </a:t>
-            </a:r>
-            <a:r>
-              <a:rPr dirty="0" err="1"/>
-              <a:t>disponibili</a:t>
-            </a:r>
-            <a:r>
-              <a:rPr dirty="0"/>
-              <a:t> dal </a:t>
-            </a:r>
-            <a:r>
-              <a:rPr dirty="0" err="1"/>
-              <a:t>canale</a:t>
-            </a:r>
-            <a:r>
-              <a:rPr dirty="0"/>
-              <a:t> </a:t>
-            </a:r>
-            <a:r>
-              <a:rPr dirty="0" err="1"/>
+              <a:rPr lang="it-IT" sz="1300" dirty="0"/>
+              <a:t>L'</a:t>
+            </a:r>
+            <a:r>
+              <a:rPr lang="it-IT" sz="1300" dirty="0" err="1"/>
+              <a:t>EventDispatcher</a:t>
+            </a:r>
+            <a:r>
+              <a:rPr lang="it-IT" sz="1300" dirty="0"/>
+              <a:t> è il router centrale che collega networking e business </a:t>
+            </a:r>
+            <a:r>
+              <a:rPr lang="it-IT" sz="1300" dirty="0" err="1"/>
+              <a:t>logic</a:t>
+            </a:r>
+            <a:r>
+              <a:rPr lang="it-IT" sz="1300" dirty="0"/>
+              <a:t>. Viene risvegliato dal </a:t>
+            </a:r>
+            <a:r>
+              <a:rPr lang="it-IT" sz="1300" dirty="0" err="1"/>
+              <a:t>waker</a:t>
+            </a:r>
+            <a:r>
+              <a:rPr lang="it-IT" sz="1300" dirty="0"/>
+              <a:t> quando arrivano nuovi eventi e drena tutti gli eventi disponibili dal canale </a:t>
+            </a:r>
+            <a:r>
+              <a:rPr lang="it-IT" sz="1300" dirty="0" err="1"/>
               <a:t>ui_rx</a:t>
             </a:r>
             <a:r>
-              <a:rPr dirty="0"/>
-              <a:t> </a:t>
-            </a:r>
-            <a:r>
-              <a:rPr dirty="0" err="1"/>
-              <a:t>usando</a:t>
-            </a:r>
-            <a:r>
-              <a:rPr dirty="0"/>
-              <a:t> </a:t>
-            </a:r>
-            <a:r>
-              <a:rPr dirty="0" err="1"/>
+              <a:rPr lang="it-IT" sz="1300" dirty="0"/>
+              <a:t> usando </a:t>
+            </a:r>
+            <a:r>
+              <a:rPr lang="it-IT" sz="1300" dirty="0" err="1"/>
               <a:t>try_recv</a:t>
             </a:r>
             <a:r>
-              <a:rPr dirty="0"/>
-              <a:t>() non-blocking. Per ogni </a:t>
-            </a:r>
-            <a:r>
-              <a:rPr dirty="0" err="1"/>
-              <a:t>evento</a:t>
-            </a:r>
-            <a:r>
-              <a:rPr dirty="0"/>
-              <a:t> fa pattern matching </a:t>
-            </a:r>
-            <a:r>
-              <a:rPr dirty="0" err="1"/>
-              <a:t>sul</a:t>
-            </a:r>
-            <a:r>
-              <a:rPr dirty="0"/>
-              <a:t> </a:t>
-            </a:r>
-            <a:r>
-              <a:rPr dirty="0" err="1"/>
-              <a:t>tipo</a:t>
-            </a:r>
-            <a:r>
-              <a:rPr dirty="0"/>
-              <a:t> e </a:t>
-            </a:r>
-            <a:r>
-              <a:rPr dirty="0" err="1"/>
-              <a:t>chiama</a:t>
-            </a:r>
-            <a:r>
-              <a:rPr dirty="0"/>
-              <a:t> </a:t>
-            </a:r>
-            <a:r>
-              <a:rPr dirty="0" err="1"/>
+              <a:rPr lang="it-IT" sz="1300" dirty="0"/>
+              <a:t>() non-</a:t>
+            </a:r>
+            <a:r>
+              <a:rPr lang="it-IT" sz="1300" dirty="0" err="1"/>
+              <a:t>blocking</a:t>
+            </a:r>
+            <a:r>
+              <a:rPr lang="it-IT" sz="1300" dirty="0"/>
+              <a:t>. Per ogni evento fa pattern matching sul tipo e chiama </a:t>
+            </a:r>
+            <a:r>
+              <a:rPr lang="it-IT" sz="1300" dirty="0" err="1"/>
               <a:t>l'handler</a:t>
             </a:r>
             <a:r>
-              <a:rPr dirty="0"/>
-              <a:t> </a:t>
-            </a:r>
-            <a:r>
-              <a:rPr dirty="0" err="1"/>
-              <a:t>specializzato</a:t>
-            </a:r>
-            <a:r>
-              <a:rPr dirty="0"/>
-              <a:t> </a:t>
-            </a:r>
-            <a:r>
-              <a:rPr dirty="0" err="1"/>
-              <a:t>appropriato</a:t>
-            </a:r>
-            <a:r>
-              <a:rPr dirty="0"/>
-              <a:t>. </a:t>
-            </a:r>
-            <a:r>
-              <a:rPr dirty="0" err="1"/>
-              <a:t>Gli</a:t>
-            </a:r>
-            <a:r>
-              <a:rPr dirty="0"/>
-              <a:t> handler non </a:t>
-            </a:r>
-            <a:r>
-              <a:rPr dirty="0" err="1"/>
-              <a:t>conoscono</a:t>
-            </a:r>
-            <a:r>
-              <a:rPr dirty="0"/>
-              <a:t> </a:t>
-            </a:r>
-            <a:r>
-              <a:rPr dirty="0" err="1"/>
-              <a:t>i</a:t>
-            </a:r>
-            <a:r>
-              <a:rPr dirty="0"/>
-              <a:t> </a:t>
-            </a:r>
-            <a:r>
-              <a:rPr dirty="0" err="1"/>
-              <a:t>dettagli</a:t>
-            </a:r>
-            <a:r>
-              <a:rPr dirty="0"/>
-              <a:t> del networking: </a:t>
-            </a:r>
-            <a:r>
-              <a:rPr dirty="0" err="1"/>
-              <a:t>ricevono</a:t>
-            </a:r>
-            <a:r>
-              <a:rPr dirty="0"/>
-              <a:t> solo </a:t>
-            </a:r>
-            <a:r>
-              <a:rPr dirty="0" err="1"/>
-              <a:t>riferimento</a:t>
-            </a:r>
-            <a:r>
-              <a:rPr dirty="0"/>
-              <a:t> </a:t>
-            </a:r>
-            <a:r>
-              <a:rPr dirty="0" err="1"/>
-              <a:t>mutabile</a:t>
-            </a:r>
-            <a:r>
-              <a:rPr dirty="0"/>
-              <a:t> </a:t>
-            </a:r>
-            <a:r>
-              <a:rPr dirty="0" err="1"/>
-              <a:t>allo</a:t>
-            </a:r>
-            <a:r>
-              <a:rPr dirty="0"/>
-              <a:t> </a:t>
-            </a:r>
-            <a:r>
-              <a:rPr dirty="0" err="1"/>
-              <a:t>stato</a:t>
-            </a:r>
-            <a:r>
-              <a:rPr dirty="0"/>
-              <a:t> e </a:t>
-            </a:r>
-            <a:r>
-              <a:rPr dirty="0" err="1"/>
-              <a:t>applicano</a:t>
-            </a:r>
-            <a:r>
-              <a:rPr dirty="0"/>
-              <a:t> le </a:t>
-            </a:r>
-            <a:r>
-              <a:rPr dirty="0" err="1"/>
-              <a:t>modifiche</a:t>
-            </a:r>
-            <a:r>
-              <a:rPr dirty="0"/>
-              <a:t> </a:t>
-            </a:r>
-            <a:r>
-              <a:rPr dirty="0" err="1"/>
-              <a:t>necessarie</a:t>
-            </a:r>
-            <a:r>
-              <a:rPr dirty="0"/>
-              <a:t>. Alla fine </a:t>
-            </a:r>
-            <a:r>
-              <a:rPr dirty="0" err="1"/>
-              <a:t>egui_waker</a:t>
-            </a:r>
-            <a:r>
-              <a:rPr dirty="0"/>
-              <a:t>() </a:t>
-            </a:r>
-            <a:r>
-              <a:rPr dirty="0" err="1"/>
-              <a:t>garantisce</a:t>
-            </a:r>
-            <a:r>
-              <a:rPr dirty="0"/>
-              <a:t> </a:t>
-            </a:r>
-            <a:r>
-              <a:rPr dirty="0" err="1"/>
-              <a:t>che</a:t>
-            </a:r>
-            <a:r>
-              <a:rPr dirty="0"/>
-              <a:t> </a:t>
-            </a:r>
-            <a:r>
-              <a:rPr dirty="0" err="1"/>
-              <a:t>l'UI</a:t>
-            </a:r>
-            <a:r>
-              <a:rPr dirty="0"/>
-              <a:t> </a:t>
-            </a:r>
-            <a:r>
-              <a:rPr dirty="0" err="1"/>
-              <a:t>si</a:t>
-            </a:r>
-            <a:r>
-              <a:rPr dirty="0"/>
-              <a:t> </a:t>
-            </a:r>
-            <a:r>
-              <a:rPr dirty="0" err="1"/>
-              <a:t>aggiorni</a:t>
-            </a:r>
-            <a:r>
-              <a:rPr dirty="0"/>
-              <a:t> </a:t>
-            </a:r>
-            <a:r>
-              <a:rPr dirty="0" err="1"/>
-              <a:t>nel</a:t>
-            </a:r>
-            <a:r>
-              <a:rPr dirty="0"/>
-              <a:t> </a:t>
-            </a:r>
-            <a:r>
-              <a:rPr dirty="0" err="1"/>
-              <a:t>prossimo</a:t>
-            </a:r>
-            <a:r>
-              <a:rPr dirty="0"/>
-              <a:t> frame.</a:t>
-            </a:r>
+              <a:rPr lang="it-IT" sz="1300" dirty="0"/>
+              <a:t> specializzato appropriato. Gli </a:t>
+            </a:r>
+            <a:r>
+              <a:rPr lang="it-IT" sz="1300" dirty="0" err="1"/>
+              <a:t>handler</a:t>
+            </a:r>
+            <a:r>
+              <a:rPr lang="it-IT" sz="1300" dirty="0"/>
+              <a:t> non conoscono i dettagli del networking: ricevono solo riferimento mutabile allo stato e applicano le modifiche necessarie. Il </a:t>
+            </a:r>
+            <a:r>
+              <a:rPr lang="it-IT" sz="1300" dirty="0" err="1"/>
+              <a:t>waker</a:t>
+            </a:r>
+            <a:r>
+              <a:rPr lang="it-IT" sz="1300" dirty="0"/>
+              <a:t> garantisce aggiornamento UI istantaneo senza polling attivo, e l'applicazione torna in </a:t>
+            </a:r>
+            <a:r>
+              <a:rPr lang="it-IT" sz="1300" dirty="0" err="1"/>
+              <a:t>idle</a:t>
+            </a:r>
+            <a:r>
+              <a:rPr lang="it-IT" sz="1300" dirty="0"/>
+              <a:t> tra gli eventi risparmiando CPU.</a:t>
+            </a:r>
+            <a:endParaRPr dirty="0"/>
           </a:p>
         </p:txBody>
       </p:sp>
@@ -4836,7 +5213,7 @@
 </p:sld>
 </file>
 
-<file path=ppt/slides/slide15.xml><?xml version="1.0" encoding="utf-8"?>
+<file path=ppt/slides/slide16.xml><?xml version="1.0" encoding="utf-8"?>
 <p:sld xmlns:a="http://schemas.openxmlformats.org/drawingml/2006/main" xmlns:r="http://schemas.openxmlformats.org/officeDocument/2006/relationships" xmlns:p="http://schemas.openxmlformats.org/presentationml/2006/main">
   <p:cSld name="Slide 16">
     <p:bg>
@@ -5299,7 +5676,7 @@
 </p:sld>
 </file>
 
-<file path=ppt/slides/slide16.xml><?xml version="1.0" encoding="utf-8"?>
+<file path=ppt/slides/slide17.xml><?xml version="1.0" encoding="utf-8"?>
 <p:sld xmlns:a="http://schemas.openxmlformats.org/drawingml/2006/main" xmlns:r="http://schemas.openxmlformats.org/officeDocument/2006/relationships" xmlns:p="http://schemas.openxmlformats.org/presentationml/2006/main">
   <p:cSld name="Slide 17">
     <p:bg>
@@ -5722,7 +6099,7 @@
 </p:sld>
 </file>
 
-<file path=ppt/slides/slide17.xml><?xml version="1.0" encoding="utf-8"?>
+<file path=ppt/slides/slide18.xml><?xml version="1.0" encoding="utf-8"?>
 <p:sld xmlns:a="http://schemas.openxmlformats.org/drawingml/2006/main" xmlns:r="http://schemas.openxmlformats.org/officeDocument/2006/relationships" xmlns:p="http://schemas.openxmlformats.org/presentationml/2006/main">
   <p:cSld name="Slide 18">
     <p:bg>
@@ -6281,7 +6658,7 @@
 </p:sld>
 </file>
 
-<file path=ppt/slides/slide18.xml><?xml version="1.0" encoding="utf-8"?>
+<file path=ppt/slides/slide19.xml><?xml version="1.0" encoding="utf-8"?>
 <p:sld xmlns:a="http://schemas.openxmlformats.org/drawingml/2006/main" xmlns:r="http://schemas.openxmlformats.org/officeDocument/2006/relationships" xmlns:p="http://schemas.openxmlformats.org/presentationml/2006/main">
   <p:cSld name="Slide 19">
     <p:bg>
@@ -6742,433 +7119,6 @@
           <a:xfrm>
             <a:off x="860379" y="953588"/>
             <a:ext cx="2950567" cy="3570979"/>
-          </a:xfrm>
-          <a:prstGeom prst="rect">
-            <a:avLst/>
-          </a:prstGeom>
-        </p:spPr>
-      </p:pic>
-    </p:spTree>
-  </p:cSld>
-  <p:clrMapOvr>
-    <a:masterClrMapping/>
-  </p:clrMapOvr>
-</p:sld>
-</file>
-
-<file path=ppt/slides/slide19.xml><?xml version="1.0" encoding="utf-8"?>
-<p:sld xmlns:a="http://schemas.openxmlformats.org/drawingml/2006/main" xmlns:r="http://schemas.openxmlformats.org/officeDocument/2006/relationships" xmlns:p="http://schemas.openxmlformats.org/presentationml/2006/main">
-  <p:cSld name="Slide 20">
-    <p:bg>
-      <p:bgPr>
-        <a:solidFill>
-          <a:srgbClr val="FFFFFF"/>
-        </a:solidFill>
-        <a:effectLst/>
-      </p:bgPr>
-    </p:bg>
-    <p:spTree>
-      <p:nvGrpSpPr>
-        <p:cNvPr id="1" name=""/>
-        <p:cNvGrpSpPr/>
-        <p:nvPr/>
-      </p:nvGrpSpPr>
-      <p:grpSpPr>
-        <a:xfrm>
-          <a:off x="0" y="0"/>
-          <a:ext cx="0" cy="0"/>
-          <a:chOff x="0" y="0"/>
-          <a:chExt cx="0" cy="0"/>
-        </a:xfrm>
-      </p:grpSpPr>
-      <p:sp>
-        <p:nvSpPr>
-          <p:cNvPr id="2" name="Text 0"/>
-          <p:cNvSpPr/>
-          <p:nvPr/>
-        </p:nvSpPr>
-        <p:spPr>
-          <a:xfrm>
-            <a:off x="381000" y="228600"/>
-            <a:ext cx="8151305" cy="323850"/>
-          </a:xfrm>
-          <a:prstGeom prst="rect">
-            <a:avLst/>
-          </a:prstGeom>
-          <a:noFill/>
-          <a:ln/>
-        </p:spPr>
-        <p:txBody>
-          <a:bodyPr wrap="square" lIns="0" tIns="0" rIns="0" bIns="0" rtlCol="0" anchor="t"/>
-          <a:lstStyle/>
-          <a:p>
-            <a:pPr marL="0" indent="0" algn="l">
-              <a:lnSpc>
-                <a:spcPts val="2550"/>
-              </a:lnSpc>
-              <a:buNone/>
-            </a:pPr>
-            <a:r>
-              <a:rPr lang="en-US" sz="2550" b="1" dirty="0">
-                <a:solidFill>
-                  <a:srgbClr val="CE422B"/>
-                </a:solidFill>
-                <a:latin typeface="Segoe UI" pitchFamily="34" charset="0"/>
-                <a:ea typeface="Segoe UI" pitchFamily="34" charset="-122"/>
-                <a:cs typeface="Segoe UI" pitchFamily="34" charset="-120"/>
-              </a:rPr>
-              <a:t>Frontend: ConnectionManager - Lifecycle &amp; Backoff</a:t>
-            </a:r>
-            <a:endParaRPr lang="en-US" sz="2550" dirty="0"/>
-          </a:p>
-        </p:txBody>
-      </p:sp>
-      <p:sp>
-        <p:nvSpPr>
-          <p:cNvPr id="29" name="Text 27"/>
-          <p:cNvSpPr/>
-          <p:nvPr/>
-        </p:nvSpPr>
-        <p:spPr>
-          <a:xfrm>
-            <a:off x="4667250" y="2250132"/>
-            <a:ext cx="4095750" cy="575072"/>
-          </a:xfrm>
-          <a:prstGeom prst="roundRect">
-            <a:avLst>
-              <a:gd name="adj" fmla="val 9938"/>
-            </a:avLst>
-          </a:prstGeom>
-          <a:noFill/>
-          <a:ln/>
-        </p:spPr>
-        <p:txBody>
-          <a:bodyPr wrap="square" rtlCol="0" anchor="ctr"/>
-          <a:lstStyle/>
-          <a:p>
-            <a:pPr marL="0" indent="0">
-              <a:spcAft>
-                <a:spcPts val="1200"/>
-              </a:spcAft>
-              <a:buNone/>
-              <a:defRPr sz="1600" b="1">
-                <a:solidFill>
-                  <a:srgbClr val="0070C0"/>
-                </a:solidFill>
-              </a:defRPr>
-            </a:pPr>
-            <a:r>
-              <a:rPr dirty="0"/>
-              <a:t>State Machine + Exponential Backoff</a:t>
-            </a:r>
-            <a:endParaRPr lang="en-US" dirty="0"/>
-          </a:p>
-          <a:p>
-            <a:pPr>
-              <a:lnSpc>
-                <a:spcPct val="130000"/>
-              </a:lnSpc>
-              <a:defRPr sz="1300">
-                <a:solidFill>
-                  <a:srgbClr val="404040"/>
-                </a:solidFill>
-              </a:defRPr>
-            </a:pPr>
-            <a:r>
-              <a:rPr dirty="0"/>
-              <a:t>La </a:t>
-            </a:r>
-            <a:r>
-              <a:rPr dirty="0" err="1"/>
-              <a:t>gestione</a:t>
-            </a:r>
-            <a:r>
-              <a:rPr dirty="0"/>
-              <a:t> delle </a:t>
-            </a:r>
-            <a:r>
-              <a:rPr dirty="0" err="1"/>
-              <a:t>connessioni</a:t>
-            </a:r>
-            <a:r>
-              <a:rPr dirty="0"/>
-              <a:t> </a:t>
-            </a:r>
-            <a:r>
-              <a:rPr dirty="0" err="1"/>
-              <a:t>usa</a:t>
-            </a:r>
-            <a:r>
-              <a:rPr dirty="0"/>
-              <a:t> </a:t>
-            </a:r>
-            <a:r>
-              <a:rPr dirty="0" err="1"/>
-              <a:t>una</a:t>
-            </a:r>
-            <a:r>
-              <a:rPr dirty="0"/>
-              <a:t> state machine con backoff </a:t>
-            </a:r>
-            <a:r>
-              <a:rPr dirty="0" err="1"/>
-              <a:t>esponenziale</a:t>
-            </a:r>
-            <a:r>
-              <a:rPr dirty="0"/>
-              <a:t>. </a:t>
-            </a:r>
-            <a:r>
-              <a:rPr dirty="0" err="1"/>
-              <a:t>Gli</a:t>
-            </a:r>
-            <a:r>
-              <a:rPr dirty="0"/>
-              <a:t> </a:t>
-            </a:r>
-            <a:r>
-              <a:rPr dirty="0" err="1"/>
-              <a:t>stati</a:t>
-            </a:r>
-            <a:r>
-              <a:rPr dirty="0"/>
-              <a:t> </a:t>
-            </a:r>
-            <a:r>
-              <a:rPr dirty="0" err="1"/>
-              <a:t>sono</a:t>
-            </a:r>
-            <a:r>
-              <a:rPr dirty="0"/>
-              <a:t> Disconnected, Connecting e Connected. Quando la </a:t>
-            </a:r>
-            <a:r>
-              <a:rPr dirty="0" err="1"/>
-              <a:t>connessione</a:t>
-            </a:r>
-            <a:r>
-              <a:rPr dirty="0"/>
-              <a:t> </a:t>
-            </a:r>
-            <a:r>
-              <a:rPr dirty="0" err="1"/>
-              <a:t>fallisce</a:t>
-            </a:r>
-            <a:r>
-              <a:rPr dirty="0"/>
-              <a:t>, il </a:t>
-            </a:r>
-            <a:r>
-              <a:rPr dirty="0" err="1"/>
-              <a:t>sistema</a:t>
-            </a:r>
-            <a:r>
-              <a:rPr dirty="0"/>
-              <a:t> </a:t>
-            </a:r>
-            <a:r>
-              <a:rPr dirty="0" err="1"/>
-              <a:t>aspetta</a:t>
-            </a:r>
-            <a:r>
-              <a:rPr dirty="0"/>
-              <a:t> </a:t>
-            </a:r>
-            <a:r>
-              <a:rPr dirty="0" err="1"/>
-              <a:t>progressivamente</a:t>
-            </a:r>
-            <a:r>
-              <a:rPr dirty="0"/>
-              <a:t> </a:t>
-            </a:r>
-            <a:r>
-              <a:rPr dirty="0" err="1"/>
-              <a:t>più</a:t>
-            </a:r>
-            <a:r>
-              <a:rPr dirty="0"/>
-              <a:t> tempo prima di </a:t>
-            </a:r>
-            <a:r>
-              <a:rPr dirty="0" err="1"/>
-              <a:t>riprovare</a:t>
-            </a:r>
-            <a:r>
-              <a:rPr dirty="0"/>
-              <a:t>: 1 secondo, poi 2, 5, 10 e 15 secondi. Al </a:t>
-            </a:r>
-            <a:r>
-              <a:rPr dirty="0" err="1"/>
-              <a:t>sesto</a:t>
-            </a:r>
-            <a:r>
-              <a:rPr dirty="0"/>
-              <a:t> </a:t>
-            </a:r>
-            <a:r>
-              <a:rPr dirty="0" err="1"/>
-              <a:t>tentativo</a:t>
-            </a:r>
-            <a:r>
-              <a:rPr dirty="0"/>
-              <a:t> </a:t>
-            </a:r>
-            <a:r>
-              <a:rPr dirty="0" err="1"/>
-              <a:t>consecutivo</a:t>
-            </a:r>
-            <a:r>
-              <a:rPr dirty="0"/>
-              <a:t> </a:t>
-            </a:r>
-            <a:r>
-              <a:rPr dirty="0" err="1"/>
-              <a:t>fallito</a:t>
-            </a:r>
-            <a:r>
-              <a:rPr dirty="0"/>
-              <a:t> </a:t>
-            </a:r>
-            <a:r>
-              <a:rPr dirty="0" err="1"/>
-              <a:t>viene</a:t>
-            </a:r>
-            <a:r>
-              <a:rPr dirty="0"/>
-              <a:t> </a:t>
-            </a:r>
-            <a:r>
-              <a:rPr dirty="0" err="1"/>
-              <a:t>forzato</a:t>
-            </a:r>
-            <a:r>
-              <a:rPr dirty="0"/>
-              <a:t> il logout per </a:t>
-            </a:r>
-            <a:r>
-              <a:rPr dirty="0" err="1"/>
-              <a:t>evitare</a:t>
-            </a:r>
-            <a:r>
-              <a:rPr dirty="0"/>
-              <a:t> loop </a:t>
-            </a:r>
-            <a:r>
-              <a:rPr dirty="0" err="1"/>
-              <a:t>infiniti</a:t>
-            </a:r>
-            <a:r>
-              <a:rPr dirty="0"/>
-              <a:t>. Il flag </a:t>
-            </a:r>
-            <a:r>
-              <a:rPr dirty="0" err="1"/>
-              <a:t>is_connecting_in_progress</a:t>
-            </a:r>
-            <a:r>
-              <a:rPr dirty="0"/>
-              <a:t> </a:t>
-            </a:r>
-            <a:r>
-              <a:rPr dirty="0" err="1"/>
-              <a:t>previene</a:t>
-            </a:r>
-            <a:r>
-              <a:rPr dirty="0"/>
-              <a:t> </a:t>
-            </a:r>
-            <a:r>
-              <a:rPr dirty="0" err="1"/>
-              <a:t>tentativi</a:t>
-            </a:r>
-            <a:r>
-              <a:rPr dirty="0"/>
-              <a:t> </a:t>
-            </a:r>
-            <a:r>
-              <a:rPr dirty="0" err="1"/>
-              <a:t>multipli</a:t>
-            </a:r>
-            <a:r>
-              <a:rPr dirty="0"/>
-              <a:t> </a:t>
-            </a:r>
-            <a:r>
-              <a:rPr dirty="0" err="1"/>
-              <a:t>simultanei</a:t>
-            </a:r>
-            <a:r>
-              <a:rPr dirty="0"/>
-              <a:t>, </a:t>
-            </a:r>
-            <a:r>
-              <a:rPr dirty="0" err="1"/>
-              <a:t>mentre</a:t>
-            </a:r>
-            <a:r>
-              <a:rPr dirty="0"/>
-              <a:t> </a:t>
-            </a:r>
-            <a:r>
-              <a:rPr dirty="0" err="1"/>
-              <a:t>connection_attempt_start</a:t>
-            </a:r>
-            <a:r>
-              <a:rPr dirty="0"/>
-              <a:t> </a:t>
-            </a:r>
-            <a:r>
-              <a:rPr dirty="0" err="1"/>
-              <a:t>implementa</a:t>
-            </a:r>
-            <a:r>
-              <a:rPr dirty="0"/>
-              <a:t> un timeout di 30 secondi </a:t>
-            </a:r>
-            <a:r>
-              <a:rPr dirty="0" err="1"/>
-              <a:t>sulla</a:t>
-            </a:r>
-            <a:r>
-              <a:rPr dirty="0"/>
-              <a:t> </a:t>
-            </a:r>
-            <a:r>
-              <a:rPr dirty="0" err="1"/>
-              <a:t>fase</a:t>
-            </a:r>
-            <a:r>
-              <a:rPr dirty="0"/>
-              <a:t> di connecting.</a:t>
-            </a:r>
-          </a:p>
-        </p:txBody>
-      </p:sp>
-      <p:pic>
-        <p:nvPicPr>
-          <p:cNvPr id="28" name="Immagine 27" descr="Immagine che contiene testo, schermata, Carattere, numero&#10;&#10;Il contenuto generato dall'IA potrebbe non essere corretto.">
-            <a:extLst>
-              <a:ext uri="{FF2B5EF4-FFF2-40B4-BE49-F238E27FC236}">
-                <a16:creationId xmlns:a16="http://schemas.microsoft.com/office/drawing/2014/main" id="{DCA47F67-1480-1718-97F2-00E2956F751C}"/>
-              </a:ext>
-            </a:extLst>
-          </p:cNvPr>
-          <p:cNvPicPr>
-            <a:picLocks noChangeAspect="1"/>
-          </p:cNvPicPr>
-          <p:nvPr/>
-        </p:nvPicPr>
-        <p:blipFill>
-          <a:blip r:embed="rId3"/>
-          <a:stretch>
-            <a:fillRect/>
-          </a:stretch>
-        </p:blipFill>
-        <p:spPr>
-          <a:xfrm>
-            <a:off x="800913" y="768202"/>
-            <a:ext cx="3176728" cy="3932728"/>
           </a:xfrm>
           <a:prstGeom prst="rect">
             <a:avLst/>
@@ -8134,6 +8084,433 @@
 
 <file path=ppt/slides/slide20.xml><?xml version="1.0" encoding="utf-8"?>
 <p:sld xmlns:a="http://schemas.openxmlformats.org/drawingml/2006/main" xmlns:r="http://schemas.openxmlformats.org/officeDocument/2006/relationships" xmlns:p="http://schemas.openxmlformats.org/presentationml/2006/main">
+  <p:cSld name="Slide 20">
+    <p:bg>
+      <p:bgPr>
+        <a:solidFill>
+          <a:srgbClr val="FFFFFF"/>
+        </a:solidFill>
+        <a:effectLst/>
+      </p:bgPr>
+    </p:bg>
+    <p:spTree>
+      <p:nvGrpSpPr>
+        <p:cNvPr id="1" name=""/>
+        <p:cNvGrpSpPr/>
+        <p:nvPr/>
+      </p:nvGrpSpPr>
+      <p:grpSpPr>
+        <a:xfrm>
+          <a:off x="0" y="0"/>
+          <a:ext cx="0" cy="0"/>
+          <a:chOff x="0" y="0"/>
+          <a:chExt cx="0" cy="0"/>
+        </a:xfrm>
+      </p:grpSpPr>
+      <p:sp>
+        <p:nvSpPr>
+          <p:cNvPr id="2" name="Text 0"/>
+          <p:cNvSpPr/>
+          <p:nvPr/>
+        </p:nvSpPr>
+        <p:spPr>
+          <a:xfrm>
+            <a:off x="381000" y="228600"/>
+            <a:ext cx="8151305" cy="323850"/>
+          </a:xfrm>
+          <a:prstGeom prst="rect">
+            <a:avLst/>
+          </a:prstGeom>
+          <a:noFill/>
+          <a:ln/>
+        </p:spPr>
+        <p:txBody>
+          <a:bodyPr wrap="square" lIns="0" tIns="0" rIns="0" bIns="0" rtlCol="0" anchor="t"/>
+          <a:lstStyle/>
+          <a:p>
+            <a:pPr marL="0" indent="0" algn="l">
+              <a:lnSpc>
+                <a:spcPts val="2550"/>
+              </a:lnSpc>
+              <a:buNone/>
+            </a:pPr>
+            <a:r>
+              <a:rPr lang="en-US" sz="2550" b="1" dirty="0">
+                <a:solidFill>
+                  <a:srgbClr val="CE422B"/>
+                </a:solidFill>
+                <a:latin typeface="Segoe UI" pitchFamily="34" charset="0"/>
+                <a:ea typeface="Segoe UI" pitchFamily="34" charset="-122"/>
+                <a:cs typeface="Segoe UI" pitchFamily="34" charset="-120"/>
+              </a:rPr>
+              <a:t>Frontend: ConnectionManager - Lifecycle &amp; Backoff</a:t>
+            </a:r>
+            <a:endParaRPr lang="en-US" sz="2550" dirty="0"/>
+          </a:p>
+        </p:txBody>
+      </p:sp>
+      <p:sp>
+        <p:nvSpPr>
+          <p:cNvPr id="29" name="Text 27"/>
+          <p:cNvSpPr/>
+          <p:nvPr/>
+        </p:nvSpPr>
+        <p:spPr>
+          <a:xfrm>
+            <a:off x="4667250" y="2250132"/>
+            <a:ext cx="4095750" cy="575072"/>
+          </a:xfrm>
+          <a:prstGeom prst="roundRect">
+            <a:avLst>
+              <a:gd name="adj" fmla="val 9938"/>
+            </a:avLst>
+          </a:prstGeom>
+          <a:noFill/>
+          <a:ln/>
+        </p:spPr>
+        <p:txBody>
+          <a:bodyPr wrap="square" rtlCol="0" anchor="ctr"/>
+          <a:lstStyle/>
+          <a:p>
+            <a:pPr marL="0" indent="0">
+              <a:spcAft>
+                <a:spcPts val="1200"/>
+              </a:spcAft>
+              <a:buNone/>
+              <a:defRPr sz="1600" b="1">
+                <a:solidFill>
+                  <a:srgbClr val="0070C0"/>
+                </a:solidFill>
+              </a:defRPr>
+            </a:pPr>
+            <a:r>
+              <a:rPr dirty="0"/>
+              <a:t>State Machine + Exponential Backoff</a:t>
+            </a:r>
+            <a:endParaRPr lang="en-US" dirty="0"/>
+          </a:p>
+          <a:p>
+            <a:pPr>
+              <a:lnSpc>
+                <a:spcPct val="130000"/>
+              </a:lnSpc>
+              <a:defRPr sz="1300">
+                <a:solidFill>
+                  <a:srgbClr val="404040"/>
+                </a:solidFill>
+              </a:defRPr>
+            </a:pPr>
+            <a:r>
+              <a:rPr dirty="0"/>
+              <a:t>La </a:t>
+            </a:r>
+            <a:r>
+              <a:rPr dirty="0" err="1"/>
+              <a:t>gestione</a:t>
+            </a:r>
+            <a:r>
+              <a:rPr dirty="0"/>
+              <a:t> delle </a:t>
+            </a:r>
+            <a:r>
+              <a:rPr dirty="0" err="1"/>
+              <a:t>connessioni</a:t>
+            </a:r>
+            <a:r>
+              <a:rPr dirty="0"/>
+              <a:t> </a:t>
+            </a:r>
+            <a:r>
+              <a:rPr dirty="0" err="1"/>
+              <a:t>usa</a:t>
+            </a:r>
+            <a:r>
+              <a:rPr dirty="0"/>
+              <a:t> </a:t>
+            </a:r>
+            <a:r>
+              <a:rPr dirty="0" err="1"/>
+              <a:t>una</a:t>
+            </a:r>
+            <a:r>
+              <a:rPr dirty="0"/>
+              <a:t> state machine con backoff </a:t>
+            </a:r>
+            <a:r>
+              <a:rPr dirty="0" err="1"/>
+              <a:t>esponenziale</a:t>
+            </a:r>
+            <a:r>
+              <a:rPr dirty="0"/>
+              <a:t>. </a:t>
+            </a:r>
+            <a:r>
+              <a:rPr dirty="0" err="1"/>
+              <a:t>Gli</a:t>
+            </a:r>
+            <a:r>
+              <a:rPr dirty="0"/>
+              <a:t> </a:t>
+            </a:r>
+            <a:r>
+              <a:rPr dirty="0" err="1"/>
+              <a:t>stati</a:t>
+            </a:r>
+            <a:r>
+              <a:rPr dirty="0"/>
+              <a:t> </a:t>
+            </a:r>
+            <a:r>
+              <a:rPr dirty="0" err="1"/>
+              <a:t>sono</a:t>
+            </a:r>
+            <a:r>
+              <a:rPr dirty="0"/>
+              <a:t> Disconnected, Connecting e Connected. Quando la </a:t>
+            </a:r>
+            <a:r>
+              <a:rPr dirty="0" err="1"/>
+              <a:t>connessione</a:t>
+            </a:r>
+            <a:r>
+              <a:rPr dirty="0"/>
+              <a:t> </a:t>
+            </a:r>
+            <a:r>
+              <a:rPr dirty="0" err="1"/>
+              <a:t>fallisce</a:t>
+            </a:r>
+            <a:r>
+              <a:rPr dirty="0"/>
+              <a:t>, il </a:t>
+            </a:r>
+            <a:r>
+              <a:rPr dirty="0" err="1"/>
+              <a:t>sistema</a:t>
+            </a:r>
+            <a:r>
+              <a:rPr dirty="0"/>
+              <a:t> </a:t>
+            </a:r>
+            <a:r>
+              <a:rPr dirty="0" err="1"/>
+              <a:t>aspetta</a:t>
+            </a:r>
+            <a:r>
+              <a:rPr dirty="0"/>
+              <a:t> </a:t>
+            </a:r>
+            <a:r>
+              <a:rPr dirty="0" err="1"/>
+              <a:t>progressivamente</a:t>
+            </a:r>
+            <a:r>
+              <a:rPr dirty="0"/>
+              <a:t> </a:t>
+            </a:r>
+            <a:r>
+              <a:rPr dirty="0" err="1"/>
+              <a:t>più</a:t>
+            </a:r>
+            <a:r>
+              <a:rPr dirty="0"/>
+              <a:t> tempo prima di </a:t>
+            </a:r>
+            <a:r>
+              <a:rPr dirty="0" err="1"/>
+              <a:t>riprovare</a:t>
+            </a:r>
+            <a:r>
+              <a:rPr dirty="0"/>
+              <a:t>: 1 secondo, poi 2, 5, 10 e 15 secondi. Al </a:t>
+            </a:r>
+            <a:r>
+              <a:rPr dirty="0" err="1"/>
+              <a:t>sesto</a:t>
+            </a:r>
+            <a:r>
+              <a:rPr dirty="0"/>
+              <a:t> </a:t>
+            </a:r>
+            <a:r>
+              <a:rPr dirty="0" err="1"/>
+              <a:t>tentativo</a:t>
+            </a:r>
+            <a:r>
+              <a:rPr dirty="0"/>
+              <a:t> </a:t>
+            </a:r>
+            <a:r>
+              <a:rPr dirty="0" err="1"/>
+              <a:t>consecutivo</a:t>
+            </a:r>
+            <a:r>
+              <a:rPr dirty="0"/>
+              <a:t> </a:t>
+            </a:r>
+            <a:r>
+              <a:rPr dirty="0" err="1"/>
+              <a:t>fallito</a:t>
+            </a:r>
+            <a:r>
+              <a:rPr dirty="0"/>
+              <a:t> </a:t>
+            </a:r>
+            <a:r>
+              <a:rPr dirty="0" err="1"/>
+              <a:t>viene</a:t>
+            </a:r>
+            <a:r>
+              <a:rPr dirty="0"/>
+              <a:t> </a:t>
+            </a:r>
+            <a:r>
+              <a:rPr dirty="0" err="1"/>
+              <a:t>forzato</a:t>
+            </a:r>
+            <a:r>
+              <a:rPr dirty="0"/>
+              <a:t> il logout per </a:t>
+            </a:r>
+            <a:r>
+              <a:rPr dirty="0" err="1"/>
+              <a:t>evitare</a:t>
+            </a:r>
+            <a:r>
+              <a:rPr dirty="0"/>
+              <a:t> loop </a:t>
+            </a:r>
+            <a:r>
+              <a:rPr dirty="0" err="1"/>
+              <a:t>infiniti</a:t>
+            </a:r>
+            <a:r>
+              <a:rPr dirty="0"/>
+              <a:t>. Il flag </a:t>
+            </a:r>
+            <a:r>
+              <a:rPr dirty="0" err="1"/>
+              <a:t>is_connecting_in_progress</a:t>
+            </a:r>
+            <a:r>
+              <a:rPr dirty="0"/>
+              <a:t> </a:t>
+            </a:r>
+            <a:r>
+              <a:rPr dirty="0" err="1"/>
+              <a:t>previene</a:t>
+            </a:r>
+            <a:r>
+              <a:rPr dirty="0"/>
+              <a:t> </a:t>
+            </a:r>
+            <a:r>
+              <a:rPr dirty="0" err="1"/>
+              <a:t>tentativi</a:t>
+            </a:r>
+            <a:r>
+              <a:rPr dirty="0"/>
+              <a:t> </a:t>
+            </a:r>
+            <a:r>
+              <a:rPr dirty="0" err="1"/>
+              <a:t>multipli</a:t>
+            </a:r>
+            <a:r>
+              <a:rPr dirty="0"/>
+              <a:t> </a:t>
+            </a:r>
+            <a:r>
+              <a:rPr dirty="0" err="1"/>
+              <a:t>simultanei</a:t>
+            </a:r>
+            <a:r>
+              <a:rPr dirty="0"/>
+              <a:t>, </a:t>
+            </a:r>
+            <a:r>
+              <a:rPr dirty="0" err="1"/>
+              <a:t>mentre</a:t>
+            </a:r>
+            <a:r>
+              <a:rPr dirty="0"/>
+              <a:t> </a:t>
+            </a:r>
+            <a:r>
+              <a:rPr dirty="0" err="1"/>
+              <a:t>connection_attempt_start</a:t>
+            </a:r>
+            <a:r>
+              <a:rPr dirty="0"/>
+              <a:t> </a:t>
+            </a:r>
+            <a:r>
+              <a:rPr dirty="0" err="1"/>
+              <a:t>implementa</a:t>
+            </a:r>
+            <a:r>
+              <a:rPr dirty="0"/>
+              <a:t> un timeout di 30 secondi </a:t>
+            </a:r>
+            <a:r>
+              <a:rPr dirty="0" err="1"/>
+              <a:t>sulla</a:t>
+            </a:r>
+            <a:r>
+              <a:rPr dirty="0"/>
+              <a:t> </a:t>
+            </a:r>
+            <a:r>
+              <a:rPr dirty="0" err="1"/>
+              <a:t>fase</a:t>
+            </a:r>
+            <a:r>
+              <a:rPr dirty="0"/>
+              <a:t> di connecting.</a:t>
+            </a:r>
+          </a:p>
+        </p:txBody>
+      </p:sp>
+      <p:pic>
+        <p:nvPicPr>
+          <p:cNvPr id="28" name="Immagine 27" descr="Immagine che contiene testo, schermata, Carattere, numero&#10;&#10;Il contenuto generato dall'IA potrebbe non essere corretto.">
+            <a:extLst>
+              <a:ext uri="{FF2B5EF4-FFF2-40B4-BE49-F238E27FC236}">
+                <a16:creationId xmlns:a16="http://schemas.microsoft.com/office/drawing/2014/main" id="{DCA47F67-1480-1718-97F2-00E2956F751C}"/>
+              </a:ext>
+            </a:extLst>
+          </p:cNvPr>
+          <p:cNvPicPr>
+            <a:picLocks noChangeAspect="1"/>
+          </p:cNvPicPr>
+          <p:nvPr/>
+        </p:nvPicPr>
+        <p:blipFill>
+          <a:blip r:embed="rId3"/>
+          <a:stretch>
+            <a:fillRect/>
+          </a:stretch>
+        </p:blipFill>
+        <p:spPr>
+          <a:xfrm>
+            <a:off x="800913" y="768202"/>
+            <a:ext cx="3176728" cy="3932728"/>
+          </a:xfrm>
+          <a:prstGeom prst="rect">
+            <a:avLst/>
+          </a:prstGeom>
+        </p:spPr>
+      </p:pic>
+    </p:spTree>
+  </p:cSld>
+  <p:clrMapOvr>
+    <a:masterClrMapping/>
+  </p:clrMapOvr>
+</p:sld>
+</file>
+
+<file path=ppt/slides/slide21.xml><?xml version="1.0" encoding="utf-8"?>
+<p:sld xmlns:a="http://schemas.openxmlformats.org/drawingml/2006/main" xmlns:r="http://schemas.openxmlformats.org/officeDocument/2006/relationships" xmlns:p="http://schemas.openxmlformats.org/presentationml/2006/main">
   <p:cSld name="Slide 21">
     <p:bg>
       <p:bgPr>
@@ -8559,7 +8936,7 @@
 </p:sld>
 </file>
 
-<file path=ppt/slides/slide21.xml><?xml version="1.0" encoding="utf-8"?>
+<file path=ppt/slides/slide22.xml><?xml version="1.0" encoding="utf-8"?>
 <p:sld xmlns:a="http://schemas.openxmlformats.org/drawingml/2006/main" xmlns:r="http://schemas.openxmlformats.org/officeDocument/2006/relationships" xmlns:p="http://schemas.openxmlformats.org/presentationml/2006/main">
   <p:cSld name="Slide 22">
     <p:bg>
@@ -8994,7 +9371,7 @@
 </p:sld>
 </file>
 
-<file path=ppt/slides/slide22.xml><?xml version="1.0" encoding="utf-8"?>
+<file path=ppt/slides/slide23.xml><?xml version="1.0" encoding="utf-8"?>
 <p:sld xmlns:a="http://schemas.openxmlformats.org/drawingml/2006/main" xmlns:r="http://schemas.openxmlformats.org/officeDocument/2006/relationships" xmlns:p="http://schemas.openxmlformats.org/presentationml/2006/main">
   <p:cSld name="Slide 23">
     <p:bg>
@@ -9477,7 +9854,7 @@
 </p:sld>
 </file>
 
-<file path=ppt/slides/slide23.xml><?xml version="1.0" encoding="utf-8"?>
+<file path=ppt/slides/slide24.xml><?xml version="1.0" encoding="utf-8"?>
 <p:sld xmlns:a="http://schemas.openxmlformats.org/drawingml/2006/main" xmlns:r="http://schemas.openxmlformats.org/officeDocument/2006/relationships" xmlns:p="http://schemas.openxmlformats.org/presentationml/2006/main">
   <p:cSld name="Slide 24">
     <p:bg>
@@ -10571,7 +10948,7 @@
 </p:sld>
 </file>
 
-<file path=ppt/slides/slide24.xml><?xml version="1.0" encoding="utf-8"?>
+<file path=ppt/slides/slide25.xml><?xml version="1.0" encoding="utf-8"?>
 <p:sld xmlns:a="http://schemas.openxmlformats.org/drawingml/2006/main" xmlns:r="http://schemas.openxmlformats.org/officeDocument/2006/relationships" xmlns:p="http://schemas.openxmlformats.org/presentationml/2006/main">
   <p:cSld name="Slide 26">
     <p:bg>

--- a/ruggine_chat_presentazione.pptx
+++ b/ruggine_chat_presentazione.pptx
@@ -2,37 +2,37 @@
 <file path=ppt/presentation.xml><?xml version="1.0" encoding="utf-8"?>
 <p:presentation xmlns:a="http://schemas.openxmlformats.org/drawingml/2006/main" xmlns:r="http://schemas.openxmlformats.org/officeDocument/2006/relationships" xmlns:p="http://schemas.openxmlformats.org/presentationml/2006/main" saveSubsetFonts="1" autoCompressPictures="0">
   <p:sldMasterIdLst>
-    <p:sldMasterId id="2147483648" r:id="rId1"/>
+    <p:sldMasterId id="2147483648" r:id="rId4"/>
   </p:sldMasterIdLst>
   <p:notesMasterIdLst>
-    <p:notesMasterId r:id="rId27"/>
+    <p:notesMasterId r:id="rId30"/>
   </p:notesMasterIdLst>
   <p:sldIdLst>
-    <p:sldId id="256" r:id="rId2"/>
-    <p:sldId id="282" r:id="rId3"/>
-    <p:sldId id="283" r:id="rId4"/>
-    <p:sldId id="259" r:id="rId5"/>
-    <p:sldId id="262" r:id="rId6"/>
-    <p:sldId id="260" r:id="rId7"/>
-    <p:sldId id="261" r:id="rId8"/>
-    <p:sldId id="263" r:id="rId9"/>
-    <p:sldId id="265" r:id="rId10"/>
-    <p:sldId id="264" r:id="rId11"/>
-    <p:sldId id="266" r:id="rId12"/>
-    <p:sldId id="284" r:id="rId13"/>
-    <p:sldId id="268" r:id="rId14"/>
-    <p:sldId id="269" r:id="rId15"/>
-    <p:sldId id="270" r:id="rId16"/>
-    <p:sldId id="271" r:id="rId17"/>
-    <p:sldId id="272" r:id="rId18"/>
-    <p:sldId id="273" r:id="rId19"/>
-    <p:sldId id="274" r:id="rId20"/>
-    <p:sldId id="275" r:id="rId21"/>
-    <p:sldId id="276" r:id="rId22"/>
-    <p:sldId id="277" r:id="rId23"/>
-    <p:sldId id="278" r:id="rId24"/>
-    <p:sldId id="279" r:id="rId25"/>
-    <p:sldId id="281" r:id="rId26"/>
+    <p:sldId id="256" r:id="rId5"/>
+    <p:sldId id="282" r:id="rId6"/>
+    <p:sldId id="283" r:id="rId7"/>
+    <p:sldId id="259" r:id="rId8"/>
+    <p:sldId id="262" r:id="rId9"/>
+    <p:sldId id="260" r:id="rId10"/>
+    <p:sldId id="261" r:id="rId11"/>
+    <p:sldId id="263" r:id="rId12"/>
+    <p:sldId id="265" r:id="rId13"/>
+    <p:sldId id="264" r:id="rId14"/>
+    <p:sldId id="266" r:id="rId15"/>
+    <p:sldId id="284" r:id="rId16"/>
+    <p:sldId id="268" r:id="rId17"/>
+    <p:sldId id="269" r:id="rId18"/>
+    <p:sldId id="270" r:id="rId19"/>
+    <p:sldId id="271" r:id="rId20"/>
+    <p:sldId id="272" r:id="rId21"/>
+    <p:sldId id="273" r:id="rId22"/>
+    <p:sldId id="274" r:id="rId23"/>
+    <p:sldId id="275" r:id="rId24"/>
+    <p:sldId id="276" r:id="rId25"/>
+    <p:sldId id="277" r:id="rId26"/>
+    <p:sldId id="278" r:id="rId27"/>
+    <p:sldId id="279" r:id="rId28"/>
+    <p:sldId id="281" r:id="rId29"/>
   </p:sldIdLst>
   <p:sldSz cx="9144000" cy="5143500" type="screen16x9"/>
   <p:notesSz cx="5143500" cy="9144000"/>
@@ -5785,7 +5785,7 @@
               <a:rPr dirty="0" err="1"/>
               <a:t>egui_waker</a:t>
             </a:r>
-            <a:endParaRPr lang="en-US" dirty="0"/>
+            <a:endParaRPr lang="it-IT" dirty="0"/>
           </a:p>
           <a:p>
             <a:pPr>
@@ -5799,264 +5799,104 @@
               </a:defRPr>
             </a:pPr>
             <a:r>
-              <a:rPr dirty="0"/>
-              <a:t>Il pattern di update è </a:t>
-            </a:r>
-            <a:r>
-              <a:rPr dirty="0" err="1"/>
-              <a:t>basato</a:t>
-            </a:r>
-            <a:r>
-              <a:rPr dirty="0"/>
-              <a:t> </a:t>
-            </a:r>
-            <a:r>
-              <a:rPr dirty="0" err="1"/>
-              <a:t>su</a:t>
-            </a:r>
-            <a:r>
-              <a:rPr dirty="0"/>
-              <a:t> single source of truth. Quando un handler </a:t>
-            </a:r>
-            <a:r>
-              <a:rPr dirty="0" err="1"/>
-              <a:t>modifica</a:t>
-            </a:r>
-            <a:r>
-              <a:rPr dirty="0"/>
-              <a:t> </a:t>
-            </a:r>
-            <a:r>
-              <a:rPr dirty="0" err="1"/>
+              <a:rPr lang="it-IT" dirty="0"/>
+              <a:t>Il </a:t>
+            </a:r>
+            <a:r>
+              <a:rPr lang="it-IT" dirty="0" err="1"/>
+              <a:t>frontend</a:t>
+            </a:r>
+            <a:r>
+              <a:rPr lang="it-IT" dirty="0"/>
+              <a:t> è costruito attorno al pattern Single Source of Truth: tutto lo stato dell'applicazione vive in </a:t>
+            </a:r>
+            <a:r>
+              <a:rPr lang="it-IT" dirty="0" err="1"/>
               <a:t>AppState</a:t>
             </a:r>
             <a:r>
-              <a:rPr dirty="0"/>
-              <a:t>, per </a:t>
-            </a:r>
-            <a:r>
-              <a:rPr dirty="0" err="1"/>
-              <a:t>esempio</a:t>
-            </a:r>
-            <a:r>
-              <a:rPr dirty="0"/>
-              <a:t> </a:t>
-            </a:r>
-            <a:r>
-              <a:rPr dirty="0" err="1"/>
-              <a:t>aggiungendo</a:t>
-            </a:r>
-            <a:r>
-              <a:rPr dirty="0"/>
-              <a:t> un </a:t>
-            </a:r>
-            <a:r>
-              <a:rPr dirty="0" err="1"/>
-              <a:t>messaggio</a:t>
-            </a:r>
-            <a:r>
-              <a:rPr dirty="0"/>
-              <a:t> alla </a:t>
-            </a:r>
-            <a:r>
-              <a:rPr dirty="0" err="1"/>
+              <a:rPr lang="it-IT" dirty="0"/>
+              <a:t>.</a:t>
+            </a:r>
+          </a:p>
+          <a:p>
+            <a:pPr>
+              <a:lnSpc>
+                <a:spcPct val="130000"/>
+              </a:lnSpc>
+              <a:defRPr sz="1300">
+                <a:solidFill>
+                  <a:srgbClr val="404040"/>
+                </a:solidFill>
+              </a:defRPr>
+            </a:pPr>
+            <a:r>
+              <a:rPr lang="it-IT" dirty="0"/>
+              <a:t>Quando arriva un messaggio dal server, </a:t>
+            </a:r>
+            <a:r>
+              <a:rPr lang="it-IT" dirty="0" err="1"/>
+              <a:t>l'handler</a:t>
+            </a:r>
+            <a:r>
+              <a:rPr lang="it-IT" dirty="0"/>
+              <a:t> aggiorna due strutture dati: aggiunge il messaggio alla </a:t>
+            </a:r>
+            <a:r>
+              <a:rPr lang="it-IT" dirty="0" err="1"/>
               <a:t>conversation_messages</a:t>
             </a:r>
             <a:r>
-              <a:rPr dirty="0"/>
-              <a:t> HashMap e </a:t>
-            </a:r>
-            <a:r>
-              <a:rPr dirty="0" err="1"/>
-              <a:t>aggiornando</a:t>
-            </a:r>
-            <a:r>
-              <a:rPr dirty="0"/>
-              <a:t> </a:t>
-            </a:r>
-            <a:r>
-              <a:rPr dirty="0" err="1"/>
+              <a:rPr lang="it-IT" dirty="0"/>
+              <a:t> e aggiorna il numero di sequenza in </a:t>
+            </a:r>
+            <a:r>
+              <a:rPr lang="it-IT" dirty="0" err="1"/>
               <a:t>conversation_sequences</a:t>
             </a:r>
             <a:r>
-              <a:rPr dirty="0"/>
-              <a:t>, </a:t>
-            </a:r>
-            <a:r>
-              <a:rPr dirty="0" err="1"/>
-              <a:t>chiama</a:t>
-            </a:r>
-            <a:r>
-              <a:rPr dirty="0"/>
-              <a:t> </a:t>
-            </a:r>
-            <a:r>
-              <a:rPr dirty="0" err="1"/>
+              <a:rPr lang="it-IT" dirty="0"/>
+              <a:t>. Successivamente chiama </a:t>
+            </a:r>
+            <a:r>
+              <a:rPr lang="it-IT" dirty="0" err="1"/>
               <a:t>egui_waker</a:t>
             </a:r>
             <a:r>
-              <a:rPr dirty="0"/>
-              <a:t>() per </a:t>
-            </a:r>
-            <a:r>
-              <a:rPr dirty="0" err="1"/>
-              <a:t>svegliare</a:t>
-            </a:r>
-            <a:r>
-              <a:rPr dirty="0"/>
-              <a:t> </a:t>
-            </a:r>
-            <a:r>
-              <a:rPr dirty="0" err="1"/>
-              <a:t>l'event</a:t>
-            </a:r>
-            <a:r>
-              <a:rPr dirty="0"/>
-              <a:t> loop. Nel </a:t>
-            </a:r>
-            <a:r>
-              <a:rPr dirty="0" err="1"/>
-              <a:t>prossimo</a:t>
-            </a:r>
-            <a:r>
-              <a:rPr dirty="0"/>
-              <a:t> frame </a:t>
-            </a:r>
-            <a:r>
-              <a:rPr dirty="0" err="1"/>
-              <a:t>l'UI</a:t>
-            </a:r>
-            <a:r>
-              <a:rPr dirty="0"/>
-              <a:t> </a:t>
-            </a:r>
-            <a:r>
-              <a:rPr dirty="0" err="1"/>
-              <a:t>viene</a:t>
-            </a:r>
-            <a:r>
-              <a:rPr dirty="0"/>
-              <a:t> </a:t>
-            </a:r>
-            <a:r>
-              <a:rPr dirty="0" err="1"/>
-              <a:t>ricostruita</a:t>
-            </a:r>
-            <a:r>
-              <a:rPr dirty="0"/>
-              <a:t> </a:t>
-            </a:r>
-            <a:r>
-              <a:rPr dirty="0" err="1"/>
-              <a:t>completamente</a:t>
-            </a:r>
-            <a:r>
-              <a:rPr dirty="0"/>
-              <a:t> </a:t>
-            </a:r>
-            <a:r>
-              <a:rPr dirty="0" err="1"/>
-              <a:t>leggendo</a:t>
-            </a:r>
-            <a:r>
-              <a:rPr dirty="0"/>
-              <a:t> il nuovo </a:t>
-            </a:r>
-            <a:r>
-              <a:rPr dirty="0" err="1"/>
-              <a:t>stato</a:t>
-            </a:r>
-            <a:r>
-              <a:rPr dirty="0"/>
-              <a:t>: </a:t>
-            </a:r>
-            <a:r>
-              <a:rPr dirty="0" err="1"/>
+              <a:rPr lang="it-IT" dirty="0"/>
+              <a:t>() per svegliare il loop di rendering.</a:t>
+            </a:r>
+          </a:p>
+          <a:p>
+            <a:pPr>
+              <a:lnSpc>
+                <a:spcPct val="130000"/>
+              </a:lnSpc>
+              <a:defRPr sz="1300">
+                <a:solidFill>
+                  <a:srgbClr val="404040"/>
+                </a:solidFill>
+              </a:defRPr>
+            </a:pPr>
+            <a:r>
+              <a:rPr lang="it-IT" dirty="0"/>
+              <a:t>Il punto chiave è che </a:t>
+            </a:r>
+            <a:r>
+              <a:rPr lang="it-IT" dirty="0" err="1"/>
               <a:t>egui</a:t>
             </a:r>
             <a:r>
-              <a:rPr dirty="0"/>
-              <a:t> in immediate mode </a:t>
-            </a:r>
-            <a:r>
-              <a:rPr dirty="0" err="1"/>
-              <a:t>significa</a:t>
-            </a:r>
-            <a:r>
-              <a:rPr dirty="0"/>
-              <a:t> </a:t>
-            </a:r>
-            <a:r>
-              <a:rPr dirty="0" err="1"/>
-              <a:t>che</a:t>
-            </a:r>
-            <a:r>
-              <a:rPr dirty="0"/>
-              <a:t> ogni frame le </a:t>
-            </a:r>
-            <a:r>
-              <a:rPr dirty="0" err="1"/>
-              <a:t>funzioni</a:t>
-            </a:r>
-            <a:r>
-              <a:rPr dirty="0"/>
-              <a:t> di rendering </a:t>
-            </a:r>
-            <a:r>
-              <a:rPr dirty="0" err="1"/>
-              <a:t>leggono</a:t>
-            </a:r>
-            <a:r>
-              <a:rPr dirty="0"/>
-              <a:t> </a:t>
-            </a:r>
-            <a:r>
-              <a:rPr dirty="0" err="1"/>
+              <a:rPr lang="it-IT" dirty="0"/>
+              <a:t> lavora in immediate mode: ogni frame, le funzioni di rendering leggono </a:t>
+            </a:r>
+            <a:r>
+              <a:rPr lang="it-IT" dirty="0" err="1"/>
               <a:t>AppState</a:t>
             </a:r>
             <a:r>
-              <a:rPr dirty="0"/>
-              <a:t> e </a:t>
-            </a:r>
-            <a:r>
-              <a:rPr dirty="0" err="1"/>
-              <a:t>disegnano</a:t>
-            </a:r>
-            <a:r>
-              <a:rPr dirty="0"/>
-              <a:t> </a:t>
-            </a:r>
-            <a:r>
-              <a:rPr dirty="0" err="1"/>
-              <a:t>l'interfaccia</a:t>
-            </a:r>
-            <a:r>
-              <a:rPr dirty="0"/>
-              <a:t> da zero. Non </a:t>
-            </a:r>
-            <a:r>
-              <a:rPr dirty="0" err="1"/>
-              <a:t>c'è</a:t>
-            </a:r>
-            <a:r>
-              <a:rPr dirty="0"/>
-              <a:t> DOM da </a:t>
-            </a:r>
-            <a:r>
-              <a:rPr dirty="0" err="1"/>
-              <a:t>aggiornare</a:t>
-            </a:r>
-            <a:r>
-              <a:rPr dirty="0"/>
-              <a:t>, </a:t>
-            </a:r>
-            <a:r>
-              <a:rPr dirty="0" err="1"/>
-              <a:t>tutto</a:t>
-            </a:r>
-            <a:r>
-              <a:rPr dirty="0"/>
-              <a:t> è data-driven.</a:t>
+              <a:rPr lang="it-IT" dirty="0"/>
+              <a:t> da zero e ridisegnano completamente l'interfaccia. </a:t>
             </a:r>
           </a:p>
         </p:txBody>
@@ -6970,23 +6810,7 @@
             </a:r>
             <a:r>
               <a:rPr dirty="0"/>
-              <a:t> fa lookup </a:t>
-            </a:r>
-            <a:r>
-              <a:rPr dirty="0" err="1"/>
-              <a:t>tramite</a:t>
-            </a:r>
-            <a:r>
-              <a:rPr dirty="0"/>
-              <a:t> </a:t>
-            </a:r>
-            <a:r>
-              <a:rPr dirty="0" err="1"/>
-              <a:t>client_msg_id</a:t>
-            </a:r>
-            <a:r>
-              <a:rPr dirty="0"/>
-              <a:t>, </a:t>
+              <a:t> </a:t>
             </a:r>
             <a:r>
               <a:rPr dirty="0" err="1"/>
@@ -7010,87 +6834,7 @@
             </a:r>
             <a:r>
               <a:rPr dirty="0"/>
-              <a:t> server. Se lo </a:t>
-            </a:r>
-            <a:r>
-              <a:rPr dirty="0" err="1"/>
-              <a:t>stesso</a:t>
-            </a:r>
-            <a:r>
-              <a:rPr dirty="0"/>
-              <a:t> </a:t>
-            </a:r>
-            <a:r>
-              <a:rPr dirty="0" err="1"/>
-              <a:t>messaggio</a:t>
-            </a:r>
-            <a:r>
-              <a:rPr dirty="0"/>
-              <a:t> </a:t>
-            </a:r>
-            <a:r>
-              <a:rPr dirty="0" err="1"/>
-              <a:t>arriva</a:t>
-            </a:r>
-            <a:r>
-              <a:rPr dirty="0"/>
-              <a:t> poi via broadcast (</a:t>
-            </a:r>
-            <a:r>
-              <a:rPr dirty="0" err="1"/>
-              <a:t>perché</a:t>
-            </a:r>
-            <a:r>
-              <a:rPr dirty="0"/>
-              <a:t> il sender è </a:t>
-            </a:r>
-            <a:r>
-              <a:rPr dirty="0" err="1"/>
-              <a:t>anche</a:t>
-            </a:r>
-            <a:r>
-              <a:rPr dirty="0"/>
-              <a:t> receiver), </a:t>
-            </a:r>
-            <a:r>
-              <a:rPr dirty="0" err="1"/>
-              <a:t>viene</a:t>
-            </a:r>
-            <a:r>
-              <a:rPr dirty="0"/>
-              <a:t> deduplicate </a:t>
-            </a:r>
-            <a:r>
-              <a:rPr dirty="0" err="1"/>
-              <a:t>controllando</a:t>
-            </a:r>
-            <a:r>
-              <a:rPr dirty="0"/>
-              <a:t> il </a:t>
-            </a:r>
-            <a:r>
-              <a:rPr dirty="0" err="1"/>
-              <a:t>client_msg_id</a:t>
-            </a:r>
-            <a:r>
-              <a:rPr dirty="0"/>
-              <a:t> per </a:t>
-            </a:r>
-            <a:r>
-              <a:rPr dirty="0" err="1"/>
-              <a:t>evitare</a:t>
-            </a:r>
-            <a:r>
-              <a:rPr dirty="0"/>
-              <a:t> </a:t>
-            </a:r>
-            <a:r>
-              <a:rPr dirty="0" err="1"/>
-              <a:t>duplicati</a:t>
-            </a:r>
-            <a:r>
-              <a:rPr dirty="0"/>
-              <a:t> in UI.</a:t>
+              <a:t> server.</a:t>
             </a:r>
           </a:p>
         </p:txBody>
@@ -8386,87 +8130,7 @@
             </a:r>
             <a:r>
               <a:rPr dirty="0"/>
-              <a:t>. Il flag </a:t>
-            </a:r>
-            <a:r>
-              <a:rPr dirty="0" err="1"/>
-              <a:t>is_connecting_in_progress</a:t>
-            </a:r>
-            <a:r>
-              <a:rPr dirty="0"/>
-              <a:t> </a:t>
-            </a:r>
-            <a:r>
-              <a:rPr dirty="0" err="1"/>
-              <a:t>previene</a:t>
-            </a:r>
-            <a:r>
-              <a:rPr dirty="0"/>
-              <a:t> </a:t>
-            </a:r>
-            <a:r>
-              <a:rPr dirty="0" err="1"/>
-              <a:t>tentativi</a:t>
-            </a:r>
-            <a:r>
-              <a:rPr dirty="0"/>
-              <a:t> </a:t>
-            </a:r>
-            <a:r>
-              <a:rPr dirty="0" err="1"/>
-              <a:t>multipli</a:t>
-            </a:r>
-            <a:r>
-              <a:rPr dirty="0"/>
-              <a:t> </a:t>
-            </a:r>
-            <a:r>
-              <a:rPr dirty="0" err="1"/>
-              <a:t>simultanei</a:t>
-            </a:r>
-            <a:r>
-              <a:rPr dirty="0"/>
-              <a:t>, </a:t>
-            </a:r>
-            <a:r>
-              <a:rPr dirty="0" err="1"/>
-              <a:t>mentre</a:t>
-            </a:r>
-            <a:r>
-              <a:rPr dirty="0"/>
-              <a:t> </a:t>
-            </a:r>
-            <a:r>
-              <a:rPr dirty="0" err="1"/>
-              <a:t>connection_attempt_start</a:t>
-            </a:r>
-            <a:r>
-              <a:rPr dirty="0"/>
-              <a:t> </a:t>
-            </a:r>
-            <a:r>
-              <a:rPr dirty="0" err="1"/>
-              <a:t>implementa</a:t>
-            </a:r>
-            <a:r>
-              <a:rPr dirty="0"/>
-              <a:t> un timeout di 30 secondi </a:t>
-            </a:r>
-            <a:r>
-              <a:rPr dirty="0" err="1"/>
-              <a:t>sulla</a:t>
-            </a:r>
-            <a:r>
-              <a:rPr dirty="0"/>
-              <a:t> </a:t>
-            </a:r>
-            <a:r>
-              <a:rPr dirty="0" err="1"/>
-              <a:t>fase</a:t>
-            </a:r>
-            <a:r>
-              <a:rPr dirty="0"/>
-              <a:t> di connecting.</a:t>
+              <a:t>.</a:t>
             </a:r>
           </a:p>
         </p:txBody>
@@ -8610,6 +8274,34 @@
                 </a:solidFill>
               </a:defRPr>
             </a:pPr>
+            <a:endParaRPr lang="it-IT" dirty="0"/>
+          </a:p>
+          <a:p>
+            <a:pPr marL="0" indent="0">
+              <a:spcAft>
+                <a:spcPts val="1200"/>
+              </a:spcAft>
+              <a:buNone/>
+              <a:defRPr sz="1600" b="1">
+                <a:solidFill>
+                  <a:srgbClr val="0070C0"/>
+                </a:solidFill>
+              </a:defRPr>
+            </a:pPr>
+            <a:endParaRPr lang="it-IT" dirty="0"/>
+          </a:p>
+          <a:p>
+            <a:pPr marL="0" indent="0">
+              <a:spcAft>
+                <a:spcPts val="1200"/>
+              </a:spcAft>
+              <a:buNone/>
+              <a:defRPr sz="1600" b="1">
+                <a:solidFill>
+                  <a:srgbClr val="0070C0"/>
+                </a:solidFill>
+              </a:defRPr>
+            </a:pPr>
             <a:r>
               <a:rPr dirty="0"/>
               <a:t>Background Task - 120s Interval</a:t>
@@ -8628,273 +8320,50 @@
               </a:defRPr>
             </a:pPr>
             <a:r>
-              <a:rPr dirty="0"/>
-              <a:t>Il CPU logger è un task background Tokio </a:t>
-            </a:r>
-            <a:r>
-              <a:rPr dirty="0" err="1"/>
-              <a:t>che</a:t>
-            </a:r>
-            <a:r>
-              <a:rPr dirty="0"/>
-              <a:t> </a:t>
-            </a:r>
-            <a:r>
-              <a:rPr dirty="0" err="1"/>
-              <a:t>monitora</a:t>
-            </a:r>
-            <a:r>
-              <a:rPr dirty="0"/>
-              <a:t> le </a:t>
-            </a:r>
-            <a:r>
-              <a:rPr dirty="0" err="1"/>
-              <a:t>risorse</a:t>
-            </a:r>
-            <a:r>
-              <a:rPr dirty="0"/>
-              <a:t> del </a:t>
-            </a:r>
-            <a:r>
-              <a:rPr dirty="0" err="1"/>
-              <a:t>processo</a:t>
-            </a:r>
-            <a:r>
-              <a:rPr dirty="0"/>
-              <a:t> server ogni 2 </a:t>
-            </a:r>
-            <a:r>
-              <a:rPr dirty="0" err="1"/>
-              <a:t>minuti</a:t>
-            </a:r>
-            <a:r>
-              <a:rPr dirty="0"/>
-              <a:t>. Usa la crate </a:t>
-            </a:r>
-            <a:r>
-              <a:rPr dirty="0" err="1"/>
+              <a:rPr lang="it-IT" dirty="0"/>
+              <a:t>Per monitorare le risorse di sistema in modo completamente autonomo abbiamo implementato Il </a:t>
+            </a:r>
+            <a:r>
+              <a:rPr lang="it-IT" dirty="0" err="1"/>
+              <a:t>cpu_logger</a:t>
+            </a:r>
+            <a:r>
+              <a:rPr lang="it-IT" dirty="0"/>
+              <a:t>, un task che gira in background sul server. Al suo avvio ottiene il PID del  processo corrente tramite </a:t>
+            </a:r>
+            <a:r>
+              <a:rPr lang="it-IT" dirty="0" err="1"/>
               <a:t>sysinfo</a:t>
             </a:r>
             <a:r>
-              <a:rPr dirty="0"/>
-              <a:t> per </a:t>
-            </a:r>
-            <a:r>
-              <a:rPr dirty="0" err="1"/>
-              <a:t>interrogare</a:t>
-            </a:r>
-            <a:r>
-              <a:rPr dirty="0"/>
-              <a:t> il </a:t>
-            </a:r>
-            <a:r>
-              <a:rPr dirty="0" err="1"/>
-              <a:t>sistema</a:t>
-            </a:r>
-            <a:r>
-              <a:rPr dirty="0"/>
-              <a:t> </a:t>
-            </a:r>
-            <a:r>
-              <a:rPr dirty="0" err="1"/>
-              <a:t>operativo</a:t>
-            </a:r>
-            <a:r>
-              <a:rPr dirty="0"/>
-              <a:t> e </a:t>
-            </a:r>
-            <a:r>
-              <a:rPr dirty="0" err="1"/>
-              <a:t>ottenere</a:t>
-            </a:r>
-            <a:r>
-              <a:rPr dirty="0"/>
-              <a:t> CPU usage e memoria </a:t>
-            </a:r>
-            <a:r>
-              <a:rPr dirty="0" err="1"/>
-              <a:t>residente</a:t>
-            </a:r>
-            <a:r>
-              <a:rPr dirty="0"/>
-              <a:t>. La CPU </a:t>
-            </a:r>
-            <a:r>
-              <a:rPr dirty="0" err="1"/>
-              <a:t>viene</a:t>
-            </a:r>
-            <a:r>
               <a:rPr lang="it-IT" dirty="0"/>
-              <a:t> </a:t>
-            </a:r>
-            <a:r>
-              <a:rPr dirty="0" err="1"/>
-              <a:t>normalizzata</a:t>
-            </a:r>
-            <a:r>
-              <a:rPr dirty="0"/>
-              <a:t> </a:t>
-            </a:r>
-            <a:r>
-              <a:rPr dirty="0" err="1"/>
-              <a:t>dividendo</a:t>
-            </a:r>
-            <a:r>
-              <a:rPr dirty="0"/>
-              <a:t> per il </a:t>
-            </a:r>
-            <a:r>
-              <a:rPr dirty="0" err="1"/>
-              <a:t>numero</a:t>
-            </a:r>
-            <a:r>
-              <a:rPr dirty="0"/>
-              <a:t> di core </a:t>
-            </a:r>
-            <a:r>
-              <a:rPr dirty="0" err="1"/>
-              <a:t>disponibili</a:t>
-            </a:r>
-            <a:r>
-              <a:rPr dirty="0"/>
-              <a:t>, </a:t>
-            </a:r>
-            <a:r>
-              <a:rPr dirty="0" err="1"/>
-              <a:t>così</a:t>
-            </a:r>
-            <a:r>
-              <a:rPr dirty="0"/>
-              <a:t> la </a:t>
-            </a:r>
-            <a:r>
-              <a:rPr dirty="0" err="1"/>
-              <a:t>percentuale</a:t>
-            </a:r>
-            <a:r>
-              <a:rPr dirty="0"/>
-              <a:t> è </a:t>
-            </a:r>
-            <a:r>
-              <a:rPr dirty="0" err="1"/>
-              <a:t>comparabile</a:t>
-            </a:r>
-            <a:r>
-              <a:rPr dirty="0"/>
-              <a:t> </a:t>
-            </a:r>
-            <a:r>
-              <a:rPr dirty="0" err="1"/>
-              <a:t>tra</a:t>
-            </a:r>
-            <a:r>
-              <a:rPr dirty="0"/>
-              <a:t> </a:t>
-            </a:r>
-            <a:r>
-              <a:rPr dirty="0" err="1"/>
-              <a:t>sistemi</a:t>
-            </a:r>
-            <a:r>
-              <a:rPr dirty="0"/>
-              <a:t> </a:t>
-            </a:r>
-            <a:r>
-              <a:rPr dirty="0" err="1"/>
-              <a:t>diversi</a:t>
-            </a:r>
-            <a:r>
-              <a:rPr dirty="0"/>
-              <a:t>. La memoria </a:t>
-            </a:r>
-            <a:r>
-              <a:rPr dirty="0" err="1"/>
-              <a:t>viene</a:t>
-            </a:r>
-            <a:r>
-              <a:rPr dirty="0"/>
-              <a:t> </a:t>
-            </a:r>
-            <a:r>
-              <a:rPr dirty="0" err="1"/>
-              <a:t>convertita</a:t>
-            </a:r>
-            <a:r>
-              <a:rPr dirty="0"/>
-              <a:t> da bytes a megabytes per </a:t>
-            </a:r>
-            <a:r>
-              <a:rPr dirty="0" err="1"/>
-              <a:t>leggibilità</a:t>
-            </a:r>
-            <a:r>
-              <a:rPr dirty="0"/>
-              <a:t>. I </a:t>
-            </a:r>
-            <a:r>
-              <a:rPr dirty="0" err="1"/>
-              <a:t>dati</a:t>
-            </a:r>
-            <a:r>
-              <a:rPr dirty="0"/>
-              <a:t> </a:t>
-            </a:r>
-            <a:r>
-              <a:rPr dirty="0" err="1"/>
-              <a:t>vengono</a:t>
-            </a:r>
-            <a:r>
-              <a:rPr dirty="0"/>
-              <a:t> </a:t>
-            </a:r>
-            <a:r>
-              <a:rPr dirty="0" err="1"/>
-              <a:t>scritti</a:t>
-            </a:r>
-            <a:r>
-              <a:rPr dirty="0"/>
-              <a:t> in append </a:t>
-            </a:r>
-            <a:r>
-              <a:rPr dirty="0" err="1"/>
-              <a:t>su</a:t>
-            </a:r>
-            <a:r>
-              <a:rPr dirty="0"/>
-              <a:t> server_cpu.log con timestamp UTC, </a:t>
-            </a:r>
-            <a:r>
-              <a:rPr dirty="0" err="1"/>
-              <a:t>permettendo</a:t>
-            </a:r>
-            <a:r>
-              <a:rPr dirty="0"/>
-              <a:t> di </a:t>
-            </a:r>
-            <a:r>
-              <a:rPr dirty="0" err="1"/>
-              <a:t>tracciare</a:t>
-            </a:r>
-            <a:r>
-              <a:rPr dirty="0"/>
-              <a:t> </a:t>
-            </a:r>
-            <a:r>
-              <a:rPr dirty="0" err="1"/>
-              <a:t>l'andamento</a:t>
-            </a:r>
-            <a:r>
-              <a:rPr dirty="0"/>
-              <a:t> </a:t>
-            </a:r>
-            <a:r>
-              <a:rPr dirty="0" err="1"/>
-              <a:t>nel</a:t>
-            </a:r>
-            <a:r>
-              <a:rPr dirty="0"/>
-              <a:t> tempo.</a:t>
-            </a:r>
+              <a:t>, poi entra in un loop infinito: ogni 2 minuti aggiorna i dati di sistema, legge l'utilizzo CPU del processo — normalizzato sul numero di core per avere una percentuale reale — e la memoria occupata.</a:t>
+            </a:r>
+          </a:p>
+          <a:p>
+            <a:pPr>
+              <a:lnSpc>
+                <a:spcPct val="130000"/>
+              </a:lnSpc>
+              <a:defRPr sz="1300">
+                <a:solidFill>
+                  <a:srgbClr val="404040"/>
+                </a:solidFill>
+              </a:defRPr>
+            </a:pPr>
+            <a:r>
+              <a:rPr lang="it-IT" dirty="0"/>
+              <a:t>Questi dati vengono scritti in un file con </a:t>
+            </a:r>
+            <a:r>
+              <a:rPr lang="it-IT" dirty="0" err="1"/>
+              <a:t>timestamp</a:t>
+            </a:r>
+            <a:r>
+              <a:rPr lang="it-IT" dirty="0"/>
+              <a:t>, così è possibile tracciare l'andamento delle risorse nel tempo senza sovrascrivere i dati precedenti.</a:t>
+            </a:r>
+            <a:endParaRPr dirty="0"/>
           </a:p>
         </p:txBody>
       </p:sp>
@@ -9054,282 +8523,7 @@
                 </a:solidFill>
               </a:defRPr>
             </a:pPr>
-            <a:r>
-              <a:rPr dirty="0"/>
-              <a:t>I log </a:t>
-            </a:r>
-            <a:r>
-              <a:rPr dirty="0" err="1"/>
-              <a:t>mostrano</a:t>
-            </a:r>
-            <a:r>
-              <a:rPr dirty="0"/>
-              <a:t> pattern </a:t>
-            </a:r>
-            <a:r>
-              <a:rPr dirty="0" err="1"/>
-              <a:t>interessanti</a:t>
-            </a:r>
-            <a:r>
-              <a:rPr dirty="0"/>
-              <a:t>: </a:t>
-            </a:r>
-            <a:r>
-              <a:rPr dirty="0" err="1"/>
-              <a:t>quando</a:t>
-            </a:r>
-            <a:r>
-              <a:rPr dirty="0"/>
-              <a:t> il server è idle la CPU è </a:t>
-            </a:r>
-            <a:r>
-              <a:rPr dirty="0" err="1"/>
-              <a:t>praticamente</a:t>
-            </a:r>
-            <a:r>
-              <a:rPr dirty="0"/>
-              <a:t> zero, </a:t>
-            </a:r>
-            <a:r>
-              <a:rPr dirty="0" err="1"/>
-              <a:t>durante</a:t>
-            </a:r>
-            <a:r>
-              <a:rPr dirty="0"/>
-              <a:t> lo startup sale al 3-12% per </a:t>
-            </a:r>
-            <a:r>
-              <a:rPr dirty="0" err="1"/>
-              <a:t>inizializzare</a:t>
-            </a:r>
-            <a:r>
-              <a:rPr dirty="0"/>
-              <a:t> le </a:t>
-            </a:r>
-            <a:r>
-              <a:rPr dirty="0" err="1"/>
-              <a:t>strutture</a:t>
-            </a:r>
-            <a:r>
-              <a:rPr dirty="0"/>
-              <a:t> </a:t>
-            </a:r>
-            <a:r>
-              <a:rPr dirty="0" err="1"/>
-              <a:t>dati</a:t>
-            </a:r>
-            <a:r>
-              <a:rPr dirty="0"/>
-              <a:t>, e sotto </a:t>
-            </a:r>
-            <a:r>
-              <a:rPr dirty="0" err="1"/>
-              <a:t>carico</a:t>
-            </a:r>
-            <a:r>
-              <a:rPr dirty="0"/>
-              <a:t> </a:t>
-            </a:r>
-            <a:r>
-              <a:rPr dirty="0" err="1"/>
-              <a:t>normale</a:t>
-            </a:r>
-            <a:r>
-              <a:rPr dirty="0"/>
-              <a:t> </a:t>
-            </a:r>
-            <a:r>
-              <a:rPr dirty="0" err="1"/>
-              <a:t>si</a:t>
-            </a:r>
-            <a:r>
-              <a:rPr dirty="0"/>
-              <a:t> </a:t>
-            </a:r>
-            <a:r>
-              <a:rPr dirty="0" err="1"/>
-              <a:t>assesta</a:t>
-            </a:r>
-            <a:r>
-              <a:rPr dirty="0"/>
-              <a:t> </a:t>
-            </a:r>
-            <a:r>
-              <a:rPr dirty="0" err="1"/>
-              <a:t>intorno</a:t>
-            </a:r>
-            <a:r>
-              <a:rPr dirty="0"/>
-              <a:t> all'1-2%. La memoria ha un baseline di circa 35 MB in </a:t>
-            </a:r>
-            <a:r>
-              <a:rPr dirty="0" err="1"/>
-              <a:t>stato</a:t>
-            </a:r>
-            <a:r>
-              <a:rPr dirty="0"/>
-              <a:t> stabile, con </a:t>
-            </a:r>
-            <a:r>
-              <a:rPr dirty="0" err="1"/>
-              <a:t>picchi</a:t>
-            </a:r>
-            <a:r>
-              <a:rPr dirty="0"/>
-              <a:t> </a:t>
-            </a:r>
-            <a:r>
-              <a:rPr dirty="0" err="1"/>
-              <a:t>fino</a:t>
-            </a:r>
-            <a:r>
-              <a:rPr dirty="0"/>
-              <a:t> a 95 MB </a:t>
-            </a:r>
-            <a:r>
-              <a:rPr dirty="0" err="1"/>
-              <a:t>durante</a:t>
-            </a:r>
-            <a:r>
-              <a:rPr dirty="0"/>
-              <a:t> </a:t>
-            </a:r>
-            <a:r>
-              <a:rPr dirty="0" err="1"/>
-              <a:t>caricamenti</a:t>
-            </a:r>
-            <a:r>
-              <a:rPr dirty="0"/>
-              <a:t> di </a:t>
-            </a:r>
-            <a:r>
-              <a:rPr dirty="0" err="1"/>
-              <a:t>dati</a:t>
-            </a:r>
-            <a:r>
-              <a:rPr dirty="0"/>
-              <a:t> </a:t>
-            </a:r>
-            <a:r>
-              <a:rPr dirty="0" err="1"/>
-              <a:t>intensivi</a:t>
-            </a:r>
-            <a:r>
-              <a:rPr dirty="0"/>
-              <a:t>. Non </a:t>
-            </a:r>
-            <a:r>
-              <a:rPr dirty="0" err="1"/>
-              <a:t>si</a:t>
-            </a:r>
-            <a:r>
-              <a:rPr dirty="0"/>
-              <a:t> </a:t>
-            </a:r>
-            <a:r>
-              <a:rPr dirty="0" err="1"/>
-              <a:t>vedono</a:t>
-            </a:r>
-            <a:r>
-              <a:rPr dirty="0"/>
-              <a:t> memory leak: la memoria </a:t>
-            </a:r>
-            <a:r>
-              <a:rPr dirty="0" err="1"/>
-              <a:t>rimane</a:t>
-            </a:r>
-            <a:r>
-              <a:rPr dirty="0"/>
-              <a:t> stabile per ore </a:t>
-            </a:r>
-            <a:r>
-              <a:rPr dirty="0" err="1"/>
-              <a:t>quando</a:t>
-            </a:r>
-            <a:r>
-              <a:rPr dirty="0"/>
-              <a:t> non </a:t>
-            </a:r>
-            <a:r>
-              <a:rPr dirty="0" err="1"/>
-              <a:t>c'è</a:t>
-            </a:r>
-            <a:r>
-              <a:rPr dirty="0"/>
-              <a:t> </a:t>
-            </a:r>
-            <a:r>
-              <a:rPr dirty="0" err="1"/>
-              <a:t>attività</a:t>
-            </a:r>
-            <a:r>
-              <a:rPr dirty="0"/>
-              <a:t>. La formula per la CPU divide </a:t>
-            </a:r>
-            <a:r>
-              <a:rPr dirty="0" err="1"/>
-              <a:t>l'usage</a:t>
-            </a:r>
-            <a:r>
-              <a:rPr dirty="0"/>
-              <a:t> del </a:t>
-            </a:r>
-            <a:r>
-              <a:rPr dirty="0" err="1"/>
-              <a:t>processo</a:t>
-            </a:r>
-            <a:r>
-              <a:rPr dirty="0"/>
-              <a:t> per il </a:t>
-            </a:r>
-            <a:r>
-              <a:rPr dirty="0" err="1"/>
-              <a:t>numero</a:t>
-            </a:r>
-            <a:r>
-              <a:rPr dirty="0"/>
-              <a:t> di core, </a:t>
-            </a:r>
-            <a:r>
-              <a:rPr dirty="0" err="1"/>
-              <a:t>quindi</a:t>
-            </a:r>
-            <a:r>
-              <a:rPr dirty="0"/>
-              <a:t> 1.33% </a:t>
-            </a:r>
-            <a:r>
-              <a:rPr dirty="0" err="1"/>
-              <a:t>su</a:t>
-            </a:r>
-            <a:r>
-              <a:rPr dirty="0"/>
-              <a:t> un </a:t>
-            </a:r>
-            <a:r>
-              <a:rPr dirty="0" err="1"/>
-              <a:t>sistema</a:t>
-            </a:r>
-            <a:r>
-              <a:rPr dirty="0"/>
-              <a:t> a 8 core equivale a circa 10% di </a:t>
-            </a:r>
-            <a:r>
-              <a:rPr dirty="0" err="1"/>
-              <a:t>utilizzo</a:t>
-            </a:r>
-            <a:r>
-              <a:rPr dirty="0"/>
-              <a:t> di un </a:t>
-            </a:r>
-            <a:r>
-              <a:rPr dirty="0" err="1"/>
-              <a:t>singolo</a:t>
-            </a:r>
-            <a:r>
-              <a:rPr dirty="0"/>
-              <a:t> core.</a:t>
-            </a:r>
+            <a:endParaRPr dirty="0"/>
           </a:p>
         </p:txBody>
       </p:sp>
@@ -16173,4 +15367,251 @@
     </a:ext>
   </a:extLst>
 </a:theme>
+</file>
+
+<file path=customXml/item1.xml><?xml version="1.0" encoding="utf-8"?>
+<ct:contentTypeSchema xmlns:ct="http://schemas.microsoft.com/office/2006/metadata/contentType" xmlns:ma="http://schemas.microsoft.com/office/2006/metadata/properties/metaAttributes" ct:_="" ma:_="" ma:contentTypeName="Document" ma:contentTypeID="0x010100B001542E50B89D40AE1EBFA527192DA3" ma:contentTypeVersion="11" ma:contentTypeDescription="Create a new document." ma:contentTypeScope="" ma:versionID="66410219c5d893a32428c5bae9b2935c">
+  <xsd:schema xmlns:xsd="http://www.w3.org/2001/XMLSchema" xmlns:xs="http://www.w3.org/2001/XMLSchema" xmlns:p="http://schemas.microsoft.com/office/2006/metadata/properties" xmlns:ns3="fbe64a60-71b4-441c-a852-a60e7706294f" targetNamespace="http://schemas.microsoft.com/office/2006/metadata/properties" ma:root="true" ma:fieldsID="e038706fb81639be9a1341e5b30dcd20" ns3:_="">
+    <xsd:import namespace="fbe64a60-71b4-441c-a852-a60e7706294f"/>
+    <xsd:element name="properties">
+      <xsd:complexType>
+        <xsd:sequence>
+          <xsd:element name="documentManagement">
+            <xsd:complexType>
+              <xsd:all>
+                <xsd:element ref="ns3:MediaServiceDateTaken" minOccurs="0"/>
+                <xsd:element ref="ns3:MediaServiceMetadata" minOccurs="0"/>
+                <xsd:element ref="ns3:MediaServiceFastMetadata" minOccurs="0"/>
+                <xsd:element ref="ns3:MediaServiceSearchProperties" minOccurs="0"/>
+                <xsd:element ref="ns3:MediaServiceObjectDetectorVersions" minOccurs="0"/>
+                <xsd:element ref="ns3:MediaServiceSystemTags" minOccurs="0"/>
+                <xsd:element ref="ns3:MediaServiceOCR" minOccurs="0"/>
+                <xsd:element ref="ns3:MediaServiceGenerationTime" minOccurs="0"/>
+                <xsd:element ref="ns3:MediaServiceEventHashCode" minOccurs="0"/>
+                <xsd:element ref="ns3:MediaLengthInSeconds" minOccurs="0"/>
+                <xsd:element ref="ns3:_activity" minOccurs="0"/>
+              </xsd:all>
+            </xsd:complexType>
+          </xsd:element>
+        </xsd:sequence>
+      </xsd:complexType>
+    </xsd:element>
+  </xsd:schema>
+  <xsd:schema xmlns:xsd="http://www.w3.org/2001/XMLSchema" xmlns:xs="http://www.w3.org/2001/XMLSchema" xmlns:dms="http://schemas.microsoft.com/office/2006/documentManagement/types" xmlns:pc="http://schemas.microsoft.com/office/infopath/2007/PartnerControls" targetNamespace="fbe64a60-71b4-441c-a852-a60e7706294f" elementFormDefault="qualified">
+    <xsd:import namespace="http://schemas.microsoft.com/office/2006/documentManagement/types"/>
+    <xsd:import namespace="http://schemas.microsoft.com/office/infopath/2007/PartnerControls"/>
+    <xsd:element name="MediaServiceDateTaken" ma:index="8" nillable="true" ma:displayName="MediaServiceDateTaken" ma:hidden="true" ma:indexed="true" ma:internalName="MediaServiceDateTaken" ma:readOnly="true">
+      <xsd:simpleType>
+        <xsd:restriction base="dms:Text"/>
+      </xsd:simpleType>
+    </xsd:element>
+    <xsd:element name="MediaServiceMetadata" ma:index="9" nillable="true" ma:displayName="MediaServiceMetadata" ma:hidden="true" ma:internalName="MediaServiceMetadata" ma:readOnly="true">
+      <xsd:simpleType>
+        <xsd:restriction base="dms:Note"/>
+      </xsd:simpleType>
+    </xsd:element>
+    <xsd:element name="MediaServiceFastMetadata" ma:index="10" nillable="true" ma:displayName="MediaServiceFastMetadata" ma:hidden="true" ma:internalName="MediaServiceFastMetadata" ma:readOnly="true">
+      <xsd:simpleType>
+        <xsd:restriction base="dms:Note"/>
+      </xsd:simpleType>
+    </xsd:element>
+    <xsd:element name="MediaServiceSearchProperties" ma:index="11" nillable="true" ma:displayName="MediaServiceSearchProperties" ma:hidden="true" ma:internalName="MediaServiceSearchProperties" ma:readOnly="true">
+      <xsd:simpleType>
+        <xsd:restriction base="dms:Note"/>
+      </xsd:simpleType>
+    </xsd:element>
+    <xsd:element name="MediaServiceObjectDetectorVersions" ma:index="12" nillable="true" ma:displayName="MediaServiceObjectDetectorVersions" ma:hidden="true" ma:indexed="true" ma:internalName="MediaServiceObjectDetectorVersions" ma:readOnly="true">
+      <xsd:simpleType>
+        <xsd:restriction base="dms:Text"/>
+      </xsd:simpleType>
+    </xsd:element>
+    <xsd:element name="MediaServiceSystemTags" ma:index="13" nillable="true" ma:displayName="MediaServiceSystemTags" ma:hidden="true" ma:internalName="MediaServiceSystemTags" ma:readOnly="true">
+      <xsd:simpleType>
+        <xsd:restriction base="dms:Note"/>
+      </xsd:simpleType>
+    </xsd:element>
+    <xsd:element name="MediaServiceOCR" ma:index="14" nillable="true" ma:displayName="Extracted Text" ma:internalName="MediaServiceOCR" ma:readOnly="true">
+      <xsd:simpleType>
+        <xsd:restriction base="dms:Note">
+          <xsd:maxLength value="255"/>
+        </xsd:restriction>
+      </xsd:simpleType>
+    </xsd:element>
+    <xsd:element name="MediaServiceGenerationTime" ma:index="15" nillable="true" ma:displayName="MediaServiceGenerationTime" ma:hidden="true" ma:internalName="MediaServiceGenerationTime" ma:readOnly="true">
+      <xsd:simpleType>
+        <xsd:restriction base="dms:Text"/>
+      </xsd:simpleType>
+    </xsd:element>
+    <xsd:element name="MediaServiceEventHashCode" ma:index="16" nillable="true" ma:displayName="MediaServiceEventHashCode" ma:hidden="true" ma:internalName="MediaServiceEventHashCode" ma:readOnly="true">
+      <xsd:simpleType>
+        <xsd:restriction base="dms:Text"/>
+      </xsd:simpleType>
+    </xsd:element>
+    <xsd:element name="MediaLengthInSeconds" ma:index="17" nillable="true" ma:displayName="MediaLengthInSeconds" ma:hidden="true" ma:internalName="MediaLengthInSeconds" ma:readOnly="true">
+      <xsd:simpleType>
+        <xsd:restriction base="dms:Unknown"/>
+      </xsd:simpleType>
+    </xsd:element>
+    <xsd:element name="_activity" ma:index="18" nillable="true" ma:displayName="_activity" ma:hidden="true" ma:internalName="_activity">
+      <xsd:simpleType>
+        <xsd:restriction base="dms:Note"/>
+      </xsd:simpleType>
+    </xsd:element>
+  </xsd:schema>
+  <xsd:schema xmlns="http://schemas.openxmlformats.org/package/2006/metadata/core-properties" xmlns:xsd="http://www.w3.org/2001/XMLSchema" xmlns:xsi="http://www.w3.org/2001/XMLSchema-instance" xmlns:dc="http://purl.org/dc/elements/1.1/" xmlns:dcterms="http://purl.org/dc/terms/" xmlns:odoc="http://schemas.microsoft.com/internal/obd" targetNamespace="http://schemas.openxmlformats.org/package/2006/metadata/core-properties" elementFormDefault="qualified" attributeFormDefault="unqualified" blockDefault="#all">
+    <xsd:import namespace="http://purl.org/dc/elements/1.1/" schemaLocation="http://dublincore.org/schemas/xmls/qdc/2003/04/02/dc.xsd"/>
+    <xsd:import namespace="http://purl.org/dc/terms/" schemaLocation="http://dublincore.org/schemas/xmls/qdc/2003/04/02/dcterms.xsd"/>
+    <xsd:element name="coreProperties" type="CT_coreProperties"/>
+    <xsd:complexType name="CT_coreProperties">
+      <xsd:all>
+        <xsd:element ref="dc:creator" minOccurs="0" maxOccurs="1"/>
+        <xsd:element ref="dcterms:created" minOccurs="0" maxOccurs="1"/>
+        <xsd:element ref="dc:identifier" minOccurs="0" maxOccurs="1"/>
+        <xsd:element name="contentType" minOccurs="0" maxOccurs="1" type="xsd:string" ma:index="0" ma:displayName="Content Type"/>
+        <xsd:element ref="dc:title" minOccurs="0" maxOccurs="1" ma:index="4" ma:displayName="Title"/>
+        <xsd:element ref="dc:subject" minOccurs="0" maxOccurs="1"/>
+        <xsd:element ref="dc:description" minOccurs="0" maxOccurs="1"/>
+        <xsd:element name="keywords" minOccurs="0" maxOccurs="1" type="xsd:string"/>
+        <xsd:element ref="dc:language" minOccurs="0" maxOccurs="1"/>
+        <xsd:element name="category" minOccurs="0" maxOccurs="1" type="xsd:string"/>
+        <xsd:element name="version" minOccurs="0" maxOccurs="1" type="xsd:string"/>
+        <xsd:element name="revision" minOccurs="0" maxOccurs="1" type="xsd:string">
+          <xsd:annotation>
+            <xsd:documentation>
+                        This value indicates the number of saves or revisions. The application is responsible for updating this value after each revision.
+                    </xsd:documentation>
+          </xsd:annotation>
+        </xsd:element>
+        <xsd:element name="lastModifiedBy" minOccurs="0" maxOccurs="1" type="xsd:string"/>
+        <xsd:element ref="dcterms:modified" minOccurs="0" maxOccurs="1"/>
+        <xsd:element name="contentStatus" minOccurs="0" maxOccurs="1" type="xsd:string"/>
+      </xsd:all>
+    </xsd:complexType>
+  </xsd:schema>
+  <xs:schema xmlns:pc="http://schemas.microsoft.com/office/infopath/2007/PartnerControls" xmlns:xs="http://www.w3.org/2001/XMLSchema" targetNamespace="http://schemas.microsoft.com/office/infopath/2007/PartnerControls" elementFormDefault="qualified" attributeFormDefault="unqualified">
+    <xs:element name="Person">
+      <xs:complexType>
+        <xs:sequence>
+          <xs:element ref="pc:DisplayName" minOccurs="0"/>
+          <xs:element ref="pc:AccountId" minOccurs="0"/>
+          <xs:element ref="pc:AccountType" minOccurs="0"/>
+        </xs:sequence>
+      </xs:complexType>
+    </xs:element>
+    <xs:element name="DisplayName" type="xs:string"/>
+    <xs:element name="AccountId" type="xs:string"/>
+    <xs:element name="AccountType" type="xs:string"/>
+    <xs:element name="BDCAssociatedEntity">
+      <xs:complexType>
+        <xs:sequence>
+          <xs:element ref="pc:BDCEntity" minOccurs="0" maxOccurs="unbounded"/>
+        </xs:sequence>
+        <xs:attribute ref="pc:EntityNamespace"/>
+        <xs:attribute ref="pc:EntityName"/>
+        <xs:attribute ref="pc:SystemInstanceName"/>
+        <xs:attribute ref="pc:AssociationName"/>
+      </xs:complexType>
+    </xs:element>
+    <xs:attribute name="EntityNamespace" type="xs:string"/>
+    <xs:attribute name="EntityName" type="xs:string"/>
+    <xs:attribute name="SystemInstanceName" type="xs:string"/>
+    <xs:attribute name="AssociationName" type="xs:string"/>
+    <xs:element name="BDCEntity">
+      <xs:complexType>
+        <xs:sequence>
+          <xs:element ref="pc:EntityDisplayName" minOccurs="0"/>
+          <xs:element ref="pc:EntityInstanceReference" minOccurs="0"/>
+          <xs:element ref="pc:EntityId1" minOccurs="0"/>
+          <xs:element ref="pc:EntityId2" minOccurs="0"/>
+          <xs:element ref="pc:EntityId3" minOccurs="0"/>
+          <xs:element ref="pc:EntityId4" minOccurs="0"/>
+          <xs:element ref="pc:EntityId5" minOccurs="0"/>
+        </xs:sequence>
+      </xs:complexType>
+    </xs:element>
+    <xs:element name="EntityDisplayName" type="xs:string"/>
+    <xs:element name="EntityInstanceReference" type="xs:string"/>
+    <xs:element name="EntityId1" type="xs:string"/>
+    <xs:element name="EntityId2" type="xs:string"/>
+    <xs:element name="EntityId3" type="xs:string"/>
+    <xs:element name="EntityId4" type="xs:string"/>
+    <xs:element name="EntityId5" type="xs:string"/>
+    <xs:element name="Terms">
+      <xs:complexType>
+        <xs:sequence>
+          <xs:element ref="pc:TermInfo" minOccurs="0" maxOccurs="unbounded"/>
+        </xs:sequence>
+      </xs:complexType>
+    </xs:element>
+    <xs:element name="TermInfo">
+      <xs:complexType>
+        <xs:sequence>
+          <xs:element ref="pc:TermName" minOccurs="0"/>
+          <xs:element ref="pc:TermId" minOccurs="0"/>
+        </xs:sequence>
+      </xs:complexType>
+    </xs:element>
+    <xs:element name="TermName" type="xs:string"/>
+    <xs:element name="TermId" type="xs:string"/>
+  </xs:schema>
+</ct:contentTypeSchema>
+</file>
+
+<file path=customXml/item2.xml><?xml version="1.0" encoding="utf-8"?>
+<?mso-contentType ?>
+<FormTemplates xmlns="http://schemas.microsoft.com/sharepoint/v3/contenttype/forms">
+  <Display>DocumentLibraryForm</Display>
+  <Edit>DocumentLibraryForm</Edit>
+  <New>DocumentLibraryForm</New>
+</FormTemplates>
+</file>
+
+<file path=customXml/item3.xml><?xml version="1.0" encoding="utf-8"?>
+<p:properties xmlns:p="http://schemas.microsoft.com/office/2006/metadata/properties" xmlns:xsi="http://www.w3.org/2001/XMLSchema-instance" xmlns:pc="http://schemas.microsoft.com/office/infopath/2007/PartnerControls">
+  <documentManagement>
+    <_activity xmlns="fbe64a60-71b4-441c-a852-a60e7706294f" xsi:nil="true"/>
+  </documentManagement>
+</p:properties>
+</file>
+
+<file path=customXml/itemProps1.xml><?xml version="1.0" encoding="utf-8"?>
+<ds:datastoreItem xmlns:ds="http://schemas.openxmlformats.org/officeDocument/2006/customXml" ds:itemID="{FE8E4D8A-AC71-459A-838D-EF6869A9D529}">
+  <ds:schemaRefs>
+    <ds:schemaRef ds:uri="http://schemas.microsoft.com/office/2006/metadata/contentType"/>
+    <ds:schemaRef ds:uri="http://schemas.microsoft.com/office/2006/metadata/properties/metaAttributes"/>
+    <ds:schemaRef ds:uri="http://www.w3.org/2001/XMLSchema"/>
+    <ds:schemaRef ds:uri="http://schemas.microsoft.com/office/2006/metadata/properties"/>
+    <ds:schemaRef ds:uri="fbe64a60-71b4-441c-a852-a60e7706294f"/>
+    <ds:schemaRef ds:uri="http://schemas.microsoft.com/office/2006/documentManagement/types"/>
+    <ds:schemaRef ds:uri="http://schemas.microsoft.com/office/infopath/2007/PartnerControls"/>
+    <ds:schemaRef ds:uri="http://schemas.openxmlformats.org/package/2006/metadata/core-properties"/>
+    <ds:schemaRef ds:uri="http://purl.org/dc/elements/1.1/"/>
+    <ds:schemaRef ds:uri="http://purl.org/dc/terms/"/>
+    <ds:schemaRef ds:uri="http://schemas.microsoft.com/internal/obd"/>
+  </ds:schemaRefs>
+</ds:datastoreItem>
+</file>
+
+<file path=customXml/itemProps2.xml><?xml version="1.0" encoding="utf-8"?>
+<ds:datastoreItem xmlns:ds="http://schemas.openxmlformats.org/officeDocument/2006/customXml" ds:itemID="{5AD51B3A-BE2F-4700-9B35-EECF2C1ED49F}">
+  <ds:schemaRefs>
+    <ds:schemaRef ds:uri="http://schemas.microsoft.com/sharepoint/v3/contenttype/forms"/>
+  </ds:schemaRefs>
+</ds:datastoreItem>
+</file>
+
+<file path=customXml/itemProps3.xml><?xml version="1.0" encoding="utf-8"?>
+<ds:datastoreItem xmlns:ds="http://schemas.openxmlformats.org/officeDocument/2006/customXml" ds:itemID="{3542FF5D-69BF-4FB5-A35D-2300EDCAFE6D}">
+  <ds:schemaRefs>
+    <ds:schemaRef ds:uri="http://schemas.microsoft.com/office/2006/documentManagement/types"/>
+    <ds:schemaRef ds:uri="http://schemas.openxmlformats.org/package/2006/metadata/core-properties"/>
+    <ds:schemaRef ds:uri="fbe64a60-71b4-441c-a852-a60e7706294f"/>
+    <ds:schemaRef ds:uri="http://purl.org/dc/elements/1.1/"/>
+    <ds:schemaRef ds:uri="http://schemas.microsoft.com/office/2006/metadata/properties"/>
+    <ds:schemaRef ds:uri="http://www.w3.org/XML/1998/namespace"/>
+    <ds:schemaRef ds:uri="http://purl.org/dc/dcmitype/"/>
+    <ds:schemaRef ds:uri="http://schemas.microsoft.com/office/infopath/2007/PartnerControls"/>
+    <ds:schemaRef ds:uri="http://purl.org/dc/terms/"/>
+  </ds:schemaRefs>
+</ds:datastoreItem>
 </file>